--- a/assets/powerpoints/module-n6-recherche/B1-lisons-l-offre-au-complet.pptx
+++ b/assets/powerpoints/module-n6-recherche/B1-lisons-l-offre-au-complet.pptx
@@ -16,6 +16,8 @@
     <p:sldId id="264" r:id="rId16"/>
     <p:sldId id="265" r:id="rId17"/>
     <p:sldId id="266" r:id="rId18"/>
+    <p:sldId id="267" r:id="rId19"/>
+    <p:sldId id="268" r:id="rId20"/>
   </p:sldIdLst>
   <p:sldSz cx="12191695" cy="6858000" type="screen4x3"/>
   <p:notesSz cx="6858000" cy="9144000"/>
@@ -582,7 +584,7 @@
           <a:lstStyle/>
           <a:p>
             <a:r>
-              <a:t>Corriger en groupe. Donner la bonne réponse, sans revenir sur qui s'est trompé.</a:t>
+              <a:t>Diapositive à photographier. Le lien avec la lettre de motivation du bloc C se fait ici.</a:t>
             </a:r>
           </a:p>
         </p:txBody>
@@ -652,6 +654,146 @@
           <a:lstStyle/>
           <a:p>
             <a:r>
+              <a:t>Faire justifier chaque réponse par la ligne exacte de l'offre.</a:t>
+            </a:r>
+          </a:p>
+        </p:txBody>
+      </p:sp>
+      <p:sp>
+        <p:nvSpPr>
+          <p:cNvPr id="4" name="Slide Number Placeholder 3"/>
+          <p:cNvSpPr>
+            <a:spLocks noGrp="1"/>
+          </p:cNvSpPr>
+          <p:nvPr>
+            <p:ph type="sldNum" idx="5" sz="quarter"/>
+          </p:nvPr>
+        </p:nvSpPr>
+        <p:spPr/>
+      </p:sp>
+    </p:spTree>
+  </p:cSld>
+  <p:clrMapOvr>
+    <a:masterClrMapping/>
+  </p:clrMapOvr>
+</p:notes>
+</file>
+
+<file path=ppt/notesSlides/notesSlide12.xml><?xml version="1.0" encoding="utf-8"?>
+<p:notes xmlns:a="http://schemas.openxmlformats.org/drawingml/2006/main" xmlns:p="http://schemas.openxmlformats.org/presentationml/2006/main" xmlns:r="http://schemas.openxmlformats.org/officeDocument/2006/relationships">
+  <p:cSld>
+    <p:spTree>
+      <p:nvGrpSpPr>
+        <p:cNvPr id="1" name=""/>
+        <p:cNvGrpSpPr/>
+        <p:nvPr/>
+      </p:nvGrpSpPr>
+      <p:grpSpPr>
+        <a:xfrm>
+          <a:off x="0" y="0"/>
+          <a:ext cx="0" cy="0"/>
+          <a:chOff x="0" y="0"/>
+          <a:chExt cx="0" cy="0"/>
+        </a:xfrm>
+      </p:grpSpPr>
+      <p:sp>
+        <p:nvSpPr>
+          <p:cNvPr id="2" name="Slide Image Placeholder 1"/>
+          <p:cNvSpPr>
+            <a:spLocks noGrp="1"/>
+          </p:cNvSpPr>
+          <p:nvPr>
+            <p:ph type="sldImg" idx="2"/>
+          </p:nvPr>
+        </p:nvSpPr>
+        <p:spPr/>
+      </p:sp>
+      <p:sp>
+        <p:nvSpPr>
+          <p:cNvPr id="3" name="Notes Placeholder 2"/>
+          <p:cNvSpPr>
+            <a:spLocks noGrp="1"/>
+          </p:cNvSpPr>
+          <p:nvPr>
+            <p:ph type="body" idx="3" sz="quarter"/>
+          </p:nvPr>
+        </p:nvSpPr>
+        <p:spPr/>
+        <p:txBody>
+          <a:bodyPr/>
+          <a:lstStyle/>
+          <a:p>
+            <a:r>
+              <a:t>Corriger en groupe. Donner la bonne réponse, sans revenir sur qui s'est trompé.</a:t>
+            </a:r>
+          </a:p>
+        </p:txBody>
+      </p:sp>
+      <p:sp>
+        <p:nvSpPr>
+          <p:cNvPr id="4" name="Slide Number Placeholder 3"/>
+          <p:cNvSpPr>
+            <a:spLocks noGrp="1"/>
+          </p:cNvSpPr>
+          <p:nvPr>
+            <p:ph type="sldNum" idx="5" sz="quarter"/>
+          </p:nvPr>
+        </p:nvSpPr>
+        <p:spPr/>
+      </p:sp>
+    </p:spTree>
+  </p:cSld>
+  <p:clrMapOvr>
+    <a:masterClrMapping/>
+  </p:clrMapOvr>
+</p:notes>
+</file>
+
+<file path=ppt/notesSlides/notesSlide13.xml><?xml version="1.0" encoding="utf-8"?>
+<p:notes xmlns:a="http://schemas.openxmlformats.org/drawingml/2006/main" xmlns:p="http://schemas.openxmlformats.org/presentationml/2006/main" xmlns:r="http://schemas.openxmlformats.org/officeDocument/2006/relationships">
+  <p:cSld>
+    <p:spTree>
+      <p:nvGrpSpPr>
+        <p:cNvPr id="1" name=""/>
+        <p:cNvGrpSpPr/>
+        <p:nvPr/>
+      </p:nvGrpSpPr>
+      <p:grpSpPr>
+        <a:xfrm>
+          <a:off x="0" y="0"/>
+          <a:ext cx="0" cy="0"/>
+          <a:chOff x="0" y="0"/>
+          <a:chExt cx="0" cy="0"/>
+        </a:xfrm>
+      </p:grpSpPr>
+      <p:sp>
+        <p:nvSpPr>
+          <p:cNvPr id="2" name="Slide Image Placeholder 1"/>
+          <p:cNvSpPr>
+            <a:spLocks noGrp="1"/>
+          </p:cNvSpPr>
+          <p:nvPr>
+            <p:ph type="sldImg" idx="2"/>
+          </p:nvPr>
+        </p:nvSpPr>
+        <p:spPr/>
+      </p:sp>
+      <p:sp>
+        <p:nvSpPr>
+          <p:cNvPr id="3" name="Notes Placeholder 2"/>
+          <p:cNvSpPr>
+            <a:spLocks noGrp="1"/>
+          </p:cNvSpPr>
+          <p:nvPr>
+            <p:ph type="body" idx="3" sz="quarter"/>
+          </p:nvPr>
+        </p:nvSpPr>
+        <p:spPr/>
+        <p:txBody>
+          <a:bodyPr/>
+          <a:lstStyle/>
+          <a:p>
+            <a:r>
               <a:t>Une offre sans conditions écrites est fréquente. Ce n'est pas suspect, mais c'est une question à préparer.</a:t>
             </a:r>
           </a:p>
@@ -1072,7 +1214,7 @@
           <a:lstStyle/>
           <a:p>
             <a:r>
-              <a:t>Diapositive à photographier. C'est la grille de lecture du bloc B entier.</a:t>
+              <a:t>Le tableau qui suit nomme les quatre parties : les faire trouver d'abord ici, au doigt, avant de les nommer. Les six lignes des exigences sont exactement celles de l'exercice `t1exig` du module.</a:t>
             </a:r>
           </a:p>
         </p:txBody>
@@ -1142,7 +1284,7 @@
           <a:lstStyle/>
           <a:p>
             <a:r>
-              <a:t>Diapositive à photographier. Le lien avec la lettre de motivation du bloc C se fait ici.</a:t>
+              <a:t>Suite du document. Laisser le temps de le lire en entier avant de poser la première question.</a:t>
             </a:r>
           </a:p>
         </p:txBody>
@@ -1212,7 +1354,7 @@
           <a:lstStyle/>
           <a:p>
             <a:r>
-              <a:t>Faire justifier chaque réponse par la ligne exacte de l'offre.</a:t>
+              <a:t>Diapositive à photographier. C'est la grille de lecture du bloc B entier.</a:t>
             </a:r>
           </a:p>
         </p:txBody>
@@ -4634,107 +4776,29 @@
                 </a:solidFill>
                 <a:latin typeface="Verdana"/>
               </a:rPr>
-              <a:t>CORRECTION</a:t>
-            </a:r>
-          </a:p>
-        </p:txBody>
-      </p:sp>
-      <p:sp>
-        <p:nvSpPr>
-          <p:cNvPr id="6" name="TextBox 5"/>
-          <p:cNvSpPr txBox="1"/>
-          <p:nvPr/>
-        </p:nvSpPr>
-        <p:spPr>
-          <a:xfrm>
-            <a:off x="566928" y="749808"/>
-            <a:ext cx="11057839" cy="877824"/>
-          </a:xfrm>
-          <a:prstGeom prst="rect">
-            <a:avLst/>
-          </a:prstGeom>
-          <a:noFill/>
-        </p:spPr>
-        <p:txBody>
-          <a:bodyPr wrap="square" lIns="0" rIns="0" tIns="0" bIns="0" anchor="t">
-            <a:spAutoFit/>
-          </a:bodyPr>
-          <a:lstStyle/>
-          <a:p>
-            <a:pPr algn="l">
-              <a:lnSpc>
-                <a:spcPct val="115000"/>
-              </a:lnSpc>
-            </a:pPr>
-            <a:r>
-              <a:rPr sz="3400" b="1" i="0">
-                <a:solidFill>
-                  <a:srgbClr val="17181A"/>
-                </a:solidFill>
-                <a:latin typeface="Verdana"/>
-              </a:rPr>
-              <a:t>Vrai ou faux ?</a:t>
-            </a:r>
-          </a:p>
-        </p:txBody>
-      </p:sp>
-      <p:sp>
-        <p:nvSpPr>
-          <p:cNvPr id="7" name="TextBox 6"/>
-          <p:cNvSpPr txBox="1"/>
-          <p:nvPr/>
-        </p:nvSpPr>
-        <p:spPr>
-          <a:xfrm>
-            <a:off x="566928" y="1645920"/>
-            <a:ext cx="11057839" cy="329184"/>
-          </a:xfrm>
-          <a:prstGeom prst="rect">
-            <a:avLst/>
-          </a:prstGeom>
-          <a:noFill/>
-        </p:spPr>
-        <p:txBody>
-          <a:bodyPr wrap="square" lIns="0" rIns="0" tIns="0" bIns="0" anchor="t">
-            <a:spAutoFit/>
-          </a:bodyPr>
-          <a:lstStyle/>
-          <a:p>
-            <a:pPr algn="l">
-              <a:lnSpc>
-                <a:spcPct val="135000"/>
-              </a:lnSpc>
-            </a:pPr>
-            <a:r>
-              <a:rPr sz="1800" b="0" i="0">
-                <a:solidFill>
-                  <a:srgbClr val="6E7175"/>
-                </a:solidFill>
-                <a:latin typeface="Verdana"/>
-              </a:rPr>
-              <a:t>Correction — on lit la réponse, on ne commente pas l'erreur.</a:t>
-            </a:r>
-          </a:p>
-        </p:txBody>
-      </p:sp>
-      <p:sp>
-        <p:nvSpPr>
-          <p:cNvPr id="8" name="Rounded Rectangle 7"/>
+              <a:t>LES TÂCHES SONT À L'INFINITIF</a:t>
+            </a:r>
+          </a:p>
+        </p:txBody>
+      </p:sp>
+      <p:sp>
+        <p:nvSpPr>
+          <p:cNvPr id="6" name="Rounded Rectangle 5"/>
           <p:cNvSpPr/>
           <p:nvPr/>
         </p:nvSpPr>
         <p:spPr>
           <a:xfrm>
-            <a:off x="566928" y="2139696"/>
-            <a:ext cx="11057839" cy="559816"/>
+            <a:off x="566928" y="1225296"/>
+            <a:ext cx="11057839" cy="1441196"/>
           </a:xfrm>
           <a:prstGeom prst="roundRect">
             <a:avLst>
-              <a:gd name="adj" fmla="val 26134"/>
+              <a:gd name="adj" fmla="val 10151"/>
             </a:avLst>
           </a:prstGeom>
           <a:solidFill>
-            <a:srgbClr val="E6F5EE"/>
+            <a:srgbClr val="E7F0F6"/>
           </a:solidFill>
           <a:ln w="12700">
             <a:solidFill>
@@ -4765,58 +4829,14 @@
       </p:sp>
       <p:sp>
         <p:nvSpPr>
-          <p:cNvPr id="9" name="Rounded Rectangle 8"/>
-          <p:cNvSpPr/>
-          <p:nvPr/>
-        </p:nvSpPr>
-        <p:spPr>
-          <a:xfrm>
-            <a:off x="841247" y="2236724"/>
-            <a:ext cx="365760" cy="365760"/>
-          </a:xfrm>
-          <a:prstGeom prst="roundRect">
-            <a:avLst>
-              <a:gd name="adj" fmla="val 32500"/>
-            </a:avLst>
-          </a:prstGeom>
-          <a:solidFill>
-            <a:srgbClr val="E7F0F6"/>
-          </a:solidFill>
-          <a:ln>
-            <a:noFill/>
-          </a:ln>
-          <a:effectLst/>
-        </p:spPr>
-        <p:style>
-          <a:lnRef idx="1">
-            <a:schemeClr val="accent1"/>
-          </a:lnRef>
-          <a:fillRef idx="3">
-            <a:schemeClr val="accent1"/>
-          </a:fillRef>
-          <a:effectRef idx="2">
-            <a:schemeClr val="accent1"/>
-          </a:effectRef>
-          <a:fontRef idx="minor">
-            <a:schemeClr val="lt1"/>
-          </a:fontRef>
-        </p:style>
-        <p:txBody>
-          <a:bodyPr rtlCol="0" anchor="ctr"/>
-          <a:lstStyle/>
-          <a:p/>
-        </p:txBody>
-      </p:sp>
-      <p:sp>
-        <p:nvSpPr>
-          <p:cNvPr id="10" name="TextBox 9"/>
+          <p:cNvPr id="7" name="TextBox 6"/>
           <p:cNvSpPr txBox="1"/>
           <p:nvPr/>
         </p:nvSpPr>
         <p:spPr>
           <a:xfrm>
-            <a:off x="841247" y="2300732"/>
-            <a:ext cx="365760" cy="256032"/>
+            <a:off x="1298448" y="1682496"/>
+            <a:ext cx="9594799" cy="618235"/>
           </a:xfrm>
           <a:prstGeom prst="rect">
             <a:avLst/>
@@ -4829,89 +4849,41 @@
           </a:bodyPr>
           <a:lstStyle/>
           <a:p>
-            <a:pPr algn="ctr">
+            <a:pPr algn="l">
               <a:lnSpc>
-                <a:spcPct val="135000"/>
+                <a:spcPct val="122000"/>
               </a:lnSpc>
             </a:pPr>
             <a:r>
-              <a:rPr sz="1500" b="1" i="0">
-                <a:solidFill>
-                  <a:srgbClr val="1D6B8F"/>
+              <a:rPr sz="3400" b="1" i="0">
+                <a:solidFill>
+                  <a:srgbClr val="17181A"/>
                 </a:solidFill>
                 <a:latin typeface="Verdana"/>
               </a:rPr>
-              <a:t>1</a:t>
-            </a:r>
-          </a:p>
-        </p:txBody>
-      </p:sp>
-      <p:sp>
-        <p:nvSpPr>
-          <p:cNvPr id="11" name="TextBox 10"/>
-          <p:cNvSpPr txBox="1"/>
-          <p:nvPr/>
-        </p:nvSpPr>
-        <p:spPr>
-          <a:xfrm>
-            <a:off x="1344168" y="2295144"/>
-            <a:ext cx="10097719" cy="285496"/>
-          </a:xfrm>
-          <a:prstGeom prst="rect">
-            <a:avLst/>
-          </a:prstGeom>
-          <a:noFill/>
-        </p:spPr>
-        <p:txBody>
-          <a:bodyPr wrap="square" lIns="0" rIns="0" tIns="0" bIns="0" anchor="t">
-            <a:spAutoFit/>
-          </a:bodyPr>
-          <a:lstStyle/>
-          <a:p>
-            <a:pPr algn="l">
-              <a:lnSpc>
-                <a:spcPct val="140000"/>
-              </a:lnSpc>
-            </a:pPr>
-            <a:r>
-              <a:rPr sz="1400" b="0" i="0">
-                <a:solidFill>
-                  <a:srgbClr val="3A3D40"/>
-                </a:solidFill>
-                <a:latin typeface="Verdana"/>
-              </a:rPr>
-              <a:t>Boisverte fabrique des meubles depuis 1998.   </a:t>
-            </a:r>
-            <a:r>
-              <a:rPr sz="1400" b="1" i="0">
-                <a:solidFill>
-                  <a:srgbClr val="07734A"/>
-                </a:solidFill>
-                <a:latin typeface="Verdana"/>
-              </a:rPr>
-              <a:t>» vrai</a:t>
-            </a:r>
-          </a:p>
-        </p:txBody>
-      </p:sp>
-      <p:sp>
-        <p:nvSpPr>
-          <p:cNvPr id="12" name="Rounded Rectangle 11"/>
+              <a:t>Tenir, recevoir, préparer, signaler.</a:t>
+            </a:r>
+          </a:p>
+        </p:txBody>
+      </p:sp>
+      <p:sp>
+        <p:nvSpPr>
+          <p:cNvPr id="8" name="Rounded Rectangle 7"/>
           <p:cNvSpPr/>
           <p:nvPr/>
         </p:nvSpPr>
         <p:spPr>
           <a:xfrm>
-            <a:off x="566928" y="2827528"/>
-            <a:ext cx="11057839" cy="559816"/>
+            <a:off x="566928" y="2940812"/>
+            <a:ext cx="11057839" cy="2040128"/>
           </a:xfrm>
           <a:prstGeom prst="roundRect">
             <a:avLst>
-              <a:gd name="adj" fmla="val 26134"/>
+              <a:gd name="adj" fmla="val 7171"/>
             </a:avLst>
           </a:prstGeom>
           <a:solidFill>
-            <a:srgbClr val="E6F5EE"/>
+            <a:srgbClr val="FFFFFF"/>
           </a:solidFill>
           <a:ln w="12700">
             <a:solidFill>
@@ -4942,58 +4914,14 @@
       </p:sp>
       <p:sp>
         <p:nvSpPr>
-          <p:cNvPr id="13" name="Rounded Rectangle 12"/>
-          <p:cNvSpPr/>
-          <p:nvPr/>
-        </p:nvSpPr>
-        <p:spPr>
-          <a:xfrm>
-            <a:off x="841247" y="2924556"/>
-            <a:ext cx="365760" cy="365760"/>
-          </a:xfrm>
-          <a:prstGeom prst="roundRect">
-            <a:avLst>
-              <a:gd name="adj" fmla="val 32500"/>
-            </a:avLst>
-          </a:prstGeom>
-          <a:solidFill>
-            <a:srgbClr val="E7F0F6"/>
-          </a:solidFill>
-          <a:ln>
-            <a:noFill/>
-          </a:ln>
-          <a:effectLst/>
-        </p:spPr>
-        <p:style>
-          <a:lnRef idx="1">
-            <a:schemeClr val="accent1"/>
-          </a:lnRef>
-          <a:fillRef idx="3">
-            <a:schemeClr val="accent1"/>
-          </a:fillRef>
-          <a:effectRef idx="2">
-            <a:schemeClr val="accent1"/>
-          </a:effectRef>
-          <a:fontRef idx="minor">
-            <a:schemeClr val="lt1"/>
-          </a:fontRef>
-        </p:style>
-        <p:txBody>
-          <a:bodyPr rtlCol="0" anchor="ctr"/>
-          <a:lstStyle/>
-          <a:p/>
-        </p:txBody>
-      </p:sp>
-      <p:sp>
-        <p:nvSpPr>
-          <p:cNvPr id="14" name="TextBox 13"/>
+          <p:cNvPr id="9" name="TextBox 8"/>
           <p:cNvSpPr txBox="1"/>
           <p:nvPr/>
         </p:nvSpPr>
         <p:spPr>
           <a:xfrm>
-            <a:off x="841247" y="2988564"/>
-            <a:ext cx="365760" cy="256032"/>
+            <a:off x="969264" y="3215132"/>
+            <a:ext cx="10234879" cy="1582928"/>
           </a:xfrm>
           <a:prstGeom prst="rect">
             <a:avLst/>
@@ -5006,775 +4934,19 @@
           </a:bodyPr>
           <a:lstStyle/>
           <a:p>
-            <a:pPr algn="ctr">
+            <a:pPr algn="l">
               <a:lnSpc>
-                <a:spcPct val="135000"/>
+                <a:spcPct val="145000"/>
               </a:lnSpc>
             </a:pPr>
             <a:r>
-              <a:rPr sz="1500" b="1" i="0">
-                <a:solidFill>
-                  <a:srgbClr val="1D6B8F"/>
+              <a:rPr sz="2000" b="0" i="0">
+                <a:solidFill>
+                  <a:srgbClr val="4B4F52"/>
                 </a:solidFill>
                 <a:latin typeface="Verdana"/>
               </a:rPr>
-              <a:t>2</a:t>
-            </a:r>
-          </a:p>
-        </p:txBody>
-      </p:sp>
-      <p:sp>
-        <p:nvSpPr>
-          <p:cNvPr id="15" name="TextBox 14"/>
-          <p:cNvSpPr txBox="1"/>
-          <p:nvPr/>
-        </p:nvSpPr>
-        <p:spPr>
-          <a:xfrm>
-            <a:off x="1344168" y="2982975"/>
-            <a:ext cx="10097719" cy="285496"/>
-          </a:xfrm>
-          <a:prstGeom prst="rect">
-            <a:avLst/>
-          </a:prstGeom>
-          <a:noFill/>
-        </p:spPr>
-        <p:txBody>
-          <a:bodyPr wrap="square" lIns="0" rIns="0" tIns="0" bIns="0" anchor="t">
-            <a:spAutoFit/>
-          </a:bodyPr>
-          <a:lstStyle/>
-          <a:p>
-            <a:pPr algn="l">
-              <a:lnSpc>
-                <a:spcPct val="140000"/>
-              </a:lnSpc>
-            </a:pPr>
-            <a:r>
-              <a:rPr sz="1400" b="0" i="0">
-                <a:solidFill>
-                  <a:srgbClr val="3A3D40"/>
-                </a:solidFill>
-                <a:latin typeface="Verdana"/>
-              </a:rPr>
-              <a:t>« Signaler les écarts » est une des tâches.   </a:t>
-            </a:r>
-            <a:r>
-              <a:rPr sz="1400" b="1" i="0">
-                <a:solidFill>
-                  <a:srgbClr val="07734A"/>
-                </a:solidFill>
-                <a:latin typeface="Verdana"/>
-              </a:rPr>
-              <a:t>» vrai</a:t>
-            </a:r>
-          </a:p>
-        </p:txBody>
-      </p:sp>
-      <p:sp>
-        <p:nvSpPr>
-          <p:cNvPr id="16" name="Rounded Rectangle 15"/>
-          <p:cNvSpPr/>
-          <p:nvPr/>
-        </p:nvSpPr>
-        <p:spPr>
-          <a:xfrm>
-            <a:off x="566928" y="3515359"/>
-            <a:ext cx="11057839" cy="559816"/>
-          </a:xfrm>
-          <a:prstGeom prst="roundRect">
-            <a:avLst>
-              <a:gd name="adj" fmla="val 26134"/>
-            </a:avLst>
-          </a:prstGeom>
-          <a:solidFill>
-            <a:srgbClr val="E6F5EE"/>
-          </a:solidFill>
-          <a:ln w="12700">
-            <a:solidFill>
-              <a:srgbClr val="EAEAE8"/>
-            </a:solidFill>
-          </a:ln>
-          <a:effectLst/>
-        </p:spPr>
-        <p:style>
-          <a:lnRef idx="1">
-            <a:schemeClr val="accent1"/>
-          </a:lnRef>
-          <a:fillRef idx="3">
-            <a:schemeClr val="accent1"/>
-          </a:fillRef>
-          <a:effectRef idx="2">
-            <a:schemeClr val="accent1"/>
-          </a:effectRef>
-          <a:fontRef idx="minor">
-            <a:schemeClr val="lt1"/>
-          </a:fontRef>
-        </p:style>
-        <p:txBody>
-          <a:bodyPr rtlCol="0" anchor="ctr"/>
-          <a:lstStyle/>
-          <a:p/>
-        </p:txBody>
-      </p:sp>
-      <p:sp>
-        <p:nvSpPr>
-          <p:cNvPr id="17" name="Rounded Rectangle 16"/>
-          <p:cNvSpPr/>
-          <p:nvPr/>
-        </p:nvSpPr>
-        <p:spPr>
-          <a:xfrm>
-            <a:off x="841247" y="3612388"/>
-            <a:ext cx="365760" cy="365760"/>
-          </a:xfrm>
-          <a:prstGeom prst="roundRect">
-            <a:avLst>
-              <a:gd name="adj" fmla="val 32500"/>
-            </a:avLst>
-          </a:prstGeom>
-          <a:solidFill>
-            <a:srgbClr val="E7F0F6"/>
-          </a:solidFill>
-          <a:ln>
-            <a:noFill/>
-          </a:ln>
-          <a:effectLst/>
-        </p:spPr>
-        <p:style>
-          <a:lnRef idx="1">
-            <a:schemeClr val="accent1"/>
-          </a:lnRef>
-          <a:fillRef idx="3">
-            <a:schemeClr val="accent1"/>
-          </a:fillRef>
-          <a:effectRef idx="2">
-            <a:schemeClr val="accent1"/>
-          </a:effectRef>
-          <a:fontRef idx="minor">
-            <a:schemeClr val="lt1"/>
-          </a:fontRef>
-        </p:style>
-        <p:txBody>
-          <a:bodyPr rtlCol="0" anchor="ctr"/>
-          <a:lstStyle/>
-          <a:p/>
-        </p:txBody>
-      </p:sp>
-      <p:sp>
-        <p:nvSpPr>
-          <p:cNvPr id="18" name="TextBox 17"/>
-          <p:cNvSpPr txBox="1"/>
-          <p:nvPr/>
-        </p:nvSpPr>
-        <p:spPr>
-          <a:xfrm>
-            <a:off x="841247" y="3676395"/>
-            <a:ext cx="365760" cy="256032"/>
-          </a:xfrm>
-          <a:prstGeom prst="rect">
-            <a:avLst/>
-          </a:prstGeom>
-          <a:noFill/>
-        </p:spPr>
-        <p:txBody>
-          <a:bodyPr wrap="square" lIns="0" rIns="0" tIns="0" bIns="0" anchor="t">
-            <a:spAutoFit/>
-          </a:bodyPr>
-          <a:lstStyle/>
-          <a:p>
-            <a:pPr algn="ctr">
-              <a:lnSpc>
-                <a:spcPct val="135000"/>
-              </a:lnSpc>
-            </a:pPr>
-            <a:r>
-              <a:rPr sz="1500" b="1" i="0">
-                <a:solidFill>
-                  <a:srgbClr val="1D6B8F"/>
-                </a:solidFill>
-                <a:latin typeface="Verdana"/>
-              </a:rPr>
-              <a:t>3</a:t>
-            </a:r>
-          </a:p>
-        </p:txBody>
-      </p:sp>
-      <p:sp>
-        <p:nvSpPr>
-          <p:cNvPr id="19" name="TextBox 18"/>
-          <p:cNvSpPr txBox="1"/>
-          <p:nvPr/>
-        </p:nvSpPr>
-        <p:spPr>
-          <a:xfrm>
-            <a:off x="1344168" y="3670807"/>
-            <a:ext cx="10097719" cy="285496"/>
-          </a:xfrm>
-          <a:prstGeom prst="rect">
-            <a:avLst/>
-          </a:prstGeom>
-          <a:noFill/>
-        </p:spPr>
-        <p:txBody>
-          <a:bodyPr wrap="square" lIns="0" rIns="0" tIns="0" bIns="0" anchor="t">
-            <a:spAutoFit/>
-          </a:bodyPr>
-          <a:lstStyle/>
-          <a:p>
-            <a:pPr algn="l">
-              <a:lnSpc>
-                <a:spcPct val="140000"/>
-              </a:lnSpc>
-            </a:pPr>
-            <a:r>
-              <a:rPr sz="1400" b="0" i="0">
-                <a:solidFill>
-                  <a:srgbClr val="3A3D40"/>
-                </a:solidFill>
-                <a:latin typeface="Verdana"/>
-              </a:rPr>
-              <a:t>Connaître le logiciel est obligatoire.   </a:t>
-            </a:r>
-            <a:r>
-              <a:rPr sz="1400" b="1" i="0">
-                <a:solidFill>
-                  <a:srgbClr val="07734A"/>
-                </a:solidFill>
-                <a:latin typeface="Verdana"/>
-              </a:rPr>
-              <a:t>» faux — c'est un atout</a:t>
-            </a:r>
-          </a:p>
-        </p:txBody>
-      </p:sp>
-      <p:sp>
-        <p:nvSpPr>
-          <p:cNvPr id="20" name="Rounded Rectangle 19"/>
-          <p:cNvSpPr/>
-          <p:nvPr/>
-        </p:nvSpPr>
-        <p:spPr>
-          <a:xfrm>
-            <a:off x="566928" y="4203192"/>
-            <a:ext cx="11057839" cy="559816"/>
-          </a:xfrm>
-          <a:prstGeom prst="roundRect">
-            <a:avLst>
-              <a:gd name="adj" fmla="val 26134"/>
-            </a:avLst>
-          </a:prstGeom>
-          <a:solidFill>
-            <a:srgbClr val="E6F5EE"/>
-          </a:solidFill>
-          <a:ln w="12700">
-            <a:solidFill>
-              <a:srgbClr val="EAEAE8"/>
-            </a:solidFill>
-          </a:ln>
-          <a:effectLst/>
-        </p:spPr>
-        <p:style>
-          <a:lnRef idx="1">
-            <a:schemeClr val="accent1"/>
-          </a:lnRef>
-          <a:fillRef idx="3">
-            <a:schemeClr val="accent1"/>
-          </a:fillRef>
-          <a:effectRef idx="2">
-            <a:schemeClr val="accent1"/>
-          </a:effectRef>
-          <a:fontRef idx="minor">
-            <a:schemeClr val="lt1"/>
-          </a:fontRef>
-        </p:style>
-        <p:txBody>
-          <a:bodyPr rtlCol="0" anchor="ctr"/>
-          <a:lstStyle/>
-          <a:p/>
-        </p:txBody>
-      </p:sp>
-      <p:sp>
-        <p:nvSpPr>
-          <p:cNvPr id="21" name="Rounded Rectangle 20"/>
-          <p:cNvSpPr/>
-          <p:nvPr/>
-        </p:nvSpPr>
-        <p:spPr>
-          <a:xfrm>
-            <a:off x="841247" y="4300220"/>
-            <a:ext cx="365760" cy="365760"/>
-          </a:xfrm>
-          <a:prstGeom prst="roundRect">
-            <a:avLst>
-              <a:gd name="adj" fmla="val 32500"/>
-            </a:avLst>
-          </a:prstGeom>
-          <a:solidFill>
-            <a:srgbClr val="E7F0F6"/>
-          </a:solidFill>
-          <a:ln>
-            <a:noFill/>
-          </a:ln>
-          <a:effectLst/>
-        </p:spPr>
-        <p:style>
-          <a:lnRef idx="1">
-            <a:schemeClr val="accent1"/>
-          </a:lnRef>
-          <a:fillRef idx="3">
-            <a:schemeClr val="accent1"/>
-          </a:fillRef>
-          <a:effectRef idx="2">
-            <a:schemeClr val="accent1"/>
-          </a:effectRef>
-          <a:fontRef idx="minor">
-            <a:schemeClr val="lt1"/>
-          </a:fontRef>
-        </p:style>
-        <p:txBody>
-          <a:bodyPr rtlCol="0" anchor="ctr"/>
-          <a:lstStyle/>
-          <a:p/>
-        </p:txBody>
-      </p:sp>
-      <p:sp>
-        <p:nvSpPr>
-          <p:cNvPr id="22" name="TextBox 21"/>
-          <p:cNvSpPr txBox="1"/>
-          <p:nvPr/>
-        </p:nvSpPr>
-        <p:spPr>
-          <a:xfrm>
-            <a:off x="841247" y="4364228"/>
-            <a:ext cx="365760" cy="256032"/>
-          </a:xfrm>
-          <a:prstGeom prst="rect">
-            <a:avLst/>
-          </a:prstGeom>
-          <a:noFill/>
-        </p:spPr>
-        <p:txBody>
-          <a:bodyPr wrap="square" lIns="0" rIns="0" tIns="0" bIns="0" anchor="t">
-            <a:spAutoFit/>
-          </a:bodyPr>
-          <a:lstStyle/>
-          <a:p>
-            <a:pPr algn="ctr">
-              <a:lnSpc>
-                <a:spcPct val="135000"/>
-              </a:lnSpc>
-            </a:pPr>
-            <a:r>
-              <a:rPr sz="1500" b="1" i="0">
-                <a:solidFill>
-                  <a:srgbClr val="1D6B8F"/>
-                </a:solidFill>
-                <a:latin typeface="Verdana"/>
-              </a:rPr>
-              <a:t>4</a:t>
-            </a:r>
-          </a:p>
-        </p:txBody>
-      </p:sp>
-      <p:sp>
-        <p:nvSpPr>
-          <p:cNvPr id="23" name="TextBox 22"/>
-          <p:cNvSpPr txBox="1"/>
-          <p:nvPr/>
-        </p:nvSpPr>
-        <p:spPr>
-          <a:xfrm>
-            <a:off x="1344168" y="4358640"/>
-            <a:ext cx="10097719" cy="285496"/>
-          </a:xfrm>
-          <a:prstGeom prst="rect">
-            <a:avLst/>
-          </a:prstGeom>
-          <a:noFill/>
-        </p:spPr>
-        <p:txBody>
-          <a:bodyPr wrap="square" lIns="0" rIns="0" tIns="0" bIns="0" anchor="t">
-            <a:spAutoFit/>
-          </a:bodyPr>
-          <a:lstStyle/>
-          <a:p>
-            <a:pPr algn="l">
-              <a:lnSpc>
-                <a:spcPct val="140000"/>
-              </a:lnSpc>
-            </a:pPr>
-            <a:r>
-              <a:rPr sz="1400" b="0" i="0">
-                <a:solidFill>
-                  <a:srgbClr val="3A3D40"/>
-                </a:solidFill>
-                <a:latin typeface="Verdana"/>
-              </a:rPr>
-              <a:t>Deux ans d'expérience sont requis.   </a:t>
-            </a:r>
-            <a:r>
-              <a:rPr sz="1400" b="1" i="0">
-                <a:solidFill>
-                  <a:srgbClr val="07734A"/>
-                </a:solidFill>
-                <a:latin typeface="Verdana"/>
-              </a:rPr>
-              <a:t>» vrai</a:t>
-            </a:r>
-          </a:p>
-        </p:txBody>
-      </p:sp>
-      <p:sp>
-        <p:nvSpPr>
-          <p:cNvPr id="24" name="Rounded Rectangle 23"/>
-          <p:cNvSpPr/>
-          <p:nvPr/>
-        </p:nvSpPr>
-        <p:spPr>
-          <a:xfrm>
-            <a:off x="566928" y="4891023"/>
-            <a:ext cx="11057839" cy="559816"/>
-          </a:xfrm>
-          <a:prstGeom prst="roundRect">
-            <a:avLst>
-              <a:gd name="adj" fmla="val 26134"/>
-            </a:avLst>
-          </a:prstGeom>
-          <a:solidFill>
-            <a:srgbClr val="E6F5EE"/>
-          </a:solidFill>
-          <a:ln w="12700">
-            <a:solidFill>
-              <a:srgbClr val="EAEAE8"/>
-            </a:solidFill>
-          </a:ln>
-          <a:effectLst/>
-        </p:spPr>
-        <p:style>
-          <a:lnRef idx="1">
-            <a:schemeClr val="accent1"/>
-          </a:lnRef>
-          <a:fillRef idx="3">
-            <a:schemeClr val="accent1"/>
-          </a:fillRef>
-          <a:effectRef idx="2">
-            <a:schemeClr val="accent1"/>
-          </a:effectRef>
-          <a:fontRef idx="minor">
-            <a:schemeClr val="lt1"/>
-          </a:fontRef>
-        </p:style>
-        <p:txBody>
-          <a:bodyPr rtlCol="0" anchor="ctr"/>
-          <a:lstStyle/>
-          <a:p/>
-        </p:txBody>
-      </p:sp>
-      <p:sp>
-        <p:nvSpPr>
-          <p:cNvPr id="25" name="Rounded Rectangle 24"/>
-          <p:cNvSpPr/>
-          <p:nvPr/>
-        </p:nvSpPr>
-        <p:spPr>
-          <a:xfrm>
-            <a:off x="841247" y="4988051"/>
-            <a:ext cx="365760" cy="365760"/>
-          </a:xfrm>
-          <a:prstGeom prst="roundRect">
-            <a:avLst>
-              <a:gd name="adj" fmla="val 32500"/>
-            </a:avLst>
-          </a:prstGeom>
-          <a:solidFill>
-            <a:srgbClr val="E7F0F6"/>
-          </a:solidFill>
-          <a:ln>
-            <a:noFill/>
-          </a:ln>
-          <a:effectLst/>
-        </p:spPr>
-        <p:style>
-          <a:lnRef idx="1">
-            <a:schemeClr val="accent1"/>
-          </a:lnRef>
-          <a:fillRef idx="3">
-            <a:schemeClr val="accent1"/>
-          </a:fillRef>
-          <a:effectRef idx="2">
-            <a:schemeClr val="accent1"/>
-          </a:effectRef>
-          <a:fontRef idx="minor">
-            <a:schemeClr val="lt1"/>
-          </a:fontRef>
-        </p:style>
-        <p:txBody>
-          <a:bodyPr rtlCol="0" anchor="ctr"/>
-          <a:lstStyle/>
-          <a:p/>
-        </p:txBody>
-      </p:sp>
-      <p:sp>
-        <p:nvSpPr>
-          <p:cNvPr id="26" name="TextBox 25"/>
-          <p:cNvSpPr txBox="1"/>
-          <p:nvPr/>
-        </p:nvSpPr>
-        <p:spPr>
-          <a:xfrm>
-            <a:off x="841247" y="5052059"/>
-            <a:ext cx="365760" cy="256032"/>
-          </a:xfrm>
-          <a:prstGeom prst="rect">
-            <a:avLst/>
-          </a:prstGeom>
-          <a:noFill/>
-        </p:spPr>
-        <p:txBody>
-          <a:bodyPr wrap="square" lIns="0" rIns="0" tIns="0" bIns="0" anchor="t">
-            <a:spAutoFit/>
-          </a:bodyPr>
-          <a:lstStyle/>
-          <a:p>
-            <a:pPr algn="ctr">
-              <a:lnSpc>
-                <a:spcPct val="135000"/>
-              </a:lnSpc>
-            </a:pPr>
-            <a:r>
-              <a:rPr sz="1500" b="1" i="0">
-                <a:solidFill>
-                  <a:srgbClr val="1D6B8F"/>
-                </a:solidFill>
-                <a:latin typeface="Verdana"/>
-              </a:rPr>
-              <a:t>5</a:t>
-            </a:r>
-          </a:p>
-        </p:txBody>
-      </p:sp>
-      <p:sp>
-        <p:nvSpPr>
-          <p:cNvPr id="27" name="TextBox 26"/>
-          <p:cNvSpPr txBox="1"/>
-          <p:nvPr/>
-        </p:nvSpPr>
-        <p:spPr>
-          <a:xfrm>
-            <a:off x="1344168" y="5046471"/>
-            <a:ext cx="10097719" cy="285496"/>
-          </a:xfrm>
-          <a:prstGeom prst="rect">
-            <a:avLst/>
-          </a:prstGeom>
-          <a:noFill/>
-        </p:spPr>
-        <p:txBody>
-          <a:bodyPr wrap="square" lIns="0" rIns="0" tIns="0" bIns="0" anchor="t">
-            <a:spAutoFit/>
-          </a:bodyPr>
-          <a:lstStyle/>
-          <a:p>
-            <a:pPr algn="l">
-              <a:lnSpc>
-                <a:spcPct val="140000"/>
-              </a:lnSpc>
-            </a:pPr>
-            <a:r>
-              <a:rPr sz="1400" b="0" i="0">
-                <a:solidFill>
-                  <a:srgbClr val="3A3D40"/>
-                </a:solidFill>
-                <a:latin typeface="Verdana"/>
-              </a:rPr>
-              <a:t>Un poste permanent est un contrat de six mois.   </a:t>
-            </a:r>
-            <a:r>
-              <a:rPr sz="1400" b="1" i="0">
-                <a:solidFill>
-                  <a:srgbClr val="07734A"/>
-                </a:solidFill>
-                <a:latin typeface="Verdana"/>
-              </a:rPr>
-              <a:t>» faux — sans date de fin</a:t>
-            </a:r>
-          </a:p>
-        </p:txBody>
-      </p:sp>
-      <p:sp>
-        <p:nvSpPr>
-          <p:cNvPr id="28" name="Rounded Rectangle 27"/>
-          <p:cNvSpPr/>
-          <p:nvPr/>
-        </p:nvSpPr>
-        <p:spPr>
-          <a:xfrm>
-            <a:off x="566928" y="5578856"/>
-            <a:ext cx="11057839" cy="559816"/>
-          </a:xfrm>
-          <a:prstGeom prst="roundRect">
-            <a:avLst>
-              <a:gd name="adj" fmla="val 26134"/>
-            </a:avLst>
-          </a:prstGeom>
-          <a:solidFill>
-            <a:srgbClr val="E6F5EE"/>
-          </a:solidFill>
-          <a:ln w="12700">
-            <a:solidFill>
-              <a:srgbClr val="EAEAE8"/>
-            </a:solidFill>
-          </a:ln>
-          <a:effectLst/>
-        </p:spPr>
-        <p:style>
-          <a:lnRef idx="1">
-            <a:schemeClr val="accent1"/>
-          </a:lnRef>
-          <a:fillRef idx="3">
-            <a:schemeClr val="accent1"/>
-          </a:fillRef>
-          <a:effectRef idx="2">
-            <a:schemeClr val="accent1"/>
-          </a:effectRef>
-          <a:fontRef idx="minor">
-            <a:schemeClr val="lt1"/>
-          </a:fontRef>
-        </p:style>
-        <p:txBody>
-          <a:bodyPr rtlCol="0" anchor="ctr"/>
-          <a:lstStyle/>
-          <a:p/>
-        </p:txBody>
-      </p:sp>
-      <p:sp>
-        <p:nvSpPr>
-          <p:cNvPr id="29" name="Rounded Rectangle 28"/>
-          <p:cNvSpPr/>
-          <p:nvPr/>
-        </p:nvSpPr>
-        <p:spPr>
-          <a:xfrm>
-            <a:off x="841247" y="5675884"/>
-            <a:ext cx="365760" cy="365760"/>
-          </a:xfrm>
-          <a:prstGeom prst="roundRect">
-            <a:avLst>
-              <a:gd name="adj" fmla="val 32500"/>
-            </a:avLst>
-          </a:prstGeom>
-          <a:solidFill>
-            <a:srgbClr val="E7F0F6"/>
-          </a:solidFill>
-          <a:ln>
-            <a:noFill/>
-          </a:ln>
-          <a:effectLst/>
-        </p:spPr>
-        <p:style>
-          <a:lnRef idx="1">
-            <a:schemeClr val="accent1"/>
-          </a:lnRef>
-          <a:fillRef idx="3">
-            <a:schemeClr val="accent1"/>
-          </a:fillRef>
-          <a:effectRef idx="2">
-            <a:schemeClr val="accent1"/>
-          </a:effectRef>
-          <a:fontRef idx="minor">
-            <a:schemeClr val="lt1"/>
-          </a:fontRef>
-        </p:style>
-        <p:txBody>
-          <a:bodyPr rtlCol="0" anchor="ctr"/>
-          <a:lstStyle/>
-          <a:p/>
-        </p:txBody>
-      </p:sp>
-      <p:sp>
-        <p:nvSpPr>
-          <p:cNvPr id="30" name="TextBox 29"/>
-          <p:cNvSpPr txBox="1"/>
-          <p:nvPr/>
-        </p:nvSpPr>
-        <p:spPr>
-          <a:xfrm>
-            <a:off x="841247" y="5739892"/>
-            <a:ext cx="365760" cy="256032"/>
-          </a:xfrm>
-          <a:prstGeom prst="rect">
-            <a:avLst/>
-          </a:prstGeom>
-          <a:noFill/>
-        </p:spPr>
-        <p:txBody>
-          <a:bodyPr wrap="square" lIns="0" rIns="0" tIns="0" bIns="0" anchor="t">
-            <a:spAutoFit/>
-          </a:bodyPr>
-          <a:lstStyle/>
-          <a:p>
-            <a:pPr algn="ctr">
-              <a:lnSpc>
-                <a:spcPct val="135000"/>
-              </a:lnSpc>
-            </a:pPr>
-            <a:r>
-              <a:rPr sz="1500" b="1" i="0">
-                <a:solidFill>
-                  <a:srgbClr val="1D6B8F"/>
-                </a:solidFill>
-                <a:latin typeface="Verdana"/>
-              </a:rPr>
-              <a:t>6</a:t>
-            </a:r>
-          </a:p>
-        </p:txBody>
-      </p:sp>
-      <p:sp>
-        <p:nvSpPr>
-          <p:cNvPr id="31" name="TextBox 30"/>
-          <p:cNvSpPr txBox="1"/>
-          <p:nvPr/>
-        </p:nvSpPr>
-        <p:spPr>
-          <a:xfrm>
-            <a:off x="1344168" y="5734304"/>
-            <a:ext cx="10097719" cy="285496"/>
-          </a:xfrm>
-          <a:prstGeom prst="rect">
-            <a:avLst/>
-          </a:prstGeom>
-          <a:noFill/>
-        </p:spPr>
-        <p:txBody>
-          <a:bodyPr wrap="square" lIns="0" rIns="0" tIns="0" bIns="0" anchor="t">
-            <a:spAutoFit/>
-          </a:bodyPr>
-          <a:lstStyle/>
-          <a:p>
-            <a:pPr algn="l">
-              <a:lnSpc>
-                <a:spcPct val="140000"/>
-              </a:lnSpc>
-            </a:pPr>
-            <a:r>
-              <a:rPr sz="1400" b="0" i="0">
-                <a:solidFill>
-                  <a:srgbClr val="3A3D40"/>
-                </a:solidFill>
-                <a:latin typeface="Verdana"/>
-              </a:rPr>
-              <a:t>Marisol devrait postuler malgré l'atout manquant.   </a:t>
-            </a:r>
-            <a:r>
-              <a:rPr sz="1400" b="1" i="0">
-                <a:solidFill>
-                  <a:srgbClr val="07734A"/>
-                </a:solidFill>
-                <a:latin typeface="Verdana"/>
-              </a:rPr>
-              <a:t>» vrai</a:t>
+              <a:t>Une offre écrit les tâches à l'infinitif parce qu'elle ne parle encore de personne. Cela donne un repère de lecture très fiable : la liste de verbes à l'infinitif, c'est la liste des tâches. Et au moment de répondre, on reprend ces mêmes verbes, conjugués.</a:t>
             </a:r>
           </a:p>
         </p:txBody>
@@ -5919,6 +5091,2586 @@
       </p:sp>
       <p:sp>
         <p:nvSpPr>
+          <p:cNvPr id="5" name="TextBox 4"/>
+          <p:cNvSpPr txBox="1"/>
+          <p:nvPr/>
+        </p:nvSpPr>
+        <p:spPr>
+          <a:xfrm>
+            <a:off x="566928" y="420624"/>
+            <a:ext cx="11057839" cy="237744"/>
+          </a:xfrm>
+          <a:prstGeom prst="rect">
+            <a:avLst/>
+          </a:prstGeom>
+          <a:noFill/>
+        </p:spPr>
+        <p:txBody>
+          <a:bodyPr wrap="square" lIns="0" rIns="0" tIns="0" bIns="0" anchor="t">
+            <a:spAutoFit/>
+          </a:bodyPr>
+          <a:lstStyle/>
+          <a:p>
+            <a:pPr algn="l">
+              <a:lnSpc>
+                <a:spcPct val="135000"/>
+              </a:lnSpc>
+            </a:pPr>
+            <a:r>
+              <a:rPr sz="1300" b="1" i="0" spc="156">
+                <a:solidFill>
+                  <a:srgbClr val="1D6B8F"/>
+                </a:solidFill>
+                <a:latin typeface="Verdana"/>
+              </a:rPr>
+              <a:t>COMPRÉHENSION</a:t>
+            </a:r>
+          </a:p>
+        </p:txBody>
+      </p:sp>
+      <p:sp>
+        <p:nvSpPr>
+          <p:cNvPr id="6" name="TextBox 5"/>
+          <p:cNvSpPr txBox="1"/>
+          <p:nvPr/>
+        </p:nvSpPr>
+        <p:spPr>
+          <a:xfrm>
+            <a:off x="566928" y="749808"/>
+            <a:ext cx="11057839" cy="877824"/>
+          </a:xfrm>
+          <a:prstGeom prst="rect">
+            <a:avLst/>
+          </a:prstGeom>
+          <a:noFill/>
+        </p:spPr>
+        <p:txBody>
+          <a:bodyPr wrap="square" lIns="0" rIns="0" tIns="0" bIns="0" anchor="t">
+            <a:spAutoFit/>
+          </a:bodyPr>
+          <a:lstStyle/>
+          <a:p>
+            <a:pPr algn="l">
+              <a:lnSpc>
+                <a:spcPct val="115000"/>
+              </a:lnSpc>
+            </a:pPr>
+            <a:r>
+              <a:rPr sz="3400" b="1" i="0">
+                <a:solidFill>
+                  <a:srgbClr val="17181A"/>
+                </a:solidFill>
+                <a:latin typeface="Verdana"/>
+              </a:rPr>
+              <a:t>Vrai ou faux ?</a:t>
+            </a:r>
+          </a:p>
+        </p:txBody>
+      </p:sp>
+      <p:sp>
+        <p:nvSpPr>
+          <p:cNvPr id="7" name="TextBox 6"/>
+          <p:cNvSpPr txBox="1"/>
+          <p:nvPr/>
+        </p:nvSpPr>
+        <p:spPr>
+          <a:xfrm>
+            <a:off x="566928" y="1645920"/>
+            <a:ext cx="11057839" cy="329184"/>
+          </a:xfrm>
+          <a:prstGeom prst="rect">
+            <a:avLst/>
+          </a:prstGeom>
+          <a:noFill/>
+        </p:spPr>
+        <p:txBody>
+          <a:bodyPr wrap="square" lIns="0" rIns="0" tIns="0" bIns="0" anchor="t">
+            <a:spAutoFit/>
+          </a:bodyPr>
+          <a:lstStyle/>
+          <a:p>
+            <a:pPr algn="l">
+              <a:lnSpc>
+                <a:spcPct val="135000"/>
+              </a:lnSpc>
+            </a:pPr>
+            <a:r>
+              <a:rPr sz="1800" b="0" i="0">
+                <a:solidFill>
+                  <a:srgbClr val="6E7175"/>
+                </a:solidFill>
+                <a:latin typeface="Verdana"/>
+              </a:rPr>
+              <a:t>Répondez d'après les dialogues et l'offre ci-dessus.</a:t>
+            </a:r>
+          </a:p>
+        </p:txBody>
+      </p:sp>
+      <p:sp>
+        <p:nvSpPr>
+          <p:cNvPr id="8" name="Rounded Rectangle 7"/>
+          <p:cNvSpPr/>
+          <p:nvPr/>
+        </p:nvSpPr>
+        <p:spPr>
+          <a:xfrm>
+            <a:off x="566928" y="2139696"/>
+            <a:ext cx="11057839" cy="559816"/>
+          </a:xfrm>
+          <a:prstGeom prst="roundRect">
+            <a:avLst>
+              <a:gd name="adj" fmla="val 26134"/>
+            </a:avLst>
+          </a:prstGeom>
+          <a:solidFill>
+            <a:srgbClr val="FFFFFF"/>
+          </a:solidFill>
+          <a:ln w="12700">
+            <a:solidFill>
+              <a:srgbClr val="EAEAE8"/>
+            </a:solidFill>
+          </a:ln>
+          <a:effectLst/>
+        </p:spPr>
+        <p:style>
+          <a:lnRef idx="1">
+            <a:schemeClr val="accent1"/>
+          </a:lnRef>
+          <a:fillRef idx="3">
+            <a:schemeClr val="accent1"/>
+          </a:fillRef>
+          <a:effectRef idx="2">
+            <a:schemeClr val="accent1"/>
+          </a:effectRef>
+          <a:fontRef idx="minor">
+            <a:schemeClr val="lt1"/>
+          </a:fontRef>
+        </p:style>
+        <p:txBody>
+          <a:bodyPr rtlCol="0" anchor="ctr"/>
+          <a:lstStyle/>
+          <a:p/>
+        </p:txBody>
+      </p:sp>
+      <p:sp>
+        <p:nvSpPr>
+          <p:cNvPr id="9" name="Rounded Rectangle 8"/>
+          <p:cNvSpPr/>
+          <p:nvPr/>
+        </p:nvSpPr>
+        <p:spPr>
+          <a:xfrm>
+            <a:off x="841247" y="2236724"/>
+            <a:ext cx="365760" cy="365760"/>
+          </a:xfrm>
+          <a:prstGeom prst="roundRect">
+            <a:avLst>
+              <a:gd name="adj" fmla="val 32500"/>
+            </a:avLst>
+          </a:prstGeom>
+          <a:solidFill>
+            <a:srgbClr val="E7F0F6"/>
+          </a:solidFill>
+          <a:ln>
+            <a:noFill/>
+          </a:ln>
+          <a:effectLst/>
+        </p:spPr>
+        <p:style>
+          <a:lnRef idx="1">
+            <a:schemeClr val="accent1"/>
+          </a:lnRef>
+          <a:fillRef idx="3">
+            <a:schemeClr val="accent1"/>
+          </a:fillRef>
+          <a:effectRef idx="2">
+            <a:schemeClr val="accent1"/>
+          </a:effectRef>
+          <a:fontRef idx="minor">
+            <a:schemeClr val="lt1"/>
+          </a:fontRef>
+        </p:style>
+        <p:txBody>
+          <a:bodyPr rtlCol="0" anchor="ctr"/>
+          <a:lstStyle/>
+          <a:p/>
+        </p:txBody>
+      </p:sp>
+      <p:sp>
+        <p:nvSpPr>
+          <p:cNvPr id="10" name="TextBox 9"/>
+          <p:cNvSpPr txBox="1"/>
+          <p:nvPr/>
+        </p:nvSpPr>
+        <p:spPr>
+          <a:xfrm>
+            <a:off x="841247" y="2300732"/>
+            <a:ext cx="365760" cy="256032"/>
+          </a:xfrm>
+          <a:prstGeom prst="rect">
+            <a:avLst/>
+          </a:prstGeom>
+          <a:noFill/>
+        </p:spPr>
+        <p:txBody>
+          <a:bodyPr wrap="square" lIns="0" rIns="0" tIns="0" bIns="0" anchor="t">
+            <a:spAutoFit/>
+          </a:bodyPr>
+          <a:lstStyle/>
+          <a:p>
+            <a:pPr algn="ctr">
+              <a:lnSpc>
+                <a:spcPct val="135000"/>
+              </a:lnSpc>
+            </a:pPr>
+            <a:r>
+              <a:rPr sz="1500" b="1" i="0">
+                <a:solidFill>
+                  <a:srgbClr val="1D6B8F"/>
+                </a:solidFill>
+                <a:latin typeface="Verdana"/>
+              </a:rPr>
+              <a:t>1</a:t>
+            </a:r>
+          </a:p>
+        </p:txBody>
+      </p:sp>
+      <p:sp>
+        <p:nvSpPr>
+          <p:cNvPr id="11" name="TextBox 10"/>
+          <p:cNvSpPr txBox="1"/>
+          <p:nvPr/>
+        </p:nvSpPr>
+        <p:spPr>
+          <a:xfrm>
+            <a:off x="1344168" y="2295144"/>
+            <a:ext cx="10097719" cy="285496"/>
+          </a:xfrm>
+          <a:prstGeom prst="rect">
+            <a:avLst/>
+          </a:prstGeom>
+          <a:noFill/>
+        </p:spPr>
+        <p:txBody>
+          <a:bodyPr wrap="square" lIns="0" rIns="0" tIns="0" bIns="0" anchor="t">
+            <a:spAutoFit/>
+          </a:bodyPr>
+          <a:lstStyle/>
+          <a:p>
+            <a:pPr algn="l">
+              <a:lnSpc>
+                <a:spcPct val="140000"/>
+              </a:lnSpc>
+            </a:pPr>
+            <a:r>
+              <a:rPr sz="1400" b="0" i="0">
+                <a:solidFill>
+                  <a:srgbClr val="3A3D40"/>
+                </a:solidFill>
+                <a:latin typeface="Verdana"/>
+              </a:rPr>
+              <a:t>Boisverte fabrique des meubles depuis 1998.</a:t>
+            </a:r>
+          </a:p>
+        </p:txBody>
+      </p:sp>
+      <p:sp>
+        <p:nvSpPr>
+          <p:cNvPr id="12" name="Rounded Rectangle 11"/>
+          <p:cNvSpPr/>
+          <p:nvPr/>
+        </p:nvSpPr>
+        <p:spPr>
+          <a:xfrm>
+            <a:off x="566928" y="2827528"/>
+            <a:ext cx="11057839" cy="559816"/>
+          </a:xfrm>
+          <a:prstGeom prst="roundRect">
+            <a:avLst>
+              <a:gd name="adj" fmla="val 26134"/>
+            </a:avLst>
+          </a:prstGeom>
+          <a:solidFill>
+            <a:srgbClr val="FFFFFF"/>
+          </a:solidFill>
+          <a:ln w="12700">
+            <a:solidFill>
+              <a:srgbClr val="EAEAE8"/>
+            </a:solidFill>
+          </a:ln>
+          <a:effectLst/>
+        </p:spPr>
+        <p:style>
+          <a:lnRef idx="1">
+            <a:schemeClr val="accent1"/>
+          </a:lnRef>
+          <a:fillRef idx="3">
+            <a:schemeClr val="accent1"/>
+          </a:fillRef>
+          <a:effectRef idx="2">
+            <a:schemeClr val="accent1"/>
+          </a:effectRef>
+          <a:fontRef idx="minor">
+            <a:schemeClr val="lt1"/>
+          </a:fontRef>
+        </p:style>
+        <p:txBody>
+          <a:bodyPr rtlCol="0" anchor="ctr"/>
+          <a:lstStyle/>
+          <a:p/>
+        </p:txBody>
+      </p:sp>
+      <p:sp>
+        <p:nvSpPr>
+          <p:cNvPr id="13" name="Rounded Rectangle 12"/>
+          <p:cNvSpPr/>
+          <p:nvPr/>
+        </p:nvSpPr>
+        <p:spPr>
+          <a:xfrm>
+            <a:off x="841247" y="2924556"/>
+            <a:ext cx="365760" cy="365760"/>
+          </a:xfrm>
+          <a:prstGeom prst="roundRect">
+            <a:avLst>
+              <a:gd name="adj" fmla="val 32500"/>
+            </a:avLst>
+          </a:prstGeom>
+          <a:solidFill>
+            <a:srgbClr val="E7F0F6"/>
+          </a:solidFill>
+          <a:ln>
+            <a:noFill/>
+          </a:ln>
+          <a:effectLst/>
+        </p:spPr>
+        <p:style>
+          <a:lnRef idx="1">
+            <a:schemeClr val="accent1"/>
+          </a:lnRef>
+          <a:fillRef idx="3">
+            <a:schemeClr val="accent1"/>
+          </a:fillRef>
+          <a:effectRef idx="2">
+            <a:schemeClr val="accent1"/>
+          </a:effectRef>
+          <a:fontRef idx="minor">
+            <a:schemeClr val="lt1"/>
+          </a:fontRef>
+        </p:style>
+        <p:txBody>
+          <a:bodyPr rtlCol="0" anchor="ctr"/>
+          <a:lstStyle/>
+          <a:p/>
+        </p:txBody>
+      </p:sp>
+      <p:sp>
+        <p:nvSpPr>
+          <p:cNvPr id="14" name="TextBox 13"/>
+          <p:cNvSpPr txBox="1"/>
+          <p:nvPr/>
+        </p:nvSpPr>
+        <p:spPr>
+          <a:xfrm>
+            <a:off x="841247" y="2988564"/>
+            <a:ext cx="365760" cy="256032"/>
+          </a:xfrm>
+          <a:prstGeom prst="rect">
+            <a:avLst/>
+          </a:prstGeom>
+          <a:noFill/>
+        </p:spPr>
+        <p:txBody>
+          <a:bodyPr wrap="square" lIns="0" rIns="0" tIns="0" bIns="0" anchor="t">
+            <a:spAutoFit/>
+          </a:bodyPr>
+          <a:lstStyle/>
+          <a:p>
+            <a:pPr algn="ctr">
+              <a:lnSpc>
+                <a:spcPct val="135000"/>
+              </a:lnSpc>
+            </a:pPr>
+            <a:r>
+              <a:rPr sz="1500" b="1" i="0">
+                <a:solidFill>
+                  <a:srgbClr val="1D6B8F"/>
+                </a:solidFill>
+                <a:latin typeface="Verdana"/>
+              </a:rPr>
+              <a:t>2</a:t>
+            </a:r>
+          </a:p>
+        </p:txBody>
+      </p:sp>
+      <p:sp>
+        <p:nvSpPr>
+          <p:cNvPr id="15" name="TextBox 14"/>
+          <p:cNvSpPr txBox="1"/>
+          <p:nvPr/>
+        </p:nvSpPr>
+        <p:spPr>
+          <a:xfrm>
+            <a:off x="1344168" y="2982975"/>
+            <a:ext cx="10097719" cy="285496"/>
+          </a:xfrm>
+          <a:prstGeom prst="rect">
+            <a:avLst/>
+          </a:prstGeom>
+          <a:noFill/>
+        </p:spPr>
+        <p:txBody>
+          <a:bodyPr wrap="square" lIns="0" rIns="0" tIns="0" bIns="0" anchor="t">
+            <a:spAutoFit/>
+          </a:bodyPr>
+          <a:lstStyle/>
+          <a:p>
+            <a:pPr algn="l">
+              <a:lnSpc>
+                <a:spcPct val="140000"/>
+              </a:lnSpc>
+            </a:pPr>
+            <a:r>
+              <a:rPr sz="1400" b="0" i="0">
+                <a:solidFill>
+                  <a:srgbClr val="3A3D40"/>
+                </a:solidFill>
+                <a:latin typeface="Verdana"/>
+              </a:rPr>
+              <a:t>« Signaler les écarts » est une des tâches.</a:t>
+            </a:r>
+          </a:p>
+        </p:txBody>
+      </p:sp>
+      <p:sp>
+        <p:nvSpPr>
+          <p:cNvPr id="16" name="Rounded Rectangle 15"/>
+          <p:cNvSpPr/>
+          <p:nvPr/>
+        </p:nvSpPr>
+        <p:spPr>
+          <a:xfrm>
+            <a:off x="566928" y="3515359"/>
+            <a:ext cx="11057839" cy="559816"/>
+          </a:xfrm>
+          <a:prstGeom prst="roundRect">
+            <a:avLst>
+              <a:gd name="adj" fmla="val 26134"/>
+            </a:avLst>
+          </a:prstGeom>
+          <a:solidFill>
+            <a:srgbClr val="FFFFFF"/>
+          </a:solidFill>
+          <a:ln w="12700">
+            <a:solidFill>
+              <a:srgbClr val="EAEAE8"/>
+            </a:solidFill>
+          </a:ln>
+          <a:effectLst/>
+        </p:spPr>
+        <p:style>
+          <a:lnRef idx="1">
+            <a:schemeClr val="accent1"/>
+          </a:lnRef>
+          <a:fillRef idx="3">
+            <a:schemeClr val="accent1"/>
+          </a:fillRef>
+          <a:effectRef idx="2">
+            <a:schemeClr val="accent1"/>
+          </a:effectRef>
+          <a:fontRef idx="minor">
+            <a:schemeClr val="lt1"/>
+          </a:fontRef>
+        </p:style>
+        <p:txBody>
+          <a:bodyPr rtlCol="0" anchor="ctr"/>
+          <a:lstStyle/>
+          <a:p/>
+        </p:txBody>
+      </p:sp>
+      <p:sp>
+        <p:nvSpPr>
+          <p:cNvPr id="17" name="Rounded Rectangle 16"/>
+          <p:cNvSpPr/>
+          <p:nvPr/>
+        </p:nvSpPr>
+        <p:spPr>
+          <a:xfrm>
+            <a:off x="841247" y="3612388"/>
+            <a:ext cx="365760" cy="365760"/>
+          </a:xfrm>
+          <a:prstGeom prst="roundRect">
+            <a:avLst>
+              <a:gd name="adj" fmla="val 32500"/>
+            </a:avLst>
+          </a:prstGeom>
+          <a:solidFill>
+            <a:srgbClr val="E7F0F6"/>
+          </a:solidFill>
+          <a:ln>
+            <a:noFill/>
+          </a:ln>
+          <a:effectLst/>
+        </p:spPr>
+        <p:style>
+          <a:lnRef idx="1">
+            <a:schemeClr val="accent1"/>
+          </a:lnRef>
+          <a:fillRef idx="3">
+            <a:schemeClr val="accent1"/>
+          </a:fillRef>
+          <a:effectRef idx="2">
+            <a:schemeClr val="accent1"/>
+          </a:effectRef>
+          <a:fontRef idx="minor">
+            <a:schemeClr val="lt1"/>
+          </a:fontRef>
+        </p:style>
+        <p:txBody>
+          <a:bodyPr rtlCol="0" anchor="ctr"/>
+          <a:lstStyle/>
+          <a:p/>
+        </p:txBody>
+      </p:sp>
+      <p:sp>
+        <p:nvSpPr>
+          <p:cNvPr id="18" name="TextBox 17"/>
+          <p:cNvSpPr txBox="1"/>
+          <p:nvPr/>
+        </p:nvSpPr>
+        <p:spPr>
+          <a:xfrm>
+            <a:off x="841247" y="3676395"/>
+            <a:ext cx="365760" cy="256032"/>
+          </a:xfrm>
+          <a:prstGeom prst="rect">
+            <a:avLst/>
+          </a:prstGeom>
+          <a:noFill/>
+        </p:spPr>
+        <p:txBody>
+          <a:bodyPr wrap="square" lIns="0" rIns="0" tIns="0" bIns="0" anchor="t">
+            <a:spAutoFit/>
+          </a:bodyPr>
+          <a:lstStyle/>
+          <a:p>
+            <a:pPr algn="ctr">
+              <a:lnSpc>
+                <a:spcPct val="135000"/>
+              </a:lnSpc>
+            </a:pPr>
+            <a:r>
+              <a:rPr sz="1500" b="1" i="0">
+                <a:solidFill>
+                  <a:srgbClr val="1D6B8F"/>
+                </a:solidFill>
+                <a:latin typeface="Verdana"/>
+              </a:rPr>
+              <a:t>3</a:t>
+            </a:r>
+          </a:p>
+        </p:txBody>
+      </p:sp>
+      <p:sp>
+        <p:nvSpPr>
+          <p:cNvPr id="19" name="TextBox 18"/>
+          <p:cNvSpPr txBox="1"/>
+          <p:nvPr/>
+        </p:nvSpPr>
+        <p:spPr>
+          <a:xfrm>
+            <a:off x="1344168" y="3670807"/>
+            <a:ext cx="10097719" cy="285496"/>
+          </a:xfrm>
+          <a:prstGeom prst="rect">
+            <a:avLst/>
+          </a:prstGeom>
+          <a:noFill/>
+        </p:spPr>
+        <p:txBody>
+          <a:bodyPr wrap="square" lIns="0" rIns="0" tIns="0" bIns="0" anchor="t">
+            <a:spAutoFit/>
+          </a:bodyPr>
+          <a:lstStyle/>
+          <a:p>
+            <a:pPr algn="l">
+              <a:lnSpc>
+                <a:spcPct val="140000"/>
+              </a:lnSpc>
+            </a:pPr>
+            <a:r>
+              <a:rPr sz="1400" b="0" i="0">
+                <a:solidFill>
+                  <a:srgbClr val="3A3D40"/>
+                </a:solidFill>
+                <a:latin typeface="Verdana"/>
+              </a:rPr>
+              <a:t>Connaître le logiciel est obligatoire.</a:t>
+            </a:r>
+          </a:p>
+        </p:txBody>
+      </p:sp>
+      <p:sp>
+        <p:nvSpPr>
+          <p:cNvPr id="20" name="Rounded Rectangle 19"/>
+          <p:cNvSpPr/>
+          <p:nvPr/>
+        </p:nvSpPr>
+        <p:spPr>
+          <a:xfrm>
+            <a:off x="566928" y="4203192"/>
+            <a:ext cx="11057839" cy="559816"/>
+          </a:xfrm>
+          <a:prstGeom prst="roundRect">
+            <a:avLst>
+              <a:gd name="adj" fmla="val 26134"/>
+            </a:avLst>
+          </a:prstGeom>
+          <a:solidFill>
+            <a:srgbClr val="FFFFFF"/>
+          </a:solidFill>
+          <a:ln w="12700">
+            <a:solidFill>
+              <a:srgbClr val="EAEAE8"/>
+            </a:solidFill>
+          </a:ln>
+          <a:effectLst/>
+        </p:spPr>
+        <p:style>
+          <a:lnRef idx="1">
+            <a:schemeClr val="accent1"/>
+          </a:lnRef>
+          <a:fillRef idx="3">
+            <a:schemeClr val="accent1"/>
+          </a:fillRef>
+          <a:effectRef idx="2">
+            <a:schemeClr val="accent1"/>
+          </a:effectRef>
+          <a:fontRef idx="minor">
+            <a:schemeClr val="lt1"/>
+          </a:fontRef>
+        </p:style>
+        <p:txBody>
+          <a:bodyPr rtlCol="0" anchor="ctr"/>
+          <a:lstStyle/>
+          <a:p/>
+        </p:txBody>
+      </p:sp>
+      <p:sp>
+        <p:nvSpPr>
+          <p:cNvPr id="21" name="Rounded Rectangle 20"/>
+          <p:cNvSpPr/>
+          <p:nvPr/>
+        </p:nvSpPr>
+        <p:spPr>
+          <a:xfrm>
+            <a:off x="841247" y="4300220"/>
+            <a:ext cx="365760" cy="365760"/>
+          </a:xfrm>
+          <a:prstGeom prst="roundRect">
+            <a:avLst>
+              <a:gd name="adj" fmla="val 32500"/>
+            </a:avLst>
+          </a:prstGeom>
+          <a:solidFill>
+            <a:srgbClr val="E7F0F6"/>
+          </a:solidFill>
+          <a:ln>
+            <a:noFill/>
+          </a:ln>
+          <a:effectLst/>
+        </p:spPr>
+        <p:style>
+          <a:lnRef idx="1">
+            <a:schemeClr val="accent1"/>
+          </a:lnRef>
+          <a:fillRef idx="3">
+            <a:schemeClr val="accent1"/>
+          </a:fillRef>
+          <a:effectRef idx="2">
+            <a:schemeClr val="accent1"/>
+          </a:effectRef>
+          <a:fontRef idx="minor">
+            <a:schemeClr val="lt1"/>
+          </a:fontRef>
+        </p:style>
+        <p:txBody>
+          <a:bodyPr rtlCol="0" anchor="ctr"/>
+          <a:lstStyle/>
+          <a:p/>
+        </p:txBody>
+      </p:sp>
+      <p:sp>
+        <p:nvSpPr>
+          <p:cNvPr id="22" name="TextBox 21"/>
+          <p:cNvSpPr txBox="1"/>
+          <p:nvPr/>
+        </p:nvSpPr>
+        <p:spPr>
+          <a:xfrm>
+            <a:off x="841247" y="4364228"/>
+            <a:ext cx="365760" cy="256032"/>
+          </a:xfrm>
+          <a:prstGeom prst="rect">
+            <a:avLst/>
+          </a:prstGeom>
+          <a:noFill/>
+        </p:spPr>
+        <p:txBody>
+          <a:bodyPr wrap="square" lIns="0" rIns="0" tIns="0" bIns="0" anchor="t">
+            <a:spAutoFit/>
+          </a:bodyPr>
+          <a:lstStyle/>
+          <a:p>
+            <a:pPr algn="ctr">
+              <a:lnSpc>
+                <a:spcPct val="135000"/>
+              </a:lnSpc>
+            </a:pPr>
+            <a:r>
+              <a:rPr sz="1500" b="1" i="0">
+                <a:solidFill>
+                  <a:srgbClr val="1D6B8F"/>
+                </a:solidFill>
+                <a:latin typeface="Verdana"/>
+              </a:rPr>
+              <a:t>4</a:t>
+            </a:r>
+          </a:p>
+        </p:txBody>
+      </p:sp>
+      <p:sp>
+        <p:nvSpPr>
+          <p:cNvPr id="23" name="TextBox 22"/>
+          <p:cNvSpPr txBox="1"/>
+          <p:nvPr/>
+        </p:nvSpPr>
+        <p:spPr>
+          <a:xfrm>
+            <a:off x="1344168" y="4358640"/>
+            <a:ext cx="10097719" cy="285496"/>
+          </a:xfrm>
+          <a:prstGeom prst="rect">
+            <a:avLst/>
+          </a:prstGeom>
+          <a:noFill/>
+        </p:spPr>
+        <p:txBody>
+          <a:bodyPr wrap="square" lIns="0" rIns="0" tIns="0" bIns="0" anchor="t">
+            <a:spAutoFit/>
+          </a:bodyPr>
+          <a:lstStyle/>
+          <a:p>
+            <a:pPr algn="l">
+              <a:lnSpc>
+                <a:spcPct val="140000"/>
+              </a:lnSpc>
+            </a:pPr>
+            <a:r>
+              <a:rPr sz="1400" b="0" i="0">
+                <a:solidFill>
+                  <a:srgbClr val="3A3D40"/>
+                </a:solidFill>
+                <a:latin typeface="Verdana"/>
+              </a:rPr>
+              <a:t>Deux ans d'expérience sont requis.</a:t>
+            </a:r>
+          </a:p>
+        </p:txBody>
+      </p:sp>
+      <p:sp>
+        <p:nvSpPr>
+          <p:cNvPr id="24" name="Rounded Rectangle 23"/>
+          <p:cNvSpPr/>
+          <p:nvPr/>
+        </p:nvSpPr>
+        <p:spPr>
+          <a:xfrm>
+            <a:off x="566928" y="4891023"/>
+            <a:ext cx="11057839" cy="559816"/>
+          </a:xfrm>
+          <a:prstGeom prst="roundRect">
+            <a:avLst>
+              <a:gd name="adj" fmla="val 26134"/>
+            </a:avLst>
+          </a:prstGeom>
+          <a:solidFill>
+            <a:srgbClr val="FFFFFF"/>
+          </a:solidFill>
+          <a:ln w="12700">
+            <a:solidFill>
+              <a:srgbClr val="EAEAE8"/>
+            </a:solidFill>
+          </a:ln>
+          <a:effectLst/>
+        </p:spPr>
+        <p:style>
+          <a:lnRef idx="1">
+            <a:schemeClr val="accent1"/>
+          </a:lnRef>
+          <a:fillRef idx="3">
+            <a:schemeClr val="accent1"/>
+          </a:fillRef>
+          <a:effectRef idx="2">
+            <a:schemeClr val="accent1"/>
+          </a:effectRef>
+          <a:fontRef idx="minor">
+            <a:schemeClr val="lt1"/>
+          </a:fontRef>
+        </p:style>
+        <p:txBody>
+          <a:bodyPr rtlCol="0" anchor="ctr"/>
+          <a:lstStyle/>
+          <a:p/>
+        </p:txBody>
+      </p:sp>
+      <p:sp>
+        <p:nvSpPr>
+          <p:cNvPr id="25" name="Rounded Rectangle 24"/>
+          <p:cNvSpPr/>
+          <p:nvPr/>
+        </p:nvSpPr>
+        <p:spPr>
+          <a:xfrm>
+            <a:off x="841247" y="4988051"/>
+            <a:ext cx="365760" cy="365760"/>
+          </a:xfrm>
+          <a:prstGeom prst="roundRect">
+            <a:avLst>
+              <a:gd name="adj" fmla="val 32500"/>
+            </a:avLst>
+          </a:prstGeom>
+          <a:solidFill>
+            <a:srgbClr val="E7F0F6"/>
+          </a:solidFill>
+          <a:ln>
+            <a:noFill/>
+          </a:ln>
+          <a:effectLst/>
+        </p:spPr>
+        <p:style>
+          <a:lnRef idx="1">
+            <a:schemeClr val="accent1"/>
+          </a:lnRef>
+          <a:fillRef idx="3">
+            <a:schemeClr val="accent1"/>
+          </a:fillRef>
+          <a:effectRef idx="2">
+            <a:schemeClr val="accent1"/>
+          </a:effectRef>
+          <a:fontRef idx="minor">
+            <a:schemeClr val="lt1"/>
+          </a:fontRef>
+        </p:style>
+        <p:txBody>
+          <a:bodyPr rtlCol="0" anchor="ctr"/>
+          <a:lstStyle/>
+          <a:p/>
+        </p:txBody>
+      </p:sp>
+      <p:sp>
+        <p:nvSpPr>
+          <p:cNvPr id="26" name="TextBox 25"/>
+          <p:cNvSpPr txBox="1"/>
+          <p:nvPr/>
+        </p:nvSpPr>
+        <p:spPr>
+          <a:xfrm>
+            <a:off x="841247" y="5052059"/>
+            <a:ext cx="365760" cy="256032"/>
+          </a:xfrm>
+          <a:prstGeom prst="rect">
+            <a:avLst/>
+          </a:prstGeom>
+          <a:noFill/>
+        </p:spPr>
+        <p:txBody>
+          <a:bodyPr wrap="square" lIns="0" rIns="0" tIns="0" bIns="0" anchor="t">
+            <a:spAutoFit/>
+          </a:bodyPr>
+          <a:lstStyle/>
+          <a:p>
+            <a:pPr algn="ctr">
+              <a:lnSpc>
+                <a:spcPct val="135000"/>
+              </a:lnSpc>
+            </a:pPr>
+            <a:r>
+              <a:rPr sz="1500" b="1" i="0">
+                <a:solidFill>
+                  <a:srgbClr val="1D6B8F"/>
+                </a:solidFill>
+                <a:latin typeface="Verdana"/>
+              </a:rPr>
+              <a:t>5</a:t>
+            </a:r>
+          </a:p>
+        </p:txBody>
+      </p:sp>
+      <p:sp>
+        <p:nvSpPr>
+          <p:cNvPr id="27" name="TextBox 26"/>
+          <p:cNvSpPr txBox="1"/>
+          <p:nvPr/>
+        </p:nvSpPr>
+        <p:spPr>
+          <a:xfrm>
+            <a:off x="1344168" y="5046471"/>
+            <a:ext cx="10097719" cy="285496"/>
+          </a:xfrm>
+          <a:prstGeom prst="rect">
+            <a:avLst/>
+          </a:prstGeom>
+          <a:noFill/>
+        </p:spPr>
+        <p:txBody>
+          <a:bodyPr wrap="square" lIns="0" rIns="0" tIns="0" bIns="0" anchor="t">
+            <a:spAutoFit/>
+          </a:bodyPr>
+          <a:lstStyle/>
+          <a:p>
+            <a:pPr algn="l">
+              <a:lnSpc>
+                <a:spcPct val="140000"/>
+              </a:lnSpc>
+            </a:pPr>
+            <a:r>
+              <a:rPr sz="1400" b="0" i="0">
+                <a:solidFill>
+                  <a:srgbClr val="3A3D40"/>
+                </a:solidFill>
+                <a:latin typeface="Verdana"/>
+              </a:rPr>
+              <a:t>Un poste permanent est un contrat de six mois.</a:t>
+            </a:r>
+          </a:p>
+        </p:txBody>
+      </p:sp>
+      <p:sp>
+        <p:nvSpPr>
+          <p:cNvPr id="28" name="Rounded Rectangle 27"/>
+          <p:cNvSpPr/>
+          <p:nvPr/>
+        </p:nvSpPr>
+        <p:spPr>
+          <a:xfrm>
+            <a:off x="566928" y="5578856"/>
+            <a:ext cx="11057839" cy="559816"/>
+          </a:xfrm>
+          <a:prstGeom prst="roundRect">
+            <a:avLst>
+              <a:gd name="adj" fmla="val 26134"/>
+            </a:avLst>
+          </a:prstGeom>
+          <a:solidFill>
+            <a:srgbClr val="FFFFFF"/>
+          </a:solidFill>
+          <a:ln w="12700">
+            <a:solidFill>
+              <a:srgbClr val="EAEAE8"/>
+            </a:solidFill>
+          </a:ln>
+          <a:effectLst/>
+        </p:spPr>
+        <p:style>
+          <a:lnRef idx="1">
+            <a:schemeClr val="accent1"/>
+          </a:lnRef>
+          <a:fillRef idx="3">
+            <a:schemeClr val="accent1"/>
+          </a:fillRef>
+          <a:effectRef idx="2">
+            <a:schemeClr val="accent1"/>
+          </a:effectRef>
+          <a:fontRef idx="minor">
+            <a:schemeClr val="lt1"/>
+          </a:fontRef>
+        </p:style>
+        <p:txBody>
+          <a:bodyPr rtlCol="0" anchor="ctr"/>
+          <a:lstStyle/>
+          <a:p/>
+        </p:txBody>
+      </p:sp>
+      <p:sp>
+        <p:nvSpPr>
+          <p:cNvPr id="29" name="Rounded Rectangle 28"/>
+          <p:cNvSpPr/>
+          <p:nvPr/>
+        </p:nvSpPr>
+        <p:spPr>
+          <a:xfrm>
+            <a:off x="841247" y="5675884"/>
+            <a:ext cx="365760" cy="365760"/>
+          </a:xfrm>
+          <a:prstGeom prst="roundRect">
+            <a:avLst>
+              <a:gd name="adj" fmla="val 32500"/>
+            </a:avLst>
+          </a:prstGeom>
+          <a:solidFill>
+            <a:srgbClr val="E7F0F6"/>
+          </a:solidFill>
+          <a:ln>
+            <a:noFill/>
+          </a:ln>
+          <a:effectLst/>
+        </p:spPr>
+        <p:style>
+          <a:lnRef idx="1">
+            <a:schemeClr val="accent1"/>
+          </a:lnRef>
+          <a:fillRef idx="3">
+            <a:schemeClr val="accent1"/>
+          </a:fillRef>
+          <a:effectRef idx="2">
+            <a:schemeClr val="accent1"/>
+          </a:effectRef>
+          <a:fontRef idx="minor">
+            <a:schemeClr val="lt1"/>
+          </a:fontRef>
+        </p:style>
+        <p:txBody>
+          <a:bodyPr rtlCol="0" anchor="ctr"/>
+          <a:lstStyle/>
+          <a:p/>
+        </p:txBody>
+      </p:sp>
+      <p:sp>
+        <p:nvSpPr>
+          <p:cNvPr id="30" name="TextBox 29"/>
+          <p:cNvSpPr txBox="1"/>
+          <p:nvPr/>
+        </p:nvSpPr>
+        <p:spPr>
+          <a:xfrm>
+            <a:off x="841247" y="5739892"/>
+            <a:ext cx="365760" cy="256032"/>
+          </a:xfrm>
+          <a:prstGeom prst="rect">
+            <a:avLst/>
+          </a:prstGeom>
+          <a:noFill/>
+        </p:spPr>
+        <p:txBody>
+          <a:bodyPr wrap="square" lIns="0" rIns="0" tIns="0" bIns="0" anchor="t">
+            <a:spAutoFit/>
+          </a:bodyPr>
+          <a:lstStyle/>
+          <a:p>
+            <a:pPr algn="ctr">
+              <a:lnSpc>
+                <a:spcPct val="135000"/>
+              </a:lnSpc>
+            </a:pPr>
+            <a:r>
+              <a:rPr sz="1500" b="1" i="0">
+                <a:solidFill>
+                  <a:srgbClr val="1D6B8F"/>
+                </a:solidFill>
+                <a:latin typeface="Verdana"/>
+              </a:rPr>
+              <a:t>6</a:t>
+            </a:r>
+          </a:p>
+        </p:txBody>
+      </p:sp>
+      <p:sp>
+        <p:nvSpPr>
+          <p:cNvPr id="31" name="TextBox 30"/>
+          <p:cNvSpPr txBox="1"/>
+          <p:nvPr/>
+        </p:nvSpPr>
+        <p:spPr>
+          <a:xfrm>
+            <a:off x="1344168" y="5734304"/>
+            <a:ext cx="10097719" cy="285496"/>
+          </a:xfrm>
+          <a:prstGeom prst="rect">
+            <a:avLst/>
+          </a:prstGeom>
+          <a:noFill/>
+        </p:spPr>
+        <p:txBody>
+          <a:bodyPr wrap="square" lIns="0" rIns="0" tIns="0" bIns="0" anchor="t">
+            <a:spAutoFit/>
+          </a:bodyPr>
+          <a:lstStyle/>
+          <a:p>
+            <a:pPr algn="l">
+              <a:lnSpc>
+                <a:spcPct val="140000"/>
+              </a:lnSpc>
+            </a:pPr>
+            <a:r>
+              <a:rPr sz="1400" b="0" i="0">
+                <a:solidFill>
+                  <a:srgbClr val="3A3D40"/>
+                </a:solidFill>
+                <a:latin typeface="Verdana"/>
+              </a:rPr>
+              <a:t>Marisol devrait postuler malgré l'atout manquant.</a:t>
+            </a:r>
+          </a:p>
+        </p:txBody>
+      </p:sp>
+    </p:spTree>
+  </p:cSld>
+  <p:clrMapOvr>
+    <a:masterClrMapping/>
+  </p:clrMapOvr>
+</p:sld>
+</file>
+
+<file path=ppt/slides/slide12.xml><?xml version="1.0" encoding="utf-8"?>
+<p:sld xmlns:a="http://schemas.openxmlformats.org/drawingml/2006/main" xmlns:p="http://schemas.openxmlformats.org/presentationml/2006/main" xmlns:r="http://schemas.openxmlformats.org/officeDocument/2006/relationships">
+  <p:cSld>
+    <p:spTree>
+      <p:nvGrpSpPr>
+        <p:cNvPr id="1" name=""/>
+        <p:cNvGrpSpPr/>
+        <p:nvPr/>
+      </p:nvGrpSpPr>
+      <p:grpSpPr/>
+      <p:sp>
+        <p:nvSpPr>
+          <p:cNvPr id="2" name="Rectangle 1"/>
+          <p:cNvSpPr/>
+          <p:nvPr/>
+        </p:nvSpPr>
+        <p:spPr>
+          <a:xfrm>
+            <a:off x="0" y="0"/>
+            <a:ext cx="12191695" cy="6858000"/>
+          </a:xfrm>
+          <a:prstGeom prst="rect">
+            <a:avLst/>
+          </a:prstGeom>
+          <a:solidFill>
+            <a:srgbClr val="F7F7F5"/>
+          </a:solidFill>
+          <a:ln>
+            <a:noFill/>
+          </a:ln>
+          <a:effectLst/>
+        </p:spPr>
+        <p:style>
+          <a:lnRef idx="1">
+            <a:schemeClr val="accent1"/>
+          </a:lnRef>
+          <a:fillRef idx="3">
+            <a:schemeClr val="accent1"/>
+          </a:fillRef>
+          <a:effectRef idx="2">
+            <a:schemeClr val="accent1"/>
+          </a:effectRef>
+          <a:fontRef idx="minor">
+            <a:schemeClr val="lt1"/>
+          </a:fontRef>
+        </p:style>
+        <p:txBody>
+          <a:bodyPr rtlCol="0" anchor="ctr"/>
+          <a:lstStyle/>
+          <a:p/>
+        </p:txBody>
+      </p:sp>
+      <p:sp>
+        <p:nvSpPr>
+          <p:cNvPr id="3" name="TextBox 2"/>
+          <p:cNvSpPr txBox="1"/>
+          <p:nvPr/>
+        </p:nvSpPr>
+        <p:spPr>
+          <a:xfrm>
+            <a:off x="566928" y="6355080"/>
+            <a:ext cx="6400800" cy="219456"/>
+          </a:xfrm>
+          <a:prstGeom prst="rect">
+            <a:avLst/>
+          </a:prstGeom>
+          <a:noFill/>
+        </p:spPr>
+        <p:txBody>
+          <a:bodyPr wrap="square" lIns="0" rIns="0" tIns="0" bIns="0" anchor="t">
+            <a:spAutoFit/>
+          </a:bodyPr>
+          <a:lstStyle/>
+          <a:p>
+            <a:pPr algn="l">
+              <a:lnSpc>
+                <a:spcPct val="135000"/>
+              </a:lnSpc>
+            </a:pPr>
+            <a:r>
+              <a:rPr sz="1200" b="0" i="0">
+                <a:solidFill>
+                  <a:srgbClr val="6E7175"/>
+                </a:solidFill>
+                <a:latin typeface="Verdana"/>
+              </a:rPr>
+              <a:t>B1 · Chercher un emploi</a:t>
+            </a:r>
+          </a:p>
+        </p:txBody>
+      </p:sp>
+      <p:sp>
+        <p:nvSpPr>
+          <p:cNvPr id="4" name="TextBox 3"/>
+          <p:cNvSpPr txBox="1"/>
+          <p:nvPr/>
+        </p:nvSpPr>
+        <p:spPr>
+          <a:xfrm>
+            <a:off x="10710367" y="6355080"/>
+            <a:ext cx="914400" cy="219456"/>
+          </a:xfrm>
+          <a:prstGeom prst="rect">
+            <a:avLst/>
+          </a:prstGeom>
+          <a:noFill/>
+        </p:spPr>
+        <p:txBody>
+          <a:bodyPr wrap="square" lIns="0" rIns="0" tIns="0" bIns="0" anchor="t">
+            <a:spAutoFit/>
+          </a:bodyPr>
+          <a:lstStyle/>
+          <a:p>
+            <a:pPr algn="r">
+              <a:lnSpc>
+                <a:spcPct val="135000"/>
+              </a:lnSpc>
+            </a:pPr>
+            <a:r>
+              <a:rPr sz="1200" b="0" i="0">
+                <a:solidFill>
+                  <a:srgbClr val="6E7175"/>
+                </a:solidFill>
+                <a:latin typeface="Verdana"/>
+              </a:rPr>
+              <a:t>12</a:t>
+            </a:r>
+          </a:p>
+        </p:txBody>
+      </p:sp>
+      <p:sp>
+        <p:nvSpPr>
+          <p:cNvPr id="5" name="TextBox 4"/>
+          <p:cNvSpPr txBox="1"/>
+          <p:nvPr/>
+        </p:nvSpPr>
+        <p:spPr>
+          <a:xfrm>
+            <a:off x="566928" y="420624"/>
+            <a:ext cx="11057839" cy="237744"/>
+          </a:xfrm>
+          <a:prstGeom prst="rect">
+            <a:avLst/>
+          </a:prstGeom>
+          <a:noFill/>
+        </p:spPr>
+        <p:txBody>
+          <a:bodyPr wrap="square" lIns="0" rIns="0" tIns="0" bIns="0" anchor="t">
+            <a:spAutoFit/>
+          </a:bodyPr>
+          <a:lstStyle/>
+          <a:p>
+            <a:pPr algn="l">
+              <a:lnSpc>
+                <a:spcPct val="135000"/>
+              </a:lnSpc>
+            </a:pPr>
+            <a:r>
+              <a:rPr sz="1300" b="1" i="0" spc="156">
+                <a:solidFill>
+                  <a:srgbClr val="1D6B8F"/>
+                </a:solidFill>
+                <a:latin typeface="Verdana"/>
+              </a:rPr>
+              <a:t>CORRECTION</a:t>
+            </a:r>
+          </a:p>
+        </p:txBody>
+      </p:sp>
+      <p:sp>
+        <p:nvSpPr>
+          <p:cNvPr id="6" name="TextBox 5"/>
+          <p:cNvSpPr txBox="1"/>
+          <p:nvPr/>
+        </p:nvSpPr>
+        <p:spPr>
+          <a:xfrm>
+            <a:off x="566928" y="749808"/>
+            <a:ext cx="11057839" cy="877824"/>
+          </a:xfrm>
+          <a:prstGeom prst="rect">
+            <a:avLst/>
+          </a:prstGeom>
+          <a:noFill/>
+        </p:spPr>
+        <p:txBody>
+          <a:bodyPr wrap="square" lIns="0" rIns="0" tIns="0" bIns="0" anchor="t">
+            <a:spAutoFit/>
+          </a:bodyPr>
+          <a:lstStyle/>
+          <a:p>
+            <a:pPr algn="l">
+              <a:lnSpc>
+                <a:spcPct val="115000"/>
+              </a:lnSpc>
+            </a:pPr>
+            <a:r>
+              <a:rPr sz="3400" b="1" i="0">
+                <a:solidFill>
+                  <a:srgbClr val="17181A"/>
+                </a:solidFill>
+                <a:latin typeface="Verdana"/>
+              </a:rPr>
+              <a:t>Vrai ou faux ?</a:t>
+            </a:r>
+          </a:p>
+        </p:txBody>
+      </p:sp>
+      <p:sp>
+        <p:nvSpPr>
+          <p:cNvPr id="7" name="TextBox 6"/>
+          <p:cNvSpPr txBox="1"/>
+          <p:nvPr/>
+        </p:nvSpPr>
+        <p:spPr>
+          <a:xfrm>
+            <a:off x="566928" y="1645920"/>
+            <a:ext cx="11057839" cy="329184"/>
+          </a:xfrm>
+          <a:prstGeom prst="rect">
+            <a:avLst/>
+          </a:prstGeom>
+          <a:noFill/>
+        </p:spPr>
+        <p:txBody>
+          <a:bodyPr wrap="square" lIns="0" rIns="0" tIns="0" bIns="0" anchor="t">
+            <a:spAutoFit/>
+          </a:bodyPr>
+          <a:lstStyle/>
+          <a:p>
+            <a:pPr algn="l">
+              <a:lnSpc>
+                <a:spcPct val="135000"/>
+              </a:lnSpc>
+            </a:pPr>
+            <a:r>
+              <a:rPr sz="1800" b="0" i="0">
+                <a:solidFill>
+                  <a:srgbClr val="6E7175"/>
+                </a:solidFill>
+                <a:latin typeface="Verdana"/>
+              </a:rPr>
+              <a:t>Correction — on lit la réponse, on ne commente pas l'erreur.</a:t>
+            </a:r>
+          </a:p>
+        </p:txBody>
+      </p:sp>
+      <p:sp>
+        <p:nvSpPr>
+          <p:cNvPr id="8" name="Rounded Rectangle 7"/>
+          <p:cNvSpPr/>
+          <p:nvPr/>
+        </p:nvSpPr>
+        <p:spPr>
+          <a:xfrm>
+            <a:off x="566928" y="2139696"/>
+            <a:ext cx="11057839" cy="559816"/>
+          </a:xfrm>
+          <a:prstGeom prst="roundRect">
+            <a:avLst>
+              <a:gd name="adj" fmla="val 26134"/>
+            </a:avLst>
+          </a:prstGeom>
+          <a:solidFill>
+            <a:srgbClr val="E6F5EE"/>
+          </a:solidFill>
+          <a:ln w="12700">
+            <a:solidFill>
+              <a:srgbClr val="EAEAE8"/>
+            </a:solidFill>
+          </a:ln>
+          <a:effectLst/>
+        </p:spPr>
+        <p:style>
+          <a:lnRef idx="1">
+            <a:schemeClr val="accent1"/>
+          </a:lnRef>
+          <a:fillRef idx="3">
+            <a:schemeClr val="accent1"/>
+          </a:fillRef>
+          <a:effectRef idx="2">
+            <a:schemeClr val="accent1"/>
+          </a:effectRef>
+          <a:fontRef idx="minor">
+            <a:schemeClr val="lt1"/>
+          </a:fontRef>
+        </p:style>
+        <p:txBody>
+          <a:bodyPr rtlCol="0" anchor="ctr"/>
+          <a:lstStyle/>
+          <a:p/>
+        </p:txBody>
+      </p:sp>
+      <p:sp>
+        <p:nvSpPr>
+          <p:cNvPr id="9" name="Rounded Rectangle 8"/>
+          <p:cNvSpPr/>
+          <p:nvPr/>
+        </p:nvSpPr>
+        <p:spPr>
+          <a:xfrm>
+            <a:off x="841247" y="2236724"/>
+            <a:ext cx="365760" cy="365760"/>
+          </a:xfrm>
+          <a:prstGeom prst="roundRect">
+            <a:avLst>
+              <a:gd name="adj" fmla="val 32500"/>
+            </a:avLst>
+          </a:prstGeom>
+          <a:solidFill>
+            <a:srgbClr val="E7F0F6"/>
+          </a:solidFill>
+          <a:ln>
+            <a:noFill/>
+          </a:ln>
+          <a:effectLst/>
+        </p:spPr>
+        <p:style>
+          <a:lnRef idx="1">
+            <a:schemeClr val="accent1"/>
+          </a:lnRef>
+          <a:fillRef idx="3">
+            <a:schemeClr val="accent1"/>
+          </a:fillRef>
+          <a:effectRef idx="2">
+            <a:schemeClr val="accent1"/>
+          </a:effectRef>
+          <a:fontRef idx="minor">
+            <a:schemeClr val="lt1"/>
+          </a:fontRef>
+        </p:style>
+        <p:txBody>
+          <a:bodyPr rtlCol="0" anchor="ctr"/>
+          <a:lstStyle/>
+          <a:p/>
+        </p:txBody>
+      </p:sp>
+      <p:sp>
+        <p:nvSpPr>
+          <p:cNvPr id="10" name="TextBox 9"/>
+          <p:cNvSpPr txBox="1"/>
+          <p:nvPr/>
+        </p:nvSpPr>
+        <p:spPr>
+          <a:xfrm>
+            <a:off x="841247" y="2300732"/>
+            <a:ext cx="365760" cy="256032"/>
+          </a:xfrm>
+          <a:prstGeom prst="rect">
+            <a:avLst/>
+          </a:prstGeom>
+          <a:noFill/>
+        </p:spPr>
+        <p:txBody>
+          <a:bodyPr wrap="square" lIns="0" rIns="0" tIns="0" bIns="0" anchor="t">
+            <a:spAutoFit/>
+          </a:bodyPr>
+          <a:lstStyle/>
+          <a:p>
+            <a:pPr algn="ctr">
+              <a:lnSpc>
+                <a:spcPct val="135000"/>
+              </a:lnSpc>
+            </a:pPr>
+            <a:r>
+              <a:rPr sz="1500" b="1" i="0">
+                <a:solidFill>
+                  <a:srgbClr val="1D6B8F"/>
+                </a:solidFill>
+                <a:latin typeface="Verdana"/>
+              </a:rPr>
+              <a:t>1</a:t>
+            </a:r>
+          </a:p>
+        </p:txBody>
+      </p:sp>
+      <p:sp>
+        <p:nvSpPr>
+          <p:cNvPr id="11" name="TextBox 10"/>
+          <p:cNvSpPr txBox="1"/>
+          <p:nvPr/>
+        </p:nvSpPr>
+        <p:spPr>
+          <a:xfrm>
+            <a:off x="1344168" y="2295144"/>
+            <a:ext cx="10097719" cy="285496"/>
+          </a:xfrm>
+          <a:prstGeom prst="rect">
+            <a:avLst/>
+          </a:prstGeom>
+          <a:noFill/>
+        </p:spPr>
+        <p:txBody>
+          <a:bodyPr wrap="square" lIns="0" rIns="0" tIns="0" bIns="0" anchor="t">
+            <a:spAutoFit/>
+          </a:bodyPr>
+          <a:lstStyle/>
+          <a:p>
+            <a:pPr algn="l">
+              <a:lnSpc>
+                <a:spcPct val="140000"/>
+              </a:lnSpc>
+            </a:pPr>
+            <a:r>
+              <a:rPr sz="1400" b="0" i="0">
+                <a:solidFill>
+                  <a:srgbClr val="3A3D40"/>
+                </a:solidFill>
+                <a:latin typeface="Verdana"/>
+              </a:rPr>
+              <a:t>Boisverte fabrique des meubles depuis 1998.   </a:t>
+            </a:r>
+            <a:r>
+              <a:rPr sz="1400" b="1" i="0">
+                <a:solidFill>
+                  <a:srgbClr val="07734A"/>
+                </a:solidFill>
+                <a:latin typeface="Verdana"/>
+              </a:rPr>
+              <a:t>» vrai</a:t>
+            </a:r>
+          </a:p>
+        </p:txBody>
+      </p:sp>
+      <p:sp>
+        <p:nvSpPr>
+          <p:cNvPr id="12" name="Rounded Rectangle 11"/>
+          <p:cNvSpPr/>
+          <p:nvPr/>
+        </p:nvSpPr>
+        <p:spPr>
+          <a:xfrm>
+            <a:off x="566928" y="2827528"/>
+            <a:ext cx="11057839" cy="559816"/>
+          </a:xfrm>
+          <a:prstGeom prst="roundRect">
+            <a:avLst>
+              <a:gd name="adj" fmla="val 26134"/>
+            </a:avLst>
+          </a:prstGeom>
+          <a:solidFill>
+            <a:srgbClr val="E6F5EE"/>
+          </a:solidFill>
+          <a:ln w="12700">
+            <a:solidFill>
+              <a:srgbClr val="EAEAE8"/>
+            </a:solidFill>
+          </a:ln>
+          <a:effectLst/>
+        </p:spPr>
+        <p:style>
+          <a:lnRef idx="1">
+            <a:schemeClr val="accent1"/>
+          </a:lnRef>
+          <a:fillRef idx="3">
+            <a:schemeClr val="accent1"/>
+          </a:fillRef>
+          <a:effectRef idx="2">
+            <a:schemeClr val="accent1"/>
+          </a:effectRef>
+          <a:fontRef idx="minor">
+            <a:schemeClr val="lt1"/>
+          </a:fontRef>
+        </p:style>
+        <p:txBody>
+          <a:bodyPr rtlCol="0" anchor="ctr"/>
+          <a:lstStyle/>
+          <a:p/>
+        </p:txBody>
+      </p:sp>
+      <p:sp>
+        <p:nvSpPr>
+          <p:cNvPr id="13" name="Rounded Rectangle 12"/>
+          <p:cNvSpPr/>
+          <p:nvPr/>
+        </p:nvSpPr>
+        <p:spPr>
+          <a:xfrm>
+            <a:off x="841247" y="2924556"/>
+            <a:ext cx="365760" cy="365760"/>
+          </a:xfrm>
+          <a:prstGeom prst="roundRect">
+            <a:avLst>
+              <a:gd name="adj" fmla="val 32500"/>
+            </a:avLst>
+          </a:prstGeom>
+          <a:solidFill>
+            <a:srgbClr val="E7F0F6"/>
+          </a:solidFill>
+          <a:ln>
+            <a:noFill/>
+          </a:ln>
+          <a:effectLst/>
+        </p:spPr>
+        <p:style>
+          <a:lnRef idx="1">
+            <a:schemeClr val="accent1"/>
+          </a:lnRef>
+          <a:fillRef idx="3">
+            <a:schemeClr val="accent1"/>
+          </a:fillRef>
+          <a:effectRef idx="2">
+            <a:schemeClr val="accent1"/>
+          </a:effectRef>
+          <a:fontRef idx="minor">
+            <a:schemeClr val="lt1"/>
+          </a:fontRef>
+        </p:style>
+        <p:txBody>
+          <a:bodyPr rtlCol="0" anchor="ctr"/>
+          <a:lstStyle/>
+          <a:p/>
+        </p:txBody>
+      </p:sp>
+      <p:sp>
+        <p:nvSpPr>
+          <p:cNvPr id="14" name="TextBox 13"/>
+          <p:cNvSpPr txBox="1"/>
+          <p:nvPr/>
+        </p:nvSpPr>
+        <p:spPr>
+          <a:xfrm>
+            <a:off x="841247" y="2988564"/>
+            <a:ext cx="365760" cy="256032"/>
+          </a:xfrm>
+          <a:prstGeom prst="rect">
+            <a:avLst/>
+          </a:prstGeom>
+          <a:noFill/>
+        </p:spPr>
+        <p:txBody>
+          <a:bodyPr wrap="square" lIns="0" rIns="0" tIns="0" bIns="0" anchor="t">
+            <a:spAutoFit/>
+          </a:bodyPr>
+          <a:lstStyle/>
+          <a:p>
+            <a:pPr algn="ctr">
+              <a:lnSpc>
+                <a:spcPct val="135000"/>
+              </a:lnSpc>
+            </a:pPr>
+            <a:r>
+              <a:rPr sz="1500" b="1" i="0">
+                <a:solidFill>
+                  <a:srgbClr val="1D6B8F"/>
+                </a:solidFill>
+                <a:latin typeface="Verdana"/>
+              </a:rPr>
+              <a:t>2</a:t>
+            </a:r>
+          </a:p>
+        </p:txBody>
+      </p:sp>
+      <p:sp>
+        <p:nvSpPr>
+          <p:cNvPr id="15" name="TextBox 14"/>
+          <p:cNvSpPr txBox="1"/>
+          <p:nvPr/>
+        </p:nvSpPr>
+        <p:spPr>
+          <a:xfrm>
+            <a:off x="1344168" y="2982975"/>
+            <a:ext cx="10097719" cy="285496"/>
+          </a:xfrm>
+          <a:prstGeom prst="rect">
+            <a:avLst/>
+          </a:prstGeom>
+          <a:noFill/>
+        </p:spPr>
+        <p:txBody>
+          <a:bodyPr wrap="square" lIns="0" rIns="0" tIns="0" bIns="0" anchor="t">
+            <a:spAutoFit/>
+          </a:bodyPr>
+          <a:lstStyle/>
+          <a:p>
+            <a:pPr algn="l">
+              <a:lnSpc>
+                <a:spcPct val="140000"/>
+              </a:lnSpc>
+            </a:pPr>
+            <a:r>
+              <a:rPr sz="1400" b="0" i="0">
+                <a:solidFill>
+                  <a:srgbClr val="3A3D40"/>
+                </a:solidFill>
+                <a:latin typeface="Verdana"/>
+              </a:rPr>
+              <a:t>« Signaler les écarts » est une des tâches.   </a:t>
+            </a:r>
+            <a:r>
+              <a:rPr sz="1400" b="1" i="0">
+                <a:solidFill>
+                  <a:srgbClr val="07734A"/>
+                </a:solidFill>
+                <a:latin typeface="Verdana"/>
+              </a:rPr>
+              <a:t>» vrai</a:t>
+            </a:r>
+          </a:p>
+        </p:txBody>
+      </p:sp>
+      <p:sp>
+        <p:nvSpPr>
+          <p:cNvPr id="16" name="Rounded Rectangle 15"/>
+          <p:cNvSpPr/>
+          <p:nvPr/>
+        </p:nvSpPr>
+        <p:spPr>
+          <a:xfrm>
+            <a:off x="566928" y="3515359"/>
+            <a:ext cx="11057839" cy="559816"/>
+          </a:xfrm>
+          <a:prstGeom prst="roundRect">
+            <a:avLst>
+              <a:gd name="adj" fmla="val 26134"/>
+            </a:avLst>
+          </a:prstGeom>
+          <a:solidFill>
+            <a:srgbClr val="E6F5EE"/>
+          </a:solidFill>
+          <a:ln w="12700">
+            <a:solidFill>
+              <a:srgbClr val="EAEAE8"/>
+            </a:solidFill>
+          </a:ln>
+          <a:effectLst/>
+        </p:spPr>
+        <p:style>
+          <a:lnRef idx="1">
+            <a:schemeClr val="accent1"/>
+          </a:lnRef>
+          <a:fillRef idx="3">
+            <a:schemeClr val="accent1"/>
+          </a:fillRef>
+          <a:effectRef idx="2">
+            <a:schemeClr val="accent1"/>
+          </a:effectRef>
+          <a:fontRef idx="minor">
+            <a:schemeClr val="lt1"/>
+          </a:fontRef>
+        </p:style>
+        <p:txBody>
+          <a:bodyPr rtlCol="0" anchor="ctr"/>
+          <a:lstStyle/>
+          <a:p/>
+        </p:txBody>
+      </p:sp>
+      <p:sp>
+        <p:nvSpPr>
+          <p:cNvPr id="17" name="Rounded Rectangle 16"/>
+          <p:cNvSpPr/>
+          <p:nvPr/>
+        </p:nvSpPr>
+        <p:spPr>
+          <a:xfrm>
+            <a:off x="841247" y="3612388"/>
+            <a:ext cx="365760" cy="365760"/>
+          </a:xfrm>
+          <a:prstGeom prst="roundRect">
+            <a:avLst>
+              <a:gd name="adj" fmla="val 32500"/>
+            </a:avLst>
+          </a:prstGeom>
+          <a:solidFill>
+            <a:srgbClr val="E7F0F6"/>
+          </a:solidFill>
+          <a:ln>
+            <a:noFill/>
+          </a:ln>
+          <a:effectLst/>
+        </p:spPr>
+        <p:style>
+          <a:lnRef idx="1">
+            <a:schemeClr val="accent1"/>
+          </a:lnRef>
+          <a:fillRef idx="3">
+            <a:schemeClr val="accent1"/>
+          </a:fillRef>
+          <a:effectRef idx="2">
+            <a:schemeClr val="accent1"/>
+          </a:effectRef>
+          <a:fontRef idx="minor">
+            <a:schemeClr val="lt1"/>
+          </a:fontRef>
+        </p:style>
+        <p:txBody>
+          <a:bodyPr rtlCol="0" anchor="ctr"/>
+          <a:lstStyle/>
+          <a:p/>
+        </p:txBody>
+      </p:sp>
+      <p:sp>
+        <p:nvSpPr>
+          <p:cNvPr id="18" name="TextBox 17"/>
+          <p:cNvSpPr txBox="1"/>
+          <p:nvPr/>
+        </p:nvSpPr>
+        <p:spPr>
+          <a:xfrm>
+            <a:off x="841247" y="3676395"/>
+            <a:ext cx="365760" cy="256032"/>
+          </a:xfrm>
+          <a:prstGeom prst="rect">
+            <a:avLst/>
+          </a:prstGeom>
+          <a:noFill/>
+        </p:spPr>
+        <p:txBody>
+          <a:bodyPr wrap="square" lIns="0" rIns="0" tIns="0" bIns="0" anchor="t">
+            <a:spAutoFit/>
+          </a:bodyPr>
+          <a:lstStyle/>
+          <a:p>
+            <a:pPr algn="ctr">
+              <a:lnSpc>
+                <a:spcPct val="135000"/>
+              </a:lnSpc>
+            </a:pPr>
+            <a:r>
+              <a:rPr sz="1500" b="1" i="0">
+                <a:solidFill>
+                  <a:srgbClr val="1D6B8F"/>
+                </a:solidFill>
+                <a:latin typeface="Verdana"/>
+              </a:rPr>
+              <a:t>3</a:t>
+            </a:r>
+          </a:p>
+        </p:txBody>
+      </p:sp>
+      <p:sp>
+        <p:nvSpPr>
+          <p:cNvPr id="19" name="TextBox 18"/>
+          <p:cNvSpPr txBox="1"/>
+          <p:nvPr/>
+        </p:nvSpPr>
+        <p:spPr>
+          <a:xfrm>
+            <a:off x="1344168" y="3670807"/>
+            <a:ext cx="10097719" cy="285496"/>
+          </a:xfrm>
+          <a:prstGeom prst="rect">
+            <a:avLst/>
+          </a:prstGeom>
+          <a:noFill/>
+        </p:spPr>
+        <p:txBody>
+          <a:bodyPr wrap="square" lIns="0" rIns="0" tIns="0" bIns="0" anchor="t">
+            <a:spAutoFit/>
+          </a:bodyPr>
+          <a:lstStyle/>
+          <a:p>
+            <a:pPr algn="l">
+              <a:lnSpc>
+                <a:spcPct val="140000"/>
+              </a:lnSpc>
+            </a:pPr>
+            <a:r>
+              <a:rPr sz="1400" b="0" i="0">
+                <a:solidFill>
+                  <a:srgbClr val="3A3D40"/>
+                </a:solidFill>
+                <a:latin typeface="Verdana"/>
+              </a:rPr>
+              <a:t>Connaître le logiciel est obligatoire.   </a:t>
+            </a:r>
+            <a:r>
+              <a:rPr sz="1400" b="1" i="0">
+                <a:solidFill>
+                  <a:srgbClr val="07734A"/>
+                </a:solidFill>
+                <a:latin typeface="Verdana"/>
+              </a:rPr>
+              <a:t>» faux — c'est un atout</a:t>
+            </a:r>
+          </a:p>
+        </p:txBody>
+      </p:sp>
+      <p:sp>
+        <p:nvSpPr>
+          <p:cNvPr id="20" name="Rounded Rectangle 19"/>
+          <p:cNvSpPr/>
+          <p:nvPr/>
+        </p:nvSpPr>
+        <p:spPr>
+          <a:xfrm>
+            <a:off x="566928" y="4203192"/>
+            <a:ext cx="11057839" cy="559816"/>
+          </a:xfrm>
+          <a:prstGeom prst="roundRect">
+            <a:avLst>
+              <a:gd name="adj" fmla="val 26134"/>
+            </a:avLst>
+          </a:prstGeom>
+          <a:solidFill>
+            <a:srgbClr val="E6F5EE"/>
+          </a:solidFill>
+          <a:ln w="12700">
+            <a:solidFill>
+              <a:srgbClr val="EAEAE8"/>
+            </a:solidFill>
+          </a:ln>
+          <a:effectLst/>
+        </p:spPr>
+        <p:style>
+          <a:lnRef idx="1">
+            <a:schemeClr val="accent1"/>
+          </a:lnRef>
+          <a:fillRef idx="3">
+            <a:schemeClr val="accent1"/>
+          </a:fillRef>
+          <a:effectRef idx="2">
+            <a:schemeClr val="accent1"/>
+          </a:effectRef>
+          <a:fontRef idx="minor">
+            <a:schemeClr val="lt1"/>
+          </a:fontRef>
+        </p:style>
+        <p:txBody>
+          <a:bodyPr rtlCol="0" anchor="ctr"/>
+          <a:lstStyle/>
+          <a:p/>
+        </p:txBody>
+      </p:sp>
+      <p:sp>
+        <p:nvSpPr>
+          <p:cNvPr id="21" name="Rounded Rectangle 20"/>
+          <p:cNvSpPr/>
+          <p:nvPr/>
+        </p:nvSpPr>
+        <p:spPr>
+          <a:xfrm>
+            <a:off x="841247" y="4300220"/>
+            <a:ext cx="365760" cy="365760"/>
+          </a:xfrm>
+          <a:prstGeom prst="roundRect">
+            <a:avLst>
+              <a:gd name="adj" fmla="val 32500"/>
+            </a:avLst>
+          </a:prstGeom>
+          <a:solidFill>
+            <a:srgbClr val="E7F0F6"/>
+          </a:solidFill>
+          <a:ln>
+            <a:noFill/>
+          </a:ln>
+          <a:effectLst/>
+        </p:spPr>
+        <p:style>
+          <a:lnRef idx="1">
+            <a:schemeClr val="accent1"/>
+          </a:lnRef>
+          <a:fillRef idx="3">
+            <a:schemeClr val="accent1"/>
+          </a:fillRef>
+          <a:effectRef idx="2">
+            <a:schemeClr val="accent1"/>
+          </a:effectRef>
+          <a:fontRef idx="minor">
+            <a:schemeClr val="lt1"/>
+          </a:fontRef>
+        </p:style>
+        <p:txBody>
+          <a:bodyPr rtlCol="0" anchor="ctr"/>
+          <a:lstStyle/>
+          <a:p/>
+        </p:txBody>
+      </p:sp>
+      <p:sp>
+        <p:nvSpPr>
+          <p:cNvPr id="22" name="TextBox 21"/>
+          <p:cNvSpPr txBox="1"/>
+          <p:nvPr/>
+        </p:nvSpPr>
+        <p:spPr>
+          <a:xfrm>
+            <a:off x="841247" y="4364228"/>
+            <a:ext cx="365760" cy="256032"/>
+          </a:xfrm>
+          <a:prstGeom prst="rect">
+            <a:avLst/>
+          </a:prstGeom>
+          <a:noFill/>
+        </p:spPr>
+        <p:txBody>
+          <a:bodyPr wrap="square" lIns="0" rIns="0" tIns="0" bIns="0" anchor="t">
+            <a:spAutoFit/>
+          </a:bodyPr>
+          <a:lstStyle/>
+          <a:p>
+            <a:pPr algn="ctr">
+              <a:lnSpc>
+                <a:spcPct val="135000"/>
+              </a:lnSpc>
+            </a:pPr>
+            <a:r>
+              <a:rPr sz="1500" b="1" i="0">
+                <a:solidFill>
+                  <a:srgbClr val="1D6B8F"/>
+                </a:solidFill>
+                <a:latin typeface="Verdana"/>
+              </a:rPr>
+              <a:t>4</a:t>
+            </a:r>
+          </a:p>
+        </p:txBody>
+      </p:sp>
+      <p:sp>
+        <p:nvSpPr>
+          <p:cNvPr id="23" name="TextBox 22"/>
+          <p:cNvSpPr txBox="1"/>
+          <p:nvPr/>
+        </p:nvSpPr>
+        <p:spPr>
+          <a:xfrm>
+            <a:off x="1344168" y="4358640"/>
+            <a:ext cx="10097719" cy="285496"/>
+          </a:xfrm>
+          <a:prstGeom prst="rect">
+            <a:avLst/>
+          </a:prstGeom>
+          <a:noFill/>
+        </p:spPr>
+        <p:txBody>
+          <a:bodyPr wrap="square" lIns="0" rIns="0" tIns="0" bIns="0" anchor="t">
+            <a:spAutoFit/>
+          </a:bodyPr>
+          <a:lstStyle/>
+          <a:p>
+            <a:pPr algn="l">
+              <a:lnSpc>
+                <a:spcPct val="140000"/>
+              </a:lnSpc>
+            </a:pPr>
+            <a:r>
+              <a:rPr sz="1400" b="0" i="0">
+                <a:solidFill>
+                  <a:srgbClr val="3A3D40"/>
+                </a:solidFill>
+                <a:latin typeface="Verdana"/>
+              </a:rPr>
+              <a:t>Deux ans d'expérience sont requis.   </a:t>
+            </a:r>
+            <a:r>
+              <a:rPr sz="1400" b="1" i="0">
+                <a:solidFill>
+                  <a:srgbClr val="07734A"/>
+                </a:solidFill>
+                <a:latin typeface="Verdana"/>
+              </a:rPr>
+              <a:t>» vrai</a:t>
+            </a:r>
+          </a:p>
+        </p:txBody>
+      </p:sp>
+      <p:sp>
+        <p:nvSpPr>
+          <p:cNvPr id="24" name="Rounded Rectangle 23"/>
+          <p:cNvSpPr/>
+          <p:nvPr/>
+        </p:nvSpPr>
+        <p:spPr>
+          <a:xfrm>
+            <a:off x="566928" y="4891023"/>
+            <a:ext cx="11057839" cy="559816"/>
+          </a:xfrm>
+          <a:prstGeom prst="roundRect">
+            <a:avLst>
+              <a:gd name="adj" fmla="val 26134"/>
+            </a:avLst>
+          </a:prstGeom>
+          <a:solidFill>
+            <a:srgbClr val="E6F5EE"/>
+          </a:solidFill>
+          <a:ln w="12700">
+            <a:solidFill>
+              <a:srgbClr val="EAEAE8"/>
+            </a:solidFill>
+          </a:ln>
+          <a:effectLst/>
+        </p:spPr>
+        <p:style>
+          <a:lnRef idx="1">
+            <a:schemeClr val="accent1"/>
+          </a:lnRef>
+          <a:fillRef idx="3">
+            <a:schemeClr val="accent1"/>
+          </a:fillRef>
+          <a:effectRef idx="2">
+            <a:schemeClr val="accent1"/>
+          </a:effectRef>
+          <a:fontRef idx="minor">
+            <a:schemeClr val="lt1"/>
+          </a:fontRef>
+        </p:style>
+        <p:txBody>
+          <a:bodyPr rtlCol="0" anchor="ctr"/>
+          <a:lstStyle/>
+          <a:p/>
+        </p:txBody>
+      </p:sp>
+      <p:sp>
+        <p:nvSpPr>
+          <p:cNvPr id="25" name="Rounded Rectangle 24"/>
+          <p:cNvSpPr/>
+          <p:nvPr/>
+        </p:nvSpPr>
+        <p:spPr>
+          <a:xfrm>
+            <a:off x="841247" y="4988051"/>
+            <a:ext cx="365760" cy="365760"/>
+          </a:xfrm>
+          <a:prstGeom prst="roundRect">
+            <a:avLst>
+              <a:gd name="adj" fmla="val 32500"/>
+            </a:avLst>
+          </a:prstGeom>
+          <a:solidFill>
+            <a:srgbClr val="E7F0F6"/>
+          </a:solidFill>
+          <a:ln>
+            <a:noFill/>
+          </a:ln>
+          <a:effectLst/>
+        </p:spPr>
+        <p:style>
+          <a:lnRef idx="1">
+            <a:schemeClr val="accent1"/>
+          </a:lnRef>
+          <a:fillRef idx="3">
+            <a:schemeClr val="accent1"/>
+          </a:fillRef>
+          <a:effectRef idx="2">
+            <a:schemeClr val="accent1"/>
+          </a:effectRef>
+          <a:fontRef idx="minor">
+            <a:schemeClr val="lt1"/>
+          </a:fontRef>
+        </p:style>
+        <p:txBody>
+          <a:bodyPr rtlCol="0" anchor="ctr"/>
+          <a:lstStyle/>
+          <a:p/>
+        </p:txBody>
+      </p:sp>
+      <p:sp>
+        <p:nvSpPr>
+          <p:cNvPr id="26" name="TextBox 25"/>
+          <p:cNvSpPr txBox="1"/>
+          <p:nvPr/>
+        </p:nvSpPr>
+        <p:spPr>
+          <a:xfrm>
+            <a:off x="841247" y="5052059"/>
+            <a:ext cx="365760" cy="256032"/>
+          </a:xfrm>
+          <a:prstGeom prst="rect">
+            <a:avLst/>
+          </a:prstGeom>
+          <a:noFill/>
+        </p:spPr>
+        <p:txBody>
+          <a:bodyPr wrap="square" lIns="0" rIns="0" tIns="0" bIns="0" anchor="t">
+            <a:spAutoFit/>
+          </a:bodyPr>
+          <a:lstStyle/>
+          <a:p>
+            <a:pPr algn="ctr">
+              <a:lnSpc>
+                <a:spcPct val="135000"/>
+              </a:lnSpc>
+            </a:pPr>
+            <a:r>
+              <a:rPr sz="1500" b="1" i="0">
+                <a:solidFill>
+                  <a:srgbClr val="1D6B8F"/>
+                </a:solidFill>
+                <a:latin typeface="Verdana"/>
+              </a:rPr>
+              <a:t>5</a:t>
+            </a:r>
+          </a:p>
+        </p:txBody>
+      </p:sp>
+      <p:sp>
+        <p:nvSpPr>
+          <p:cNvPr id="27" name="TextBox 26"/>
+          <p:cNvSpPr txBox="1"/>
+          <p:nvPr/>
+        </p:nvSpPr>
+        <p:spPr>
+          <a:xfrm>
+            <a:off x="1344168" y="5046471"/>
+            <a:ext cx="10097719" cy="285496"/>
+          </a:xfrm>
+          <a:prstGeom prst="rect">
+            <a:avLst/>
+          </a:prstGeom>
+          <a:noFill/>
+        </p:spPr>
+        <p:txBody>
+          <a:bodyPr wrap="square" lIns="0" rIns="0" tIns="0" bIns="0" anchor="t">
+            <a:spAutoFit/>
+          </a:bodyPr>
+          <a:lstStyle/>
+          <a:p>
+            <a:pPr algn="l">
+              <a:lnSpc>
+                <a:spcPct val="140000"/>
+              </a:lnSpc>
+            </a:pPr>
+            <a:r>
+              <a:rPr sz="1400" b="0" i="0">
+                <a:solidFill>
+                  <a:srgbClr val="3A3D40"/>
+                </a:solidFill>
+                <a:latin typeface="Verdana"/>
+              </a:rPr>
+              <a:t>Un poste permanent est un contrat de six mois.   </a:t>
+            </a:r>
+            <a:r>
+              <a:rPr sz="1400" b="1" i="0">
+                <a:solidFill>
+                  <a:srgbClr val="07734A"/>
+                </a:solidFill>
+                <a:latin typeface="Verdana"/>
+              </a:rPr>
+              <a:t>» faux — sans date de fin</a:t>
+            </a:r>
+          </a:p>
+        </p:txBody>
+      </p:sp>
+      <p:sp>
+        <p:nvSpPr>
+          <p:cNvPr id="28" name="Rounded Rectangle 27"/>
+          <p:cNvSpPr/>
+          <p:nvPr/>
+        </p:nvSpPr>
+        <p:spPr>
+          <a:xfrm>
+            <a:off x="566928" y="5578856"/>
+            <a:ext cx="11057839" cy="559816"/>
+          </a:xfrm>
+          <a:prstGeom prst="roundRect">
+            <a:avLst>
+              <a:gd name="adj" fmla="val 26134"/>
+            </a:avLst>
+          </a:prstGeom>
+          <a:solidFill>
+            <a:srgbClr val="E6F5EE"/>
+          </a:solidFill>
+          <a:ln w="12700">
+            <a:solidFill>
+              <a:srgbClr val="EAEAE8"/>
+            </a:solidFill>
+          </a:ln>
+          <a:effectLst/>
+        </p:spPr>
+        <p:style>
+          <a:lnRef idx="1">
+            <a:schemeClr val="accent1"/>
+          </a:lnRef>
+          <a:fillRef idx="3">
+            <a:schemeClr val="accent1"/>
+          </a:fillRef>
+          <a:effectRef idx="2">
+            <a:schemeClr val="accent1"/>
+          </a:effectRef>
+          <a:fontRef idx="minor">
+            <a:schemeClr val="lt1"/>
+          </a:fontRef>
+        </p:style>
+        <p:txBody>
+          <a:bodyPr rtlCol="0" anchor="ctr"/>
+          <a:lstStyle/>
+          <a:p/>
+        </p:txBody>
+      </p:sp>
+      <p:sp>
+        <p:nvSpPr>
+          <p:cNvPr id="29" name="Rounded Rectangle 28"/>
+          <p:cNvSpPr/>
+          <p:nvPr/>
+        </p:nvSpPr>
+        <p:spPr>
+          <a:xfrm>
+            <a:off x="841247" y="5675884"/>
+            <a:ext cx="365760" cy="365760"/>
+          </a:xfrm>
+          <a:prstGeom prst="roundRect">
+            <a:avLst>
+              <a:gd name="adj" fmla="val 32500"/>
+            </a:avLst>
+          </a:prstGeom>
+          <a:solidFill>
+            <a:srgbClr val="E7F0F6"/>
+          </a:solidFill>
+          <a:ln>
+            <a:noFill/>
+          </a:ln>
+          <a:effectLst/>
+        </p:spPr>
+        <p:style>
+          <a:lnRef idx="1">
+            <a:schemeClr val="accent1"/>
+          </a:lnRef>
+          <a:fillRef idx="3">
+            <a:schemeClr val="accent1"/>
+          </a:fillRef>
+          <a:effectRef idx="2">
+            <a:schemeClr val="accent1"/>
+          </a:effectRef>
+          <a:fontRef idx="minor">
+            <a:schemeClr val="lt1"/>
+          </a:fontRef>
+        </p:style>
+        <p:txBody>
+          <a:bodyPr rtlCol="0" anchor="ctr"/>
+          <a:lstStyle/>
+          <a:p/>
+        </p:txBody>
+      </p:sp>
+      <p:sp>
+        <p:nvSpPr>
+          <p:cNvPr id="30" name="TextBox 29"/>
+          <p:cNvSpPr txBox="1"/>
+          <p:nvPr/>
+        </p:nvSpPr>
+        <p:spPr>
+          <a:xfrm>
+            <a:off x="841247" y="5739892"/>
+            <a:ext cx="365760" cy="256032"/>
+          </a:xfrm>
+          <a:prstGeom prst="rect">
+            <a:avLst/>
+          </a:prstGeom>
+          <a:noFill/>
+        </p:spPr>
+        <p:txBody>
+          <a:bodyPr wrap="square" lIns="0" rIns="0" tIns="0" bIns="0" anchor="t">
+            <a:spAutoFit/>
+          </a:bodyPr>
+          <a:lstStyle/>
+          <a:p>
+            <a:pPr algn="ctr">
+              <a:lnSpc>
+                <a:spcPct val="135000"/>
+              </a:lnSpc>
+            </a:pPr>
+            <a:r>
+              <a:rPr sz="1500" b="1" i="0">
+                <a:solidFill>
+                  <a:srgbClr val="1D6B8F"/>
+                </a:solidFill>
+                <a:latin typeface="Verdana"/>
+              </a:rPr>
+              <a:t>6</a:t>
+            </a:r>
+          </a:p>
+        </p:txBody>
+      </p:sp>
+      <p:sp>
+        <p:nvSpPr>
+          <p:cNvPr id="31" name="TextBox 30"/>
+          <p:cNvSpPr txBox="1"/>
+          <p:nvPr/>
+        </p:nvSpPr>
+        <p:spPr>
+          <a:xfrm>
+            <a:off x="1344168" y="5734304"/>
+            <a:ext cx="10097719" cy="285496"/>
+          </a:xfrm>
+          <a:prstGeom prst="rect">
+            <a:avLst/>
+          </a:prstGeom>
+          <a:noFill/>
+        </p:spPr>
+        <p:txBody>
+          <a:bodyPr wrap="square" lIns="0" rIns="0" tIns="0" bIns="0" anchor="t">
+            <a:spAutoFit/>
+          </a:bodyPr>
+          <a:lstStyle/>
+          <a:p>
+            <a:pPr algn="l">
+              <a:lnSpc>
+                <a:spcPct val="140000"/>
+              </a:lnSpc>
+            </a:pPr>
+            <a:r>
+              <a:rPr sz="1400" b="0" i="0">
+                <a:solidFill>
+                  <a:srgbClr val="3A3D40"/>
+                </a:solidFill>
+                <a:latin typeface="Verdana"/>
+              </a:rPr>
+              <a:t>Marisol devrait postuler malgré l'atout manquant.   </a:t>
+            </a:r>
+            <a:r>
+              <a:rPr sz="1400" b="1" i="0">
+                <a:solidFill>
+                  <a:srgbClr val="07734A"/>
+                </a:solidFill>
+                <a:latin typeface="Verdana"/>
+              </a:rPr>
+              <a:t>» vrai</a:t>
+            </a:r>
+          </a:p>
+        </p:txBody>
+      </p:sp>
+    </p:spTree>
+  </p:cSld>
+  <p:clrMapOvr>
+    <a:masterClrMapping/>
+  </p:clrMapOvr>
+</p:sld>
+</file>
+
+<file path=ppt/slides/slide13.xml><?xml version="1.0" encoding="utf-8"?>
+<p:sld xmlns:a="http://schemas.openxmlformats.org/drawingml/2006/main" xmlns:p="http://schemas.openxmlformats.org/presentationml/2006/main" xmlns:r="http://schemas.openxmlformats.org/officeDocument/2006/relationships">
+  <p:cSld>
+    <p:spTree>
+      <p:nvGrpSpPr>
+        <p:cNvPr id="1" name=""/>
+        <p:cNvGrpSpPr/>
+        <p:nvPr/>
+      </p:nvGrpSpPr>
+      <p:grpSpPr/>
+      <p:sp>
+        <p:nvSpPr>
+          <p:cNvPr id="2" name="Rectangle 1"/>
+          <p:cNvSpPr/>
+          <p:nvPr/>
+        </p:nvSpPr>
+        <p:spPr>
+          <a:xfrm>
+            <a:off x="0" y="0"/>
+            <a:ext cx="12191695" cy="6858000"/>
+          </a:xfrm>
+          <a:prstGeom prst="rect">
+            <a:avLst/>
+          </a:prstGeom>
+          <a:solidFill>
+            <a:srgbClr val="F7F7F5"/>
+          </a:solidFill>
+          <a:ln>
+            <a:noFill/>
+          </a:ln>
+          <a:effectLst/>
+        </p:spPr>
+        <p:style>
+          <a:lnRef idx="1">
+            <a:schemeClr val="accent1"/>
+          </a:lnRef>
+          <a:fillRef idx="3">
+            <a:schemeClr val="accent1"/>
+          </a:fillRef>
+          <a:effectRef idx="2">
+            <a:schemeClr val="accent1"/>
+          </a:effectRef>
+          <a:fontRef idx="minor">
+            <a:schemeClr val="lt1"/>
+          </a:fontRef>
+        </p:style>
+        <p:txBody>
+          <a:bodyPr rtlCol="0" anchor="ctr"/>
+          <a:lstStyle/>
+          <a:p/>
+        </p:txBody>
+      </p:sp>
+      <p:sp>
+        <p:nvSpPr>
+          <p:cNvPr id="3" name="TextBox 2"/>
+          <p:cNvSpPr txBox="1"/>
+          <p:nvPr/>
+        </p:nvSpPr>
+        <p:spPr>
+          <a:xfrm>
+            <a:off x="566928" y="6355080"/>
+            <a:ext cx="6400800" cy="219456"/>
+          </a:xfrm>
+          <a:prstGeom prst="rect">
+            <a:avLst/>
+          </a:prstGeom>
+          <a:noFill/>
+        </p:spPr>
+        <p:txBody>
+          <a:bodyPr wrap="square" lIns="0" rIns="0" tIns="0" bIns="0" anchor="t">
+            <a:spAutoFit/>
+          </a:bodyPr>
+          <a:lstStyle/>
+          <a:p>
+            <a:pPr algn="l">
+              <a:lnSpc>
+                <a:spcPct val="135000"/>
+              </a:lnSpc>
+            </a:pPr>
+            <a:r>
+              <a:rPr sz="1200" b="0" i="0">
+                <a:solidFill>
+                  <a:srgbClr val="6E7175"/>
+                </a:solidFill>
+                <a:latin typeface="Verdana"/>
+              </a:rPr>
+              <a:t>B1 · Chercher un emploi</a:t>
+            </a:r>
+          </a:p>
+        </p:txBody>
+      </p:sp>
+      <p:sp>
+        <p:nvSpPr>
+          <p:cNvPr id="4" name="TextBox 3"/>
+          <p:cNvSpPr txBox="1"/>
+          <p:nvPr/>
+        </p:nvSpPr>
+        <p:spPr>
+          <a:xfrm>
+            <a:off x="10710367" y="6355080"/>
+            <a:ext cx="914400" cy="219456"/>
+          </a:xfrm>
+          <a:prstGeom prst="rect">
+            <a:avLst/>
+          </a:prstGeom>
+          <a:noFill/>
+        </p:spPr>
+        <p:txBody>
+          <a:bodyPr wrap="square" lIns="0" rIns="0" tIns="0" bIns="0" anchor="t">
+            <a:spAutoFit/>
+          </a:bodyPr>
+          <a:lstStyle/>
+          <a:p>
+            <a:pPr algn="r">
+              <a:lnSpc>
+                <a:spcPct val="135000"/>
+              </a:lnSpc>
+            </a:pPr>
+            <a:r>
+              <a:rPr sz="1200" b="0" i="0">
+                <a:solidFill>
+                  <a:srgbClr val="6E7175"/>
+                </a:solidFill>
+                <a:latin typeface="Verdana"/>
+              </a:rPr>
+              <a:t>13</a:t>
+            </a:r>
+          </a:p>
+        </p:txBody>
+      </p:sp>
+      <p:sp>
+        <p:nvSpPr>
           <p:cNvPr id="5" name="Rectangle 4"/>
           <p:cNvSpPr/>
           <p:nvPr/>
@@ -10147,7 +11899,7 @@
                 </a:solidFill>
                 <a:latin typeface="Verdana"/>
               </a:rPr>
-              <a:t>ANALYSE</a:t>
+              <a:t>LE DOCUMENT</a:t>
             </a:r>
           </a:p>
         </p:txBody>
@@ -10186,25 +11938,64 @@
                 </a:solidFill>
                 <a:latin typeface="Verdana"/>
               </a:rPr>
-              <a:t>Les quatre parties, dans l'ordre</a:t>
-            </a:r>
-          </a:p>
-        </p:txBody>
-      </p:sp>
-      <p:sp>
-        <p:nvSpPr>
-          <p:cNvPr id="7" name="Rounded Rectangle 6"/>
+              <a:t>L'offre de Boisverte, au complet</a:t>
+            </a:r>
+          </a:p>
+        </p:txBody>
+      </p:sp>
+      <p:sp>
+        <p:nvSpPr>
+          <p:cNvPr id="7" name="TextBox 6"/>
+          <p:cNvSpPr txBox="1"/>
+          <p:nvPr/>
+        </p:nvSpPr>
+        <p:spPr>
+          <a:xfrm>
+            <a:off x="566928" y="1737360"/>
+            <a:ext cx="11057839" cy="630936"/>
+          </a:xfrm>
+          <a:prstGeom prst="rect">
+            <a:avLst/>
+          </a:prstGeom>
+          <a:noFill/>
+        </p:spPr>
+        <p:txBody>
+          <a:bodyPr wrap="square" lIns="0" rIns="0" tIns="0" bIns="0" anchor="t">
+            <a:spAutoFit/>
+          </a:bodyPr>
+          <a:lstStyle/>
+          <a:p>
+            <a:pPr algn="l">
+              <a:lnSpc>
+                <a:spcPct val="135000"/>
+              </a:lnSpc>
+            </a:pPr>
+            <a:r>
+              <a:rPr sz="1800" b="0" i="0">
+                <a:solidFill>
+                  <a:srgbClr val="6E7175"/>
+                </a:solidFill>
+                <a:latin typeface="Verdana"/>
+              </a:rPr>
+              <a:t>C'est l'offre que Marisol et Djamila viennent de lire. Le bloc B entier y revient ; ceux qui ont apporté la leur travaillent sur la leur.</a:t>
+            </a:r>
+          </a:p>
+        </p:txBody>
+      </p:sp>
+      <p:sp>
+        <p:nvSpPr>
+          <p:cNvPr id="8" name="Rounded Rectangle 7"/>
           <p:cNvSpPr/>
           <p:nvPr/>
         </p:nvSpPr>
         <p:spPr>
           <a:xfrm>
-            <a:off x="566928" y="1810512"/>
-            <a:ext cx="11057839" cy="2798064"/>
+            <a:off x="566928" y="2532888"/>
+            <a:ext cx="11057839" cy="2830068"/>
           </a:xfrm>
           <a:prstGeom prst="roundRect">
             <a:avLst>
-              <a:gd name="adj" fmla="val 5228"/>
+              <a:gd name="adj" fmla="val 5169"/>
             </a:avLst>
           </a:prstGeom>
           <a:solidFill>
@@ -10239,576 +12030,14 @@
       </p:sp>
       <p:sp>
         <p:nvSpPr>
-          <p:cNvPr id="8" name="TextBox 7"/>
-          <p:cNvSpPr txBox="1"/>
-          <p:nvPr/>
-        </p:nvSpPr>
-        <p:spPr>
-          <a:xfrm>
-            <a:off x="932688" y="1975104"/>
-            <a:ext cx="3291492" cy="237744"/>
-          </a:xfrm>
-          <a:prstGeom prst="rect">
-            <a:avLst/>
-          </a:prstGeom>
-          <a:noFill/>
-        </p:spPr>
-        <p:txBody>
-          <a:bodyPr wrap="square" lIns="0" rIns="0" tIns="0" bIns="0" anchor="t">
-            <a:spAutoFit/>
-          </a:bodyPr>
-          <a:lstStyle/>
-          <a:p>
-            <a:pPr algn="l">
-              <a:lnSpc>
-                <a:spcPct val="135000"/>
-              </a:lnSpc>
-            </a:pPr>
-            <a:r>
-              <a:rPr sz="1300" b="1" i="0" spc="156">
-                <a:solidFill>
-                  <a:srgbClr val="6E7175"/>
-                </a:solidFill>
-                <a:latin typeface="Verdana"/>
-              </a:rPr>
-              <a:t>LA PARTIE</a:t>
-            </a:r>
-          </a:p>
-        </p:txBody>
-      </p:sp>
-      <p:sp>
-        <p:nvSpPr>
           <p:cNvPr id="9" name="TextBox 8"/>
           <p:cNvSpPr txBox="1"/>
           <p:nvPr/>
         </p:nvSpPr>
         <p:spPr>
           <a:xfrm>
-            <a:off x="4443636" y="1975104"/>
-            <a:ext cx="6595914" cy="237744"/>
-          </a:xfrm>
-          <a:prstGeom prst="rect">
-            <a:avLst/>
-          </a:prstGeom>
-          <a:noFill/>
-        </p:spPr>
-        <p:txBody>
-          <a:bodyPr wrap="square" lIns="0" rIns="0" tIns="0" bIns="0" anchor="t">
-            <a:spAutoFit/>
-          </a:bodyPr>
-          <a:lstStyle/>
-          <a:p>
-            <a:pPr algn="l">
-              <a:lnSpc>
-                <a:spcPct val="135000"/>
-              </a:lnSpc>
-            </a:pPr>
-            <a:r>
-              <a:rPr sz="1300" b="1" i="0" spc="156">
-                <a:solidFill>
-                  <a:srgbClr val="6E7175"/>
-                </a:solidFill>
-                <a:latin typeface="Verdana"/>
-              </a:rPr>
-              <a:t>CE QU'ON Y TROUVE</a:t>
-            </a:r>
-          </a:p>
-        </p:txBody>
-      </p:sp>
-      <p:sp>
-        <p:nvSpPr>
-          <p:cNvPr id="10" name="TextBox 9"/>
-          <p:cNvSpPr txBox="1"/>
-          <p:nvPr/>
-        </p:nvSpPr>
-        <p:spPr>
-          <a:xfrm>
-            <a:off x="932688" y="2395728"/>
-            <a:ext cx="3291492" cy="338328"/>
-          </a:xfrm>
-          <a:prstGeom prst="rect">
-            <a:avLst/>
-          </a:prstGeom>
-          <a:noFill/>
-        </p:spPr>
-        <p:txBody>
-          <a:bodyPr wrap="square" lIns="0" rIns="0" tIns="0" bIns="0" anchor="t">
-            <a:spAutoFit/>
-          </a:bodyPr>
-          <a:lstStyle/>
-          <a:p>
-            <a:pPr algn="l">
-              <a:lnSpc>
-                <a:spcPct val="132000"/>
-              </a:lnSpc>
-            </a:pPr>
-            <a:r>
-              <a:rPr sz="1800" b="1" i="0">
-                <a:solidFill>
-                  <a:srgbClr val="1D6B8F"/>
-                </a:solidFill>
-                <a:latin typeface="Verdana"/>
-              </a:rPr>
-              <a:t>1. L'entreprise</a:t>
-            </a:r>
-          </a:p>
-        </p:txBody>
-      </p:sp>
-      <p:sp>
-        <p:nvSpPr>
-          <p:cNvPr id="11" name="TextBox 10"/>
-          <p:cNvSpPr txBox="1"/>
-          <p:nvPr/>
-        </p:nvSpPr>
-        <p:spPr>
-          <a:xfrm>
-            <a:off x="4443636" y="2395728"/>
-            <a:ext cx="6595914" cy="338328"/>
-          </a:xfrm>
-          <a:prstGeom prst="rect">
-            <a:avLst/>
-          </a:prstGeom>
-          <a:noFill/>
-        </p:spPr>
-        <p:txBody>
-          <a:bodyPr wrap="square" lIns="0" rIns="0" tIns="0" bIns="0" anchor="t">
-            <a:spAutoFit/>
-          </a:bodyPr>
-          <a:lstStyle/>
-          <a:p>
-            <a:pPr algn="l">
-              <a:lnSpc>
-                <a:spcPct val="132000"/>
-              </a:lnSpc>
-            </a:pPr>
-            <a:r>
-              <a:rPr sz="1800" b="0" i="0">
-                <a:solidFill>
-                  <a:srgbClr val="3A3D40"/>
-                </a:solidFill>
-                <a:latin typeface="Verdana"/>
-              </a:rPr>
-              <a:t>Ce qu'elle fait, depuis quand, combien d'employés.</a:t>
-            </a:r>
-          </a:p>
-        </p:txBody>
-      </p:sp>
-      <p:sp>
-        <p:nvSpPr>
-          <p:cNvPr id="12" name="Rectangle 11"/>
-          <p:cNvSpPr/>
-          <p:nvPr/>
-        </p:nvSpPr>
-        <p:spPr>
-          <a:xfrm>
-            <a:off x="932688" y="2807208"/>
-            <a:ext cx="10326319" cy="10058"/>
-          </a:xfrm>
-          <a:prstGeom prst="rect">
-            <a:avLst/>
-          </a:prstGeom>
-          <a:solidFill>
-            <a:srgbClr val="EAEAE8"/>
-          </a:solidFill>
-          <a:ln>
-            <a:noFill/>
-          </a:ln>
-          <a:effectLst/>
-        </p:spPr>
-        <p:style>
-          <a:lnRef idx="1">
-            <a:schemeClr val="accent1"/>
-          </a:lnRef>
-          <a:fillRef idx="3">
-            <a:schemeClr val="accent1"/>
-          </a:fillRef>
-          <a:effectRef idx="2">
-            <a:schemeClr val="accent1"/>
-          </a:effectRef>
-          <a:fontRef idx="minor">
-            <a:schemeClr val="lt1"/>
-          </a:fontRef>
-        </p:style>
-        <p:txBody>
-          <a:bodyPr rtlCol="0" anchor="ctr"/>
-          <a:lstStyle/>
-          <a:p/>
-        </p:txBody>
-      </p:sp>
-      <p:sp>
-        <p:nvSpPr>
-          <p:cNvPr id="13" name="TextBox 12"/>
-          <p:cNvSpPr txBox="1"/>
-          <p:nvPr/>
-        </p:nvSpPr>
-        <p:spPr>
-          <a:xfrm>
-            <a:off x="932688" y="2935224"/>
-            <a:ext cx="3291492" cy="338328"/>
-          </a:xfrm>
-          <a:prstGeom prst="rect">
-            <a:avLst/>
-          </a:prstGeom>
-          <a:noFill/>
-        </p:spPr>
-        <p:txBody>
-          <a:bodyPr wrap="square" lIns="0" rIns="0" tIns="0" bIns="0" anchor="t">
-            <a:spAutoFit/>
-          </a:bodyPr>
-          <a:lstStyle/>
-          <a:p>
-            <a:pPr algn="l">
-              <a:lnSpc>
-                <a:spcPct val="132000"/>
-              </a:lnSpc>
-            </a:pPr>
-            <a:r>
-              <a:rPr sz="1800" b="1" i="0">
-                <a:solidFill>
-                  <a:srgbClr val="1D6B8F"/>
-                </a:solidFill>
-                <a:latin typeface="Verdana"/>
-              </a:rPr>
-              <a:t>2. Les tâches</a:t>
-            </a:r>
-          </a:p>
-        </p:txBody>
-      </p:sp>
-      <p:sp>
-        <p:nvSpPr>
-          <p:cNvPr id="14" name="TextBox 13"/>
-          <p:cNvSpPr txBox="1"/>
-          <p:nvPr/>
-        </p:nvSpPr>
-        <p:spPr>
-          <a:xfrm>
-            <a:off x="4443636" y="2935224"/>
-            <a:ext cx="6595914" cy="338328"/>
-          </a:xfrm>
-          <a:prstGeom prst="rect">
-            <a:avLst/>
-          </a:prstGeom>
-          <a:noFill/>
-        </p:spPr>
-        <p:txBody>
-          <a:bodyPr wrap="square" lIns="0" rIns="0" tIns="0" bIns="0" anchor="t">
-            <a:spAutoFit/>
-          </a:bodyPr>
-          <a:lstStyle/>
-          <a:p>
-            <a:pPr algn="l">
-              <a:lnSpc>
-                <a:spcPct val="132000"/>
-              </a:lnSpc>
-            </a:pPr>
-            <a:r>
-              <a:rPr sz="1800" b="0" i="0">
-                <a:solidFill>
-                  <a:srgbClr val="3A3D40"/>
-                </a:solidFill>
-                <a:latin typeface="Verdana"/>
-              </a:rPr>
-              <a:t>Ce que vous ferez tous les jours, écrit à l'infinitif.</a:t>
-            </a:r>
-          </a:p>
-        </p:txBody>
-      </p:sp>
-      <p:sp>
-        <p:nvSpPr>
-          <p:cNvPr id="15" name="Rectangle 14"/>
-          <p:cNvSpPr/>
-          <p:nvPr/>
-        </p:nvSpPr>
-        <p:spPr>
-          <a:xfrm>
-            <a:off x="932688" y="3346704"/>
-            <a:ext cx="10326319" cy="10058"/>
-          </a:xfrm>
-          <a:prstGeom prst="rect">
-            <a:avLst/>
-          </a:prstGeom>
-          <a:solidFill>
-            <a:srgbClr val="EAEAE8"/>
-          </a:solidFill>
-          <a:ln>
-            <a:noFill/>
-          </a:ln>
-          <a:effectLst/>
-        </p:spPr>
-        <p:style>
-          <a:lnRef idx="1">
-            <a:schemeClr val="accent1"/>
-          </a:lnRef>
-          <a:fillRef idx="3">
-            <a:schemeClr val="accent1"/>
-          </a:fillRef>
-          <a:effectRef idx="2">
-            <a:schemeClr val="accent1"/>
-          </a:effectRef>
-          <a:fontRef idx="minor">
-            <a:schemeClr val="lt1"/>
-          </a:fontRef>
-        </p:style>
-        <p:txBody>
-          <a:bodyPr rtlCol="0" anchor="ctr"/>
-          <a:lstStyle/>
-          <a:p/>
-        </p:txBody>
-      </p:sp>
-      <p:sp>
-        <p:nvSpPr>
-          <p:cNvPr id="16" name="TextBox 15"/>
-          <p:cNvSpPr txBox="1"/>
-          <p:nvPr/>
-        </p:nvSpPr>
-        <p:spPr>
-          <a:xfrm>
-            <a:off x="932688" y="3474720"/>
-            <a:ext cx="3291492" cy="338328"/>
-          </a:xfrm>
-          <a:prstGeom prst="rect">
-            <a:avLst/>
-          </a:prstGeom>
-          <a:noFill/>
-        </p:spPr>
-        <p:txBody>
-          <a:bodyPr wrap="square" lIns="0" rIns="0" tIns="0" bIns="0" anchor="t">
-            <a:spAutoFit/>
-          </a:bodyPr>
-          <a:lstStyle/>
-          <a:p>
-            <a:pPr algn="l">
-              <a:lnSpc>
-                <a:spcPct val="132000"/>
-              </a:lnSpc>
-            </a:pPr>
-            <a:r>
-              <a:rPr sz="1800" b="1" i="0">
-                <a:solidFill>
-                  <a:srgbClr val="1D6B8F"/>
-                </a:solidFill>
-                <a:latin typeface="Verdana"/>
-              </a:rPr>
-              <a:t>3. Les exigences</a:t>
-            </a:r>
-          </a:p>
-        </p:txBody>
-      </p:sp>
-      <p:sp>
-        <p:nvSpPr>
-          <p:cNvPr id="17" name="TextBox 16"/>
-          <p:cNvSpPr txBox="1"/>
-          <p:nvPr/>
-        </p:nvSpPr>
-        <p:spPr>
-          <a:xfrm>
-            <a:off x="4443636" y="3474720"/>
-            <a:ext cx="6595914" cy="338328"/>
-          </a:xfrm>
-          <a:prstGeom prst="rect">
-            <a:avLst/>
-          </a:prstGeom>
-          <a:noFill/>
-        </p:spPr>
-        <p:txBody>
-          <a:bodyPr wrap="square" lIns="0" rIns="0" tIns="0" bIns="0" anchor="t">
-            <a:spAutoFit/>
-          </a:bodyPr>
-          <a:lstStyle/>
-          <a:p>
-            <a:pPr algn="l">
-              <a:lnSpc>
-                <a:spcPct val="132000"/>
-              </a:lnSpc>
-            </a:pPr>
-            <a:r>
-              <a:rPr sz="1800" b="0" i="0">
-                <a:solidFill>
-                  <a:srgbClr val="3A3D40"/>
-                </a:solidFill>
-                <a:latin typeface="Verdana"/>
-              </a:rPr>
-              <a:t>Ce qui est requis, et ce qui est un atout.</a:t>
-            </a:r>
-          </a:p>
-        </p:txBody>
-      </p:sp>
-      <p:sp>
-        <p:nvSpPr>
-          <p:cNvPr id="18" name="Rectangle 17"/>
-          <p:cNvSpPr/>
-          <p:nvPr/>
-        </p:nvSpPr>
-        <p:spPr>
-          <a:xfrm>
-            <a:off x="932688" y="3886200"/>
-            <a:ext cx="10326319" cy="10058"/>
-          </a:xfrm>
-          <a:prstGeom prst="rect">
-            <a:avLst/>
-          </a:prstGeom>
-          <a:solidFill>
-            <a:srgbClr val="EAEAE8"/>
-          </a:solidFill>
-          <a:ln>
-            <a:noFill/>
-          </a:ln>
-          <a:effectLst/>
-        </p:spPr>
-        <p:style>
-          <a:lnRef idx="1">
-            <a:schemeClr val="accent1"/>
-          </a:lnRef>
-          <a:fillRef idx="3">
-            <a:schemeClr val="accent1"/>
-          </a:fillRef>
-          <a:effectRef idx="2">
-            <a:schemeClr val="accent1"/>
-          </a:effectRef>
-          <a:fontRef idx="minor">
-            <a:schemeClr val="lt1"/>
-          </a:fontRef>
-        </p:style>
-        <p:txBody>
-          <a:bodyPr rtlCol="0" anchor="ctr"/>
-          <a:lstStyle/>
-          <a:p/>
-        </p:txBody>
-      </p:sp>
-      <p:sp>
-        <p:nvSpPr>
-          <p:cNvPr id="19" name="TextBox 18"/>
-          <p:cNvSpPr txBox="1"/>
-          <p:nvPr/>
-        </p:nvSpPr>
-        <p:spPr>
-          <a:xfrm>
-            <a:off x="932688" y="4014215"/>
-            <a:ext cx="3291492" cy="338328"/>
-          </a:xfrm>
-          <a:prstGeom prst="rect">
-            <a:avLst/>
-          </a:prstGeom>
-          <a:noFill/>
-        </p:spPr>
-        <p:txBody>
-          <a:bodyPr wrap="square" lIns="0" rIns="0" tIns="0" bIns="0" anchor="t">
-            <a:spAutoFit/>
-          </a:bodyPr>
-          <a:lstStyle/>
-          <a:p>
-            <a:pPr algn="l">
-              <a:lnSpc>
-                <a:spcPct val="132000"/>
-              </a:lnSpc>
-            </a:pPr>
-            <a:r>
-              <a:rPr sz="1800" b="1" i="0">
-                <a:solidFill>
-                  <a:srgbClr val="1D6B8F"/>
-                </a:solidFill>
-                <a:latin typeface="Verdana"/>
-              </a:rPr>
-              <a:t>4. Les conditions</a:t>
-            </a:r>
-          </a:p>
-        </p:txBody>
-      </p:sp>
-      <p:sp>
-        <p:nvSpPr>
-          <p:cNvPr id="20" name="TextBox 19"/>
-          <p:cNvSpPr txBox="1"/>
-          <p:nvPr/>
-        </p:nvSpPr>
-        <p:spPr>
-          <a:xfrm>
-            <a:off x="4443636" y="4014215"/>
-            <a:ext cx="6595914" cy="338328"/>
-          </a:xfrm>
-          <a:prstGeom prst="rect">
-            <a:avLst/>
-          </a:prstGeom>
-          <a:noFill/>
-        </p:spPr>
-        <p:txBody>
-          <a:bodyPr wrap="square" lIns="0" rIns="0" tIns="0" bIns="0" anchor="t">
-            <a:spAutoFit/>
-          </a:bodyPr>
-          <a:lstStyle/>
-          <a:p>
-            <a:pPr algn="l">
-              <a:lnSpc>
-                <a:spcPct val="132000"/>
-              </a:lnSpc>
-            </a:pPr>
-            <a:r>
-              <a:rPr sz="1800" b="0" i="0">
-                <a:solidFill>
-                  <a:srgbClr val="3A3D40"/>
-                </a:solidFill>
-                <a:latin typeface="Verdana"/>
-              </a:rPr>
-              <a:t>Heures, statut, salaire, avantages.</a:t>
-            </a:r>
-          </a:p>
-        </p:txBody>
-      </p:sp>
-      <p:sp>
-        <p:nvSpPr>
-          <p:cNvPr id="21" name="Rounded Rectangle 20"/>
-          <p:cNvSpPr/>
-          <p:nvPr/>
-        </p:nvSpPr>
-        <p:spPr>
-          <a:xfrm>
-            <a:off x="566928" y="4846320"/>
-            <a:ext cx="11057839" cy="843534"/>
-          </a:xfrm>
-          <a:prstGeom prst="roundRect">
-            <a:avLst>
-              <a:gd name="adj" fmla="val 17344"/>
-            </a:avLst>
-          </a:prstGeom>
-          <a:solidFill>
-            <a:srgbClr val="FBFBFA"/>
-          </a:solidFill>
-          <a:ln w="12700">
-            <a:solidFill>
-              <a:srgbClr val="EAEAE8"/>
-            </a:solidFill>
-          </a:ln>
-          <a:effectLst/>
-        </p:spPr>
-        <p:style>
-          <a:lnRef idx="1">
-            <a:schemeClr val="accent1"/>
-          </a:lnRef>
-          <a:fillRef idx="3">
-            <a:schemeClr val="accent1"/>
-          </a:fillRef>
-          <a:effectRef idx="2">
-            <a:schemeClr val="accent1"/>
-          </a:effectRef>
-          <a:fontRef idx="minor">
-            <a:schemeClr val="lt1"/>
-          </a:fontRef>
-        </p:style>
-        <p:txBody>
-          <a:bodyPr rtlCol="0" anchor="ctr"/>
-          <a:lstStyle/>
-          <a:p/>
-        </p:txBody>
-      </p:sp>
-      <p:sp>
-        <p:nvSpPr>
-          <p:cNvPr id="22" name="TextBox 21"/>
-          <p:cNvSpPr txBox="1"/>
-          <p:nvPr/>
-        </p:nvSpPr>
-        <p:spPr>
-          <a:xfrm>
-            <a:off x="969264" y="5102352"/>
-            <a:ext cx="10234879" cy="386334"/>
+            <a:off x="978408" y="2788920"/>
+            <a:ext cx="10234879" cy="368046"/>
           </a:xfrm>
           <a:prstGeom prst="rect">
             <a:avLst/>
@@ -10829,11 +12058,89 @@
             <a:r>
               <a:rPr sz="1800" b="0" i="0">
                 <a:solidFill>
-                  <a:srgbClr val="4B4F52"/>
+                  <a:srgbClr val="3A3D40"/>
                 </a:solidFill>
                 <a:latin typeface="Verdana"/>
               </a:rPr>
-              <a:t>L'ordre varie un peu d'une offre à l'autre. Les quatre parties, elles, y sont toujours.</a:t>
+              <a:t>BOISVERTE — COMMIS À L'INVENTAIRE. Longueuil. Offre affichée le 1er mars.</a:t>
+            </a:r>
+          </a:p>
+        </p:txBody>
+      </p:sp>
+      <p:sp>
+        <p:nvSpPr>
+          <p:cNvPr id="10" name="TextBox 9"/>
+          <p:cNvSpPr txBox="1"/>
+          <p:nvPr/>
+        </p:nvSpPr>
+        <p:spPr>
+          <a:xfrm>
+            <a:off x="978408" y="3284982"/>
+            <a:ext cx="10234879" cy="699516"/>
+          </a:xfrm>
+          <a:prstGeom prst="rect">
+            <a:avLst/>
+          </a:prstGeom>
+          <a:noFill/>
+        </p:spPr>
+        <p:txBody>
+          <a:bodyPr wrap="square" lIns="0" rIns="0" tIns="0" bIns="0" anchor="t">
+            <a:spAutoFit/>
+          </a:bodyPr>
+          <a:lstStyle/>
+          <a:p>
+            <a:pPr algn="l">
+              <a:lnSpc>
+                <a:spcPct val="145000"/>
+              </a:lnSpc>
+            </a:pPr>
+            <a:r>
+              <a:rPr sz="1800" b="0" i="0">
+                <a:solidFill>
+                  <a:srgbClr val="3A3D40"/>
+                </a:solidFill>
+                <a:latin typeface="Verdana"/>
+              </a:rPr>
+              <a:t>L'entreprise. Boisverte fabrique des meubles en bois massif depuis 1998. Quarante employés, à Longueuil.</a:t>
+            </a:r>
+          </a:p>
+        </p:txBody>
+      </p:sp>
+      <p:sp>
+        <p:nvSpPr>
+          <p:cNvPr id="11" name="TextBox 10"/>
+          <p:cNvSpPr txBox="1"/>
+          <p:nvPr/>
+        </p:nvSpPr>
+        <p:spPr>
+          <a:xfrm>
+            <a:off x="978408" y="4112513"/>
+            <a:ext cx="10234879" cy="1030986"/>
+          </a:xfrm>
+          <a:prstGeom prst="rect">
+            <a:avLst/>
+          </a:prstGeom>
+          <a:noFill/>
+        </p:spPr>
+        <p:txBody>
+          <a:bodyPr wrap="square" lIns="0" rIns="0" tIns="0" bIns="0" anchor="t">
+            <a:spAutoFit/>
+          </a:bodyPr>
+          <a:lstStyle/>
+          <a:p>
+            <a:pPr algn="l">
+              <a:lnSpc>
+                <a:spcPct val="145000"/>
+              </a:lnSpc>
+            </a:pPr>
+            <a:r>
+              <a:rPr sz="1800" b="0" i="0">
+                <a:solidFill>
+                  <a:srgbClr val="3A3D40"/>
+                </a:solidFill>
+                <a:latin typeface="Verdana"/>
+              </a:rPr>
+              <a:t>Les tâches. Tenir l'inventaire de l'entrepôt à jour. Recevoir les livraisons et vérifier les quantités. Préparer les commandes pour l'expédition. Signaler les écarts entre le décompte et le système.</a:t>
             </a:r>
           </a:p>
         </p:txBody>
@@ -11010,67 +12317,21 @@
                 </a:solidFill>
                 <a:latin typeface="Verdana"/>
               </a:rPr>
-              <a:t>LES TÂCHES SONT À L'INFINITIF</a:t>
-            </a:r>
-          </a:p>
-        </p:txBody>
-      </p:sp>
-      <p:sp>
-        <p:nvSpPr>
-          <p:cNvPr id="6" name="Rounded Rectangle 5"/>
-          <p:cNvSpPr/>
-          <p:nvPr/>
-        </p:nvSpPr>
-        <p:spPr>
-          <a:xfrm>
-            <a:off x="566928" y="1225296"/>
-            <a:ext cx="11057839" cy="1441196"/>
-          </a:xfrm>
-          <a:prstGeom prst="roundRect">
-            <a:avLst>
-              <a:gd name="adj" fmla="val 10151"/>
-            </a:avLst>
-          </a:prstGeom>
-          <a:solidFill>
-            <a:srgbClr val="E7F0F6"/>
-          </a:solidFill>
-          <a:ln w="12700">
-            <a:solidFill>
-              <a:srgbClr val="EAEAE8"/>
-            </a:solidFill>
-          </a:ln>
-          <a:effectLst/>
-        </p:spPr>
-        <p:style>
-          <a:lnRef idx="1">
-            <a:schemeClr val="accent1"/>
-          </a:lnRef>
-          <a:fillRef idx="3">
-            <a:schemeClr val="accent1"/>
-          </a:fillRef>
-          <a:effectRef idx="2">
-            <a:schemeClr val="accent1"/>
-          </a:effectRef>
-          <a:fontRef idx="minor">
-            <a:schemeClr val="lt1"/>
-          </a:fontRef>
-        </p:style>
-        <p:txBody>
-          <a:bodyPr rtlCol="0" anchor="ctr"/>
-          <a:lstStyle/>
-          <a:p/>
-        </p:txBody>
-      </p:sp>
-      <p:sp>
-        <p:nvSpPr>
-          <p:cNvPr id="7" name="TextBox 6"/>
+              <a:t>LE DOCUMENT</a:t>
+            </a:r>
+          </a:p>
+        </p:txBody>
+      </p:sp>
+      <p:sp>
+        <p:nvSpPr>
+          <p:cNvPr id="6" name="TextBox 5"/>
           <p:cNvSpPr txBox="1"/>
           <p:nvPr/>
         </p:nvSpPr>
         <p:spPr>
           <a:xfrm>
-            <a:off x="1298448" y="1682496"/>
-            <a:ext cx="9594799" cy="618235"/>
+            <a:off x="566928" y="749808"/>
+            <a:ext cx="11057839" cy="877824"/>
           </a:xfrm>
           <a:prstGeom prst="rect">
             <a:avLst/>
@@ -11085,7 +12346,7 @@
           <a:p>
             <a:pPr algn="l">
               <a:lnSpc>
-                <a:spcPct val="122000"/>
+                <a:spcPct val="115000"/>
               </a:lnSpc>
             </a:pPr>
             <a:r>
@@ -11095,25 +12356,25 @@
                 </a:solidFill>
                 <a:latin typeface="Verdana"/>
               </a:rPr>
-              <a:t>Tenir, recevoir, préparer, signaler.</a:t>
-            </a:r>
-          </a:p>
-        </p:txBody>
-      </p:sp>
-      <p:sp>
-        <p:nvSpPr>
-          <p:cNvPr id="8" name="Rounded Rectangle 7"/>
+              <a:t>L'offre de Boisverte, au complet (suite)</a:t>
+            </a:r>
+          </a:p>
+        </p:txBody>
+      </p:sp>
+      <p:sp>
+        <p:nvSpPr>
+          <p:cNvPr id="7" name="Rounded Rectangle 6"/>
           <p:cNvSpPr/>
           <p:nvPr/>
         </p:nvSpPr>
         <p:spPr>
           <a:xfrm>
-            <a:off x="566928" y="2940812"/>
-            <a:ext cx="11057839" cy="2040128"/>
+            <a:off x="566928" y="1737360"/>
+            <a:ext cx="11057839" cy="3493008"/>
           </a:xfrm>
           <a:prstGeom prst="roundRect">
             <a:avLst>
-              <a:gd name="adj" fmla="val 7171"/>
+              <a:gd name="adj" fmla="val 4188"/>
             </a:avLst>
           </a:prstGeom>
           <a:solidFill>
@@ -11148,14 +12409,14 @@
       </p:sp>
       <p:sp>
         <p:nvSpPr>
-          <p:cNvPr id="9" name="TextBox 8"/>
+          <p:cNvPr id="8" name="TextBox 7"/>
           <p:cNvSpPr txBox="1"/>
           <p:nvPr/>
         </p:nvSpPr>
         <p:spPr>
           <a:xfrm>
-            <a:off x="969264" y="3215132"/>
-            <a:ext cx="10234879" cy="1582928"/>
+            <a:off x="978408" y="1993391"/>
+            <a:ext cx="10234879" cy="1362456"/>
           </a:xfrm>
           <a:prstGeom prst="rect">
             <a:avLst/>
@@ -11174,13 +12435,91 @@
               </a:lnSpc>
             </a:pPr>
             <a:r>
-              <a:rPr sz="2000" b="0" i="0">
-                <a:solidFill>
-                  <a:srgbClr val="4B4F52"/>
+              <a:rPr sz="1800" b="0" i="0">
+                <a:solidFill>
+                  <a:srgbClr val="3A3D40"/>
                 </a:solidFill>
                 <a:latin typeface="Verdana"/>
               </a:rPr>
-              <a:t>Une offre écrit les tâches à l'infinitif parce qu'elle ne parle encore de personne. Cela donne un repère de lecture très fiable : la liste de verbes à l'infinitif, c'est la liste des tâches. Et au moment de répondre, on reprend ces mêmes verbes, conjugués.</a:t>
+              <a:t>Les exigences. Deux ans d'expérience en entrepôt sont requis. Français fonctionnel à l'oral et à l'écrit. Capacité à soulever des charges de 20 kg. La connaissance d'un logiciel d'inventaire est un atout. L'anglais serait apprécié. Une expérience dans le domaine du meuble serait un plus.</a:t>
+            </a:r>
+          </a:p>
+        </p:txBody>
+      </p:sp>
+      <p:sp>
+        <p:nvSpPr>
+          <p:cNvPr id="9" name="TextBox 8"/>
+          <p:cNvSpPr txBox="1"/>
+          <p:nvPr/>
+        </p:nvSpPr>
+        <p:spPr>
+          <a:xfrm>
+            <a:off x="978408" y="3483863"/>
+            <a:ext cx="10234879" cy="699516"/>
+          </a:xfrm>
+          <a:prstGeom prst="rect">
+            <a:avLst/>
+          </a:prstGeom>
+          <a:noFill/>
+        </p:spPr>
+        <p:txBody>
+          <a:bodyPr wrap="square" lIns="0" rIns="0" tIns="0" bIns="0" anchor="t">
+            <a:spAutoFit/>
+          </a:bodyPr>
+          <a:lstStyle/>
+          <a:p>
+            <a:pPr algn="l">
+              <a:lnSpc>
+                <a:spcPct val="145000"/>
+              </a:lnSpc>
+            </a:pPr>
+            <a:r>
+              <a:rPr sz="1800" b="0" i="0">
+                <a:solidFill>
+                  <a:srgbClr val="3A3D40"/>
+                </a:solidFill>
+                <a:latin typeface="Verdana"/>
+              </a:rPr>
+              <a:t>Les conditions. Poste permanent, 37,5 h par semaine, du lundi au vendredi. Assurance collective après trois mois.</a:t>
+            </a:r>
+          </a:p>
+        </p:txBody>
+      </p:sp>
+      <p:sp>
+        <p:nvSpPr>
+          <p:cNvPr id="10" name="TextBox 9"/>
+          <p:cNvSpPr txBox="1"/>
+          <p:nvPr/>
+        </p:nvSpPr>
+        <p:spPr>
+          <a:xfrm>
+            <a:off x="978408" y="4311396"/>
+            <a:ext cx="10234879" cy="699516"/>
+          </a:xfrm>
+          <a:prstGeom prst="rect">
+            <a:avLst/>
+          </a:prstGeom>
+          <a:noFill/>
+        </p:spPr>
+        <p:txBody>
+          <a:bodyPr wrap="square" lIns="0" rIns="0" tIns="0" bIns="0" anchor="t">
+            <a:spAutoFit/>
+          </a:bodyPr>
+          <a:lstStyle/>
+          <a:p>
+            <a:pPr algn="l">
+              <a:lnSpc>
+                <a:spcPct val="145000"/>
+              </a:lnSpc>
+            </a:pPr>
+            <a:r>
+              <a:rPr sz="1800" b="0" i="0">
+                <a:solidFill>
+                  <a:srgbClr val="3A3D40"/>
+                </a:solidFill>
+                <a:latin typeface="Verdana"/>
+              </a:rPr>
+              <a:t>Pour postuler. Faire parvenir votre curriculum vitae avant le 15 mars, à l'attention de Robert Chartier, chef d'entrepôt.</a:t>
             </a:r>
           </a:p>
         </p:txBody>
@@ -11357,7 +12696,7 @@
                 </a:solidFill>
                 <a:latin typeface="Verdana"/>
               </a:rPr>
-              <a:t>COMPRÉHENSION</a:t>
+              <a:t>ANALYSE</a:t>
             </a:r>
           </a:p>
         </p:txBody>
@@ -11396,64 +12735,25 @@
                 </a:solidFill>
                 <a:latin typeface="Verdana"/>
               </a:rPr>
-              <a:t>Vrai ou faux ?</a:t>
-            </a:r>
-          </a:p>
-        </p:txBody>
-      </p:sp>
-      <p:sp>
-        <p:nvSpPr>
-          <p:cNvPr id="7" name="TextBox 6"/>
-          <p:cNvSpPr txBox="1"/>
-          <p:nvPr/>
-        </p:nvSpPr>
-        <p:spPr>
-          <a:xfrm>
-            <a:off x="566928" y="1645920"/>
-            <a:ext cx="11057839" cy="329184"/>
-          </a:xfrm>
-          <a:prstGeom prst="rect">
-            <a:avLst/>
-          </a:prstGeom>
-          <a:noFill/>
-        </p:spPr>
-        <p:txBody>
-          <a:bodyPr wrap="square" lIns="0" rIns="0" tIns="0" bIns="0" anchor="t">
-            <a:spAutoFit/>
-          </a:bodyPr>
-          <a:lstStyle/>
-          <a:p>
-            <a:pPr algn="l">
-              <a:lnSpc>
-                <a:spcPct val="135000"/>
-              </a:lnSpc>
-            </a:pPr>
-            <a:r>
-              <a:rPr sz="1800" b="0" i="0">
-                <a:solidFill>
-                  <a:srgbClr val="6E7175"/>
-                </a:solidFill>
-                <a:latin typeface="Verdana"/>
-              </a:rPr>
-              <a:t>Répondez d'après le dialogue et l'offre projetée.</a:t>
-            </a:r>
-          </a:p>
-        </p:txBody>
-      </p:sp>
-      <p:sp>
-        <p:nvSpPr>
-          <p:cNvPr id="8" name="Rounded Rectangle 7"/>
+              <a:t>Les quatre parties, dans l'ordre</a:t>
+            </a:r>
+          </a:p>
+        </p:txBody>
+      </p:sp>
+      <p:sp>
+        <p:nvSpPr>
+          <p:cNvPr id="7" name="Rounded Rectangle 6"/>
           <p:cNvSpPr/>
           <p:nvPr/>
         </p:nvSpPr>
         <p:spPr>
           <a:xfrm>
-            <a:off x="566928" y="2139696"/>
-            <a:ext cx="11057839" cy="559816"/>
+            <a:off x="566928" y="1810512"/>
+            <a:ext cx="11057839" cy="2798064"/>
           </a:xfrm>
           <a:prstGeom prst="roundRect">
             <a:avLst>
-              <a:gd name="adj" fmla="val 26134"/>
+              <a:gd name="adj" fmla="val 5228"/>
             </a:avLst>
           </a:prstGeom>
           <a:solidFill>
@@ -11488,22 +12788,176 @@
       </p:sp>
       <p:sp>
         <p:nvSpPr>
-          <p:cNvPr id="9" name="Rounded Rectangle 8"/>
+          <p:cNvPr id="8" name="TextBox 7"/>
+          <p:cNvSpPr txBox="1"/>
+          <p:nvPr/>
+        </p:nvSpPr>
+        <p:spPr>
+          <a:xfrm>
+            <a:off x="932688" y="1975104"/>
+            <a:ext cx="3291492" cy="237744"/>
+          </a:xfrm>
+          <a:prstGeom prst="rect">
+            <a:avLst/>
+          </a:prstGeom>
+          <a:noFill/>
+        </p:spPr>
+        <p:txBody>
+          <a:bodyPr wrap="square" lIns="0" rIns="0" tIns="0" bIns="0" anchor="t">
+            <a:spAutoFit/>
+          </a:bodyPr>
+          <a:lstStyle/>
+          <a:p>
+            <a:pPr algn="l">
+              <a:lnSpc>
+                <a:spcPct val="135000"/>
+              </a:lnSpc>
+            </a:pPr>
+            <a:r>
+              <a:rPr sz="1300" b="1" i="0" spc="156">
+                <a:solidFill>
+                  <a:srgbClr val="6E7175"/>
+                </a:solidFill>
+                <a:latin typeface="Verdana"/>
+              </a:rPr>
+              <a:t>LA PARTIE</a:t>
+            </a:r>
+          </a:p>
+        </p:txBody>
+      </p:sp>
+      <p:sp>
+        <p:nvSpPr>
+          <p:cNvPr id="9" name="TextBox 8"/>
+          <p:cNvSpPr txBox="1"/>
+          <p:nvPr/>
+        </p:nvSpPr>
+        <p:spPr>
+          <a:xfrm>
+            <a:off x="4443636" y="1975104"/>
+            <a:ext cx="6595914" cy="237744"/>
+          </a:xfrm>
+          <a:prstGeom prst="rect">
+            <a:avLst/>
+          </a:prstGeom>
+          <a:noFill/>
+        </p:spPr>
+        <p:txBody>
+          <a:bodyPr wrap="square" lIns="0" rIns="0" tIns="0" bIns="0" anchor="t">
+            <a:spAutoFit/>
+          </a:bodyPr>
+          <a:lstStyle/>
+          <a:p>
+            <a:pPr algn="l">
+              <a:lnSpc>
+                <a:spcPct val="135000"/>
+              </a:lnSpc>
+            </a:pPr>
+            <a:r>
+              <a:rPr sz="1300" b="1" i="0" spc="156">
+                <a:solidFill>
+                  <a:srgbClr val="6E7175"/>
+                </a:solidFill>
+                <a:latin typeface="Verdana"/>
+              </a:rPr>
+              <a:t>CE QU'ON Y TROUVE</a:t>
+            </a:r>
+          </a:p>
+        </p:txBody>
+      </p:sp>
+      <p:sp>
+        <p:nvSpPr>
+          <p:cNvPr id="10" name="TextBox 9"/>
+          <p:cNvSpPr txBox="1"/>
+          <p:nvPr/>
+        </p:nvSpPr>
+        <p:spPr>
+          <a:xfrm>
+            <a:off x="932688" y="2395728"/>
+            <a:ext cx="3291492" cy="338328"/>
+          </a:xfrm>
+          <a:prstGeom prst="rect">
+            <a:avLst/>
+          </a:prstGeom>
+          <a:noFill/>
+        </p:spPr>
+        <p:txBody>
+          <a:bodyPr wrap="square" lIns="0" rIns="0" tIns="0" bIns="0" anchor="t">
+            <a:spAutoFit/>
+          </a:bodyPr>
+          <a:lstStyle/>
+          <a:p>
+            <a:pPr algn="l">
+              <a:lnSpc>
+                <a:spcPct val="132000"/>
+              </a:lnSpc>
+            </a:pPr>
+            <a:r>
+              <a:rPr sz="1800" b="1" i="0">
+                <a:solidFill>
+                  <a:srgbClr val="1D6B8F"/>
+                </a:solidFill>
+                <a:latin typeface="Verdana"/>
+              </a:rPr>
+              <a:t>1. L'entreprise</a:t>
+            </a:r>
+          </a:p>
+        </p:txBody>
+      </p:sp>
+      <p:sp>
+        <p:nvSpPr>
+          <p:cNvPr id="11" name="TextBox 10"/>
+          <p:cNvSpPr txBox="1"/>
+          <p:nvPr/>
+        </p:nvSpPr>
+        <p:spPr>
+          <a:xfrm>
+            <a:off x="4443636" y="2395728"/>
+            <a:ext cx="6595914" cy="338328"/>
+          </a:xfrm>
+          <a:prstGeom prst="rect">
+            <a:avLst/>
+          </a:prstGeom>
+          <a:noFill/>
+        </p:spPr>
+        <p:txBody>
+          <a:bodyPr wrap="square" lIns="0" rIns="0" tIns="0" bIns="0" anchor="t">
+            <a:spAutoFit/>
+          </a:bodyPr>
+          <a:lstStyle/>
+          <a:p>
+            <a:pPr algn="l">
+              <a:lnSpc>
+                <a:spcPct val="132000"/>
+              </a:lnSpc>
+            </a:pPr>
+            <a:r>
+              <a:rPr sz="1800" b="0" i="0">
+                <a:solidFill>
+                  <a:srgbClr val="3A3D40"/>
+                </a:solidFill>
+                <a:latin typeface="Verdana"/>
+              </a:rPr>
+              <a:t>Ce qu'elle fait, depuis quand, combien d'employés.</a:t>
+            </a:r>
+          </a:p>
+        </p:txBody>
+      </p:sp>
+      <p:sp>
+        <p:nvSpPr>
+          <p:cNvPr id="12" name="Rectangle 11"/>
           <p:cNvSpPr/>
           <p:nvPr/>
         </p:nvSpPr>
         <p:spPr>
           <a:xfrm>
-            <a:off x="841247" y="2236724"/>
-            <a:ext cx="365760" cy="365760"/>
-          </a:xfrm>
-          <a:prstGeom prst="roundRect">
-            <a:avLst>
-              <a:gd name="adj" fmla="val 32500"/>
-            </a:avLst>
+            <a:off x="932688" y="2807208"/>
+            <a:ext cx="10326319" cy="10058"/>
+          </a:xfrm>
+          <a:prstGeom prst="rect">
+            <a:avLst/>
           </a:prstGeom>
           <a:solidFill>
-            <a:srgbClr val="E7F0F6"/>
+            <a:srgbClr val="EAEAE8"/>
           </a:solidFill>
           <a:ln>
             <a:noFill/>
@@ -11532,14 +12986,14 @@
       </p:sp>
       <p:sp>
         <p:nvSpPr>
-          <p:cNvPr id="10" name="TextBox 9"/>
+          <p:cNvPr id="13" name="TextBox 12"/>
           <p:cNvSpPr txBox="1"/>
           <p:nvPr/>
         </p:nvSpPr>
         <p:spPr>
           <a:xfrm>
-            <a:off x="841247" y="2300732"/>
-            <a:ext cx="365760" cy="256032"/>
+            <a:off x="932688" y="2935224"/>
+            <a:ext cx="3291492" cy="338328"/>
           </a:xfrm>
           <a:prstGeom prst="rect">
             <a:avLst/>
@@ -11552,33 +13006,33 @@
           </a:bodyPr>
           <a:lstStyle/>
           <a:p>
-            <a:pPr algn="ctr">
+            <a:pPr algn="l">
               <a:lnSpc>
-                <a:spcPct val="135000"/>
+                <a:spcPct val="132000"/>
               </a:lnSpc>
             </a:pPr>
             <a:r>
-              <a:rPr sz="1500" b="1" i="0">
+              <a:rPr sz="1800" b="1" i="0">
                 <a:solidFill>
                   <a:srgbClr val="1D6B8F"/>
                 </a:solidFill>
                 <a:latin typeface="Verdana"/>
               </a:rPr>
-              <a:t>1</a:t>
-            </a:r>
-          </a:p>
-        </p:txBody>
-      </p:sp>
-      <p:sp>
-        <p:nvSpPr>
-          <p:cNvPr id="11" name="TextBox 10"/>
+              <a:t>2. Les tâches</a:t>
+            </a:r>
+          </a:p>
+        </p:txBody>
+      </p:sp>
+      <p:sp>
+        <p:nvSpPr>
+          <p:cNvPr id="14" name="TextBox 13"/>
           <p:cNvSpPr txBox="1"/>
           <p:nvPr/>
         </p:nvSpPr>
         <p:spPr>
           <a:xfrm>
-            <a:off x="1344168" y="2295144"/>
-            <a:ext cx="10097719" cy="285496"/>
+            <a:off x="4443636" y="2935224"/>
+            <a:ext cx="6595914" cy="338328"/>
           </a:xfrm>
           <a:prstGeom prst="rect">
             <a:avLst/>
@@ -11593,39 +13047,279 @@
           <a:p>
             <a:pPr algn="l">
               <a:lnSpc>
-                <a:spcPct val="140000"/>
+                <a:spcPct val="132000"/>
               </a:lnSpc>
             </a:pPr>
             <a:r>
-              <a:rPr sz="1400" b="0" i="0">
+              <a:rPr sz="1800" b="0" i="0">
                 <a:solidFill>
                   <a:srgbClr val="3A3D40"/>
                 </a:solidFill>
                 <a:latin typeface="Verdana"/>
               </a:rPr>
-              <a:t>Boisverte fabrique des meubles depuis 1998.</a:t>
-            </a:r>
-          </a:p>
-        </p:txBody>
-      </p:sp>
-      <p:sp>
-        <p:nvSpPr>
-          <p:cNvPr id="12" name="Rounded Rectangle 11"/>
+              <a:t>Ce que vous ferez tous les jours, écrit à l'infinitif.</a:t>
+            </a:r>
+          </a:p>
+        </p:txBody>
+      </p:sp>
+      <p:sp>
+        <p:nvSpPr>
+          <p:cNvPr id="15" name="Rectangle 14"/>
           <p:cNvSpPr/>
           <p:nvPr/>
         </p:nvSpPr>
         <p:spPr>
           <a:xfrm>
-            <a:off x="566928" y="2827528"/>
-            <a:ext cx="11057839" cy="559816"/>
+            <a:off x="932688" y="3346704"/>
+            <a:ext cx="10326319" cy="10058"/>
+          </a:xfrm>
+          <a:prstGeom prst="rect">
+            <a:avLst/>
+          </a:prstGeom>
+          <a:solidFill>
+            <a:srgbClr val="EAEAE8"/>
+          </a:solidFill>
+          <a:ln>
+            <a:noFill/>
+          </a:ln>
+          <a:effectLst/>
+        </p:spPr>
+        <p:style>
+          <a:lnRef idx="1">
+            <a:schemeClr val="accent1"/>
+          </a:lnRef>
+          <a:fillRef idx="3">
+            <a:schemeClr val="accent1"/>
+          </a:fillRef>
+          <a:effectRef idx="2">
+            <a:schemeClr val="accent1"/>
+          </a:effectRef>
+          <a:fontRef idx="minor">
+            <a:schemeClr val="lt1"/>
+          </a:fontRef>
+        </p:style>
+        <p:txBody>
+          <a:bodyPr rtlCol="0" anchor="ctr"/>
+          <a:lstStyle/>
+          <a:p/>
+        </p:txBody>
+      </p:sp>
+      <p:sp>
+        <p:nvSpPr>
+          <p:cNvPr id="16" name="TextBox 15"/>
+          <p:cNvSpPr txBox="1"/>
+          <p:nvPr/>
+        </p:nvSpPr>
+        <p:spPr>
+          <a:xfrm>
+            <a:off x="932688" y="3474720"/>
+            <a:ext cx="3291492" cy="338328"/>
+          </a:xfrm>
+          <a:prstGeom prst="rect">
+            <a:avLst/>
+          </a:prstGeom>
+          <a:noFill/>
+        </p:spPr>
+        <p:txBody>
+          <a:bodyPr wrap="square" lIns="0" rIns="0" tIns="0" bIns="0" anchor="t">
+            <a:spAutoFit/>
+          </a:bodyPr>
+          <a:lstStyle/>
+          <a:p>
+            <a:pPr algn="l">
+              <a:lnSpc>
+                <a:spcPct val="132000"/>
+              </a:lnSpc>
+            </a:pPr>
+            <a:r>
+              <a:rPr sz="1800" b="1" i="0">
+                <a:solidFill>
+                  <a:srgbClr val="1D6B8F"/>
+                </a:solidFill>
+                <a:latin typeface="Verdana"/>
+              </a:rPr>
+              <a:t>3. Les exigences</a:t>
+            </a:r>
+          </a:p>
+        </p:txBody>
+      </p:sp>
+      <p:sp>
+        <p:nvSpPr>
+          <p:cNvPr id="17" name="TextBox 16"/>
+          <p:cNvSpPr txBox="1"/>
+          <p:nvPr/>
+        </p:nvSpPr>
+        <p:spPr>
+          <a:xfrm>
+            <a:off x="4443636" y="3474720"/>
+            <a:ext cx="6595914" cy="338328"/>
+          </a:xfrm>
+          <a:prstGeom prst="rect">
+            <a:avLst/>
+          </a:prstGeom>
+          <a:noFill/>
+        </p:spPr>
+        <p:txBody>
+          <a:bodyPr wrap="square" lIns="0" rIns="0" tIns="0" bIns="0" anchor="t">
+            <a:spAutoFit/>
+          </a:bodyPr>
+          <a:lstStyle/>
+          <a:p>
+            <a:pPr algn="l">
+              <a:lnSpc>
+                <a:spcPct val="132000"/>
+              </a:lnSpc>
+            </a:pPr>
+            <a:r>
+              <a:rPr sz="1800" b="0" i="0">
+                <a:solidFill>
+                  <a:srgbClr val="3A3D40"/>
+                </a:solidFill>
+                <a:latin typeface="Verdana"/>
+              </a:rPr>
+              <a:t>Ce qui est requis, et ce qui est un atout.</a:t>
+            </a:r>
+          </a:p>
+        </p:txBody>
+      </p:sp>
+      <p:sp>
+        <p:nvSpPr>
+          <p:cNvPr id="18" name="Rectangle 17"/>
+          <p:cNvSpPr/>
+          <p:nvPr/>
+        </p:nvSpPr>
+        <p:spPr>
+          <a:xfrm>
+            <a:off x="932688" y="3886200"/>
+            <a:ext cx="10326319" cy="10058"/>
+          </a:xfrm>
+          <a:prstGeom prst="rect">
+            <a:avLst/>
+          </a:prstGeom>
+          <a:solidFill>
+            <a:srgbClr val="EAEAE8"/>
+          </a:solidFill>
+          <a:ln>
+            <a:noFill/>
+          </a:ln>
+          <a:effectLst/>
+        </p:spPr>
+        <p:style>
+          <a:lnRef idx="1">
+            <a:schemeClr val="accent1"/>
+          </a:lnRef>
+          <a:fillRef idx="3">
+            <a:schemeClr val="accent1"/>
+          </a:fillRef>
+          <a:effectRef idx="2">
+            <a:schemeClr val="accent1"/>
+          </a:effectRef>
+          <a:fontRef idx="minor">
+            <a:schemeClr val="lt1"/>
+          </a:fontRef>
+        </p:style>
+        <p:txBody>
+          <a:bodyPr rtlCol="0" anchor="ctr"/>
+          <a:lstStyle/>
+          <a:p/>
+        </p:txBody>
+      </p:sp>
+      <p:sp>
+        <p:nvSpPr>
+          <p:cNvPr id="19" name="TextBox 18"/>
+          <p:cNvSpPr txBox="1"/>
+          <p:nvPr/>
+        </p:nvSpPr>
+        <p:spPr>
+          <a:xfrm>
+            <a:off x="932688" y="4014215"/>
+            <a:ext cx="3291492" cy="338328"/>
+          </a:xfrm>
+          <a:prstGeom prst="rect">
+            <a:avLst/>
+          </a:prstGeom>
+          <a:noFill/>
+        </p:spPr>
+        <p:txBody>
+          <a:bodyPr wrap="square" lIns="0" rIns="0" tIns="0" bIns="0" anchor="t">
+            <a:spAutoFit/>
+          </a:bodyPr>
+          <a:lstStyle/>
+          <a:p>
+            <a:pPr algn="l">
+              <a:lnSpc>
+                <a:spcPct val="132000"/>
+              </a:lnSpc>
+            </a:pPr>
+            <a:r>
+              <a:rPr sz="1800" b="1" i="0">
+                <a:solidFill>
+                  <a:srgbClr val="1D6B8F"/>
+                </a:solidFill>
+                <a:latin typeface="Verdana"/>
+              </a:rPr>
+              <a:t>4. Les conditions</a:t>
+            </a:r>
+          </a:p>
+        </p:txBody>
+      </p:sp>
+      <p:sp>
+        <p:nvSpPr>
+          <p:cNvPr id="20" name="TextBox 19"/>
+          <p:cNvSpPr txBox="1"/>
+          <p:nvPr/>
+        </p:nvSpPr>
+        <p:spPr>
+          <a:xfrm>
+            <a:off x="4443636" y="4014215"/>
+            <a:ext cx="6595914" cy="338328"/>
+          </a:xfrm>
+          <a:prstGeom prst="rect">
+            <a:avLst/>
+          </a:prstGeom>
+          <a:noFill/>
+        </p:spPr>
+        <p:txBody>
+          <a:bodyPr wrap="square" lIns="0" rIns="0" tIns="0" bIns="0" anchor="t">
+            <a:spAutoFit/>
+          </a:bodyPr>
+          <a:lstStyle/>
+          <a:p>
+            <a:pPr algn="l">
+              <a:lnSpc>
+                <a:spcPct val="132000"/>
+              </a:lnSpc>
+            </a:pPr>
+            <a:r>
+              <a:rPr sz="1800" b="0" i="0">
+                <a:solidFill>
+                  <a:srgbClr val="3A3D40"/>
+                </a:solidFill>
+                <a:latin typeface="Verdana"/>
+              </a:rPr>
+              <a:t>Heures, statut, salaire, avantages.</a:t>
+            </a:r>
+          </a:p>
+        </p:txBody>
+      </p:sp>
+      <p:sp>
+        <p:nvSpPr>
+          <p:cNvPr id="21" name="Rounded Rectangle 20"/>
+          <p:cNvSpPr/>
+          <p:nvPr/>
+        </p:nvSpPr>
+        <p:spPr>
+          <a:xfrm>
+            <a:off x="566928" y="4846320"/>
+            <a:ext cx="11057839" cy="843534"/>
           </a:xfrm>
           <a:prstGeom prst="roundRect">
             <a:avLst>
-              <a:gd name="adj" fmla="val 26134"/>
+              <a:gd name="adj" fmla="val 17344"/>
             </a:avLst>
           </a:prstGeom>
           <a:solidFill>
-            <a:srgbClr val="FFFFFF"/>
+            <a:srgbClr val="FBFBFA"/>
           </a:solidFill>
           <a:ln w="12700">
             <a:solidFill>
@@ -11656,58 +13350,14 @@
       </p:sp>
       <p:sp>
         <p:nvSpPr>
-          <p:cNvPr id="13" name="Rounded Rectangle 12"/>
-          <p:cNvSpPr/>
-          <p:nvPr/>
-        </p:nvSpPr>
-        <p:spPr>
-          <a:xfrm>
-            <a:off x="841247" y="2924556"/>
-            <a:ext cx="365760" cy="365760"/>
-          </a:xfrm>
-          <a:prstGeom prst="roundRect">
-            <a:avLst>
-              <a:gd name="adj" fmla="val 32500"/>
-            </a:avLst>
-          </a:prstGeom>
-          <a:solidFill>
-            <a:srgbClr val="E7F0F6"/>
-          </a:solidFill>
-          <a:ln>
-            <a:noFill/>
-          </a:ln>
-          <a:effectLst/>
-        </p:spPr>
-        <p:style>
-          <a:lnRef idx="1">
-            <a:schemeClr val="accent1"/>
-          </a:lnRef>
-          <a:fillRef idx="3">
-            <a:schemeClr val="accent1"/>
-          </a:fillRef>
-          <a:effectRef idx="2">
-            <a:schemeClr val="accent1"/>
-          </a:effectRef>
-          <a:fontRef idx="minor">
-            <a:schemeClr val="lt1"/>
-          </a:fontRef>
-        </p:style>
-        <p:txBody>
-          <a:bodyPr rtlCol="0" anchor="ctr"/>
-          <a:lstStyle/>
-          <a:p/>
-        </p:txBody>
-      </p:sp>
-      <p:sp>
-        <p:nvSpPr>
-          <p:cNvPr id="14" name="TextBox 13"/>
+          <p:cNvPr id="22" name="TextBox 21"/>
           <p:cNvSpPr txBox="1"/>
           <p:nvPr/>
         </p:nvSpPr>
         <p:spPr>
           <a:xfrm>
-            <a:off x="841247" y="2988564"/>
-            <a:ext cx="365760" cy="256032"/>
+            <a:off x="969264" y="5102352"/>
+            <a:ext cx="10234879" cy="386334"/>
           </a:xfrm>
           <a:prstGeom prst="rect">
             <a:avLst/>
@@ -11720,730 +13370,19 @@
           </a:bodyPr>
           <a:lstStyle/>
           <a:p>
-            <a:pPr algn="ctr">
+            <a:pPr algn="l">
               <a:lnSpc>
-                <a:spcPct val="135000"/>
+                <a:spcPct val="145000"/>
               </a:lnSpc>
             </a:pPr>
             <a:r>
-              <a:rPr sz="1500" b="1" i="0">
-                <a:solidFill>
-                  <a:srgbClr val="1D6B8F"/>
+              <a:rPr sz="1800" b="0" i="0">
+                <a:solidFill>
+                  <a:srgbClr val="4B4F52"/>
                 </a:solidFill>
                 <a:latin typeface="Verdana"/>
               </a:rPr>
-              <a:t>2</a:t>
-            </a:r>
-          </a:p>
-        </p:txBody>
-      </p:sp>
-      <p:sp>
-        <p:nvSpPr>
-          <p:cNvPr id="15" name="TextBox 14"/>
-          <p:cNvSpPr txBox="1"/>
-          <p:nvPr/>
-        </p:nvSpPr>
-        <p:spPr>
-          <a:xfrm>
-            <a:off x="1344168" y="2982975"/>
-            <a:ext cx="10097719" cy="285496"/>
-          </a:xfrm>
-          <a:prstGeom prst="rect">
-            <a:avLst/>
-          </a:prstGeom>
-          <a:noFill/>
-        </p:spPr>
-        <p:txBody>
-          <a:bodyPr wrap="square" lIns="0" rIns="0" tIns="0" bIns="0" anchor="t">
-            <a:spAutoFit/>
-          </a:bodyPr>
-          <a:lstStyle/>
-          <a:p>
-            <a:pPr algn="l">
-              <a:lnSpc>
-                <a:spcPct val="140000"/>
-              </a:lnSpc>
-            </a:pPr>
-            <a:r>
-              <a:rPr sz="1400" b="0" i="0">
-                <a:solidFill>
-                  <a:srgbClr val="3A3D40"/>
-                </a:solidFill>
-                <a:latin typeface="Verdana"/>
-              </a:rPr>
-              <a:t>« Signaler les écarts » est une des tâches.</a:t>
-            </a:r>
-          </a:p>
-        </p:txBody>
-      </p:sp>
-      <p:sp>
-        <p:nvSpPr>
-          <p:cNvPr id="16" name="Rounded Rectangle 15"/>
-          <p:cNvSpPr/>
-          <p:nvPr/>
-        </p:nvSpPr>
-        <p:spPr>
-          <a:xfrm>
-            <a:off x="566928" y="3515359"/>
-            <a:ext cx="11057839" cy="559816"/>
-          </a:xfrm>
-          <a:prstGeom prst="roundRect">
-            <a:avLst>
-              <a:gd name="adj" fmla="val 26134"/>
-            </a:avLst>
-          </a:prstGeom>
-          <a:solidFill>
-            <a:srgbClr val="FFFFFF"/>
-          </a:solidFill>
-          <a:ln w="12700">
-            <a:solidFill>
-              <a:srgbClr val="EAEAE8"/>
-            </a:solidFill>
-          </a:ln>
-          <a:effectLst/>
-        </p:spPr>
-        <p:style>
-          <a:lnRef idx="1">
-            <a:schemeClr val="accent1"/>
-          </a:lnRef>
-          <a:fillRef idx="3">
-            <a:schemeClr val="accent1"/>
-          </a:fillRef>
-          <a:effectRef idx="2">
-            <a:schemeClr val="accent1"/>
-          </a:effectRef>
-          <a:fontRef idx="minor">
-            <a:schemeClr val="lt1"/>
-          </a:fontRef>
-        </p:style>
-        <p:txBody>
-          <a:bodyPr rtlCol="0" anchor="ctr"/>
-          <a:lstStyle/>
-          <a:p/>
-        </p:txBody>
-      </p:sp>
-      <p:sp>
-        <p:nvSpPr>
-          <p:cNvPr id="17" name="Rounded Rectangle 16"/>
-          <p:cNvSpPr/>
-          <p:nvPr/>
-        </p:nvSpPr>
-        <p:spPr>
-          <a:xfrm>
-            <a:off x="841247" y="3612388"/>
-            <a:ext cx="365760" cy="365760"/>
-          </a:xfrm>
-          <a:prstGeom prst="roundRect">
-            <a:avLst>
-              <a:gd name="adj" fmla="val 32500"/>
-            </a:avLst>
-          </a:prstGeom>
-          <a:solidFill>
-            <a:srgbClr val="E7F0F6"/>
-          </a:solidFill>
-          <a:ln>
-            <a:noFill/>
-          </a:ln>
-          <a:effectLst/>
-        </p:spPr>
-        <p:style>
-          <a:lnRef idx="1">
-            <a:schemeClr val="accent1"/>
-          </a:lnRef>
-          <a:fillRef idx="3">
-            <a:schemeClr val="accent1"/>
-          </a:fillRef>
-          <a:effectRef idx="2">
-            <a:schemeClr val="accent1"/>
-          </a:effectRef>
-          <a:fontRef idx="minor">
-            <a:schemeClr val="lt1"/>
-          </a:fontRef>
-        </p:style>
-        <p:txBody>
-          <a:bodyPr rtlCol="0" anchor="ctr"/>
-          <a:lstStyle/>
-          <a:p/>
-        </p:txBody>
-      </p:sp>
-      <p:sp>
-        <p:nvSpPr>
-          <p:cNvPr id="18" name="TextBox 17"/>
-          <p:cNvSpPr txBox="1"/>
-          <p:nvPr/>
-        </p:nvSpPr>
-        <p:spPr>
-          <a:xfrm>
-            <a:off x="841247" y="3676395"/>
-            <a:ext cx="365760" cy="256032"/>
-          </a:xfrm>
-          <a:prstGeom prst="rect">
-            <a:avLst/>
-          </a:prstGeom>
-          <a:noFill/>
-        </p:spPr>
-        <p:txBody>
-          <a:bodyPr wrap="square" lIns="0" rIns="0" tIns="0" bIns="0" anchor="t">
-            <a:spAutoFit/>
-          </a:bodyPr>
-          <a:lstStyle/>
-          <a:p>
-            <a:pPr algn="ctr">
-              <a:lnSpc>
-                <a:spcPct val="135000"/>
-              </a:lnSpc>
-            </a:pPr>
-            <a:r>
-              <a:rPr sz="1500" b="1" i="0">
-                <a:solidFill>
-                  <a:srgbClr val="1D6B8F"/>
-                </a:solidFill>
-                <a:latin typeface="Verdana"/>
-              </a:rPr>
-              <a:t>3</a:t>
-            </a:r>
-          </a:p>
-        </p:txBody>
-      </p:sp>
-      <p:sp>
-        <p:nvSpPr>
-          <p:cNvPr id="19" name="TextBox 18"/>
-          <p:cNvSpPr txBox="1"/>
-          <p:nvPr/>
-        </p:nvSpPr>
-        <p:spPr>
-          <a:xfrm>
-            <a:off x="1344168" y="3670807"/>
-            <a:ext cx="10097719" cy="285496"/>
-          </a:xfrm>
-          <a:prstGeom prst="rect">
-            <a:avLst/>
-          </a:prstGeom>
-          <a:noFill/>
-        </p:spPr>
-        <p:txBody>
-          <a:bodyPr wrap="square" lIns="0" rIns="0" tIns="0" bIns="0" anchor="t">
-            <a:spAutoFit/>
-          </a:bodyPr>
-          <a:lstStyle/>
-          <a:p>
-            <a:pPr algn="l">
-              <a:lnSpc>
-                <a:spcPct val="140000"/>
-              </a:lnSpc>
-            </a:pPr>
-            <a:r>
-              <a:rPr sz="1400" b="0" i="0">
-                <a:solidFill>
-                  <a:srgbClr val="3A3D40"/>
-                </a:solidFill>
-                <a:latin typeface="Verdana"/>
-              </a:rPr>
-              <a:t>Connaître le logiciel est obligatoire.</a:t>
-            </a:r>
-          </a:p>
-        </p:txBody>
-      </p:sp>
-      <p:sp>
-        <p:nvSpPr>
-          <p:cNvPr id="20" name="Rounded Rectangle 19"/>
-          <p:cNvSpPr/>
-          <p:nvPr/>
-        </p:nvSpPr>
-        <p:spPr>
-          <a:xfrm>
-            <a:off x="566928" y="4203192"/>
-            <a:ext cx="11057839" cy="559816"/>
-          </a:xfrm>
-          <a:prstGeom prst="roundRect">
-            <a:avLst>
-              <a:gd name="adj" fmla="val 26134"/>
-            </a:avLst>
-          </a:prstGeom>
-          <a:solidFill>
-            <a:srgbClr val="FFFFFF"/>
-          </a:solidFill>
-          <a:ln w="12700">
-            <a:solidFill>
-              <a:srgbClr val="EAEAE8"/>
-            </a:solidFill>
-          </a:ln>
-          <a:effectLst/>
-        </p:spPr>
-        <p:style>
-          <a:lnRef idx="1">
-            <a:schemeClr val="accent1"/>
-          </a:lnRef>
-          <a:fillRef idx="3">
-            <a:schemeClr val="accent1"/>
-          </a:fillRef>
-          <a:effectRef idx="2">
-            <a:schemeClr val="accent1"/>
-          </a:effectRef>
-          <a:fontRef idx="minor">
-            <a:schemeClr val="lt1"/>
-          </a:fontRef>
-        </p:style>
-        <p:txBody>
-          <a:bodyPr rtlCol="0" anchor="ctr"/>
-          <a:lstStyle/>
-          <a:p/>
-        </p:txBody>
-      </p:sp>
-      <p:sp>
-        <p:nvSpPr>
-          <p:cNvPr id="21" name="Rounded Rectangle 20"/>
-          <p:cNvSpPr/>
-          <p:nvPr/>
-        </p:nvSpPr>
-        <p:spPr>
-          <a:xfrm>
-            <a:off x="841247" y="4300220"/>
-            <a:ext cx="365760" cy="365760"/>
-          </a:xfrm>
-          <a:prstGeom prst="roundRect">
-            <a:avLst>
-              <a:gd name="adj" fmla="val 32500"/>
-            </a:avLst>
-          </a:prstGeom>
-          <a:solidFill>
-            <a:srgbClr val="E7F0F6"/>
-          </a:solidFill>
-          <a:ln>
-            <a:noFill/>
-          </a:ln>
-          <a:effectLst/>
-        </p:spPr>
-        <p:style>
-          <a:lnRef idx="1">
-            <a:schemeClr val="accent1"/>
-          </a:lnRef>
-          <a:fillRef idx="3">
-            <a:schemeClr val="accent1"/>
-          </a:fillRef>
-          <a:effectRef idx="2">
-            <a:schemeClr val="accent1"/>
-          </a:effectRef>
-          <a:fontRef idx="minor">
-            <a:schemeClr val="lt1"/>
-          </a:fontRef>
-        </p:style>
-        <p:txBody>
-          <a:bodyPr rtlCol="0" anchor="ctr"/>
-          <a:lstStyle/>
-          <a:p/>
-        </p:txBody>
-      </p:sp>
-      <p:sp>
-        <p:nvSpPr>
-          <p:cNvPr id="22" name="TextBox 21"/>
-          <p:cNvSpPr txBox="1"/>
-          <p:nvPr/>
-        </p:nvSpPr>
-        <p:spPr>
-          <a:xfrm>
-            <a:off x="841247" y="4364228"/>
-            <a:ext cx="365760" cy="256032"/>
-          </a:xfrm>
-          <a:prstGeom prst="rect">
-            <a:avLst/>
-          </a:prstGeom>
-          <a:noFill/>
-        </p:spPr>
-        <p:txBody>
-          <a:bodyPr wrap="square" lIns="0" rIns="0" tIns="0" bIns="0" anchor="t">
-            <a:spAutoFit/>
-          </a:bodyPr>
-          <a:lstStyle/>
-          <a:p>
-            <a:pPr algn="ctr">
-              <a:lnSpc>
-                <a:spcPct val="135000"/>
-              </a:lnSpc>
-            </a:pPr>
-            <a:r>
-              <a:rPr sz="1500" b="1" i="0">
-                <a:solidFill>
-                  <a:srgbClr val="1D6B8F"/>
-                </a:solidFill>
-                <a:latin typeface="Verdana"/>
-              </a:rPr>
-              <a:t>4</a:t>
-            </a:r>
-          </a:p>
-        </p:txBody>
-      </p:sp>
-      <p:sp>
-        <p:nvSpPr>
-          <p:cNvPr id="23" name="TextBox 22"/>
-          <p:cNvSpPr txBox="1"/>
-          <p:nvPr/>
-        </p:nvSpPr>
-        <p:spPr>
-          <a:xfrm>
-            <a:off x="1344168" y="4358640"/>
-            <a:ext cx="10097719" cy="285496"/>
-          </a:xfrm>
-          <a:prstGeom prst="rect">
-            <a:avLst/>
-          </a:prstGeom>
-          <a:noFill/>
-        </p:spPr>
-        <p:txBody>
-          <a:bodyPr wrap="square" lIns="0" rIns="0" tIns="0" bIns="0" anchor="t">
-            <a:spAutoFit/>
-          </a:bodyPr>
-          <a:lstStyle/>
-          <a:p>
-            <a:pPr algn="l">
-              <a:lnSpc>
-                <a:spcPct val="140000"/>
-              </a:lnSpc>
-            </a:pPr>
-            <a:r>
-              <a:rPr sz="1400" b="0" i="0">
-                <a:solidFill>
-                  <a:srgbClr val="3A3D40"/>
-                </a:solidFill>
-                <a:latin typeface="Verdana"/>
-              </a:rPr>
-              <a:t>Deux ans d'expérience sont requis.</a:t>
-            </a:r>
-          </a:p>
-        </p:txBody>
-      </p:sp>
-      <p:sp>
-        <p:nvSpPr>
-          <p:cNvPr id="24" name="Rounded Rectangle 23"/>
-          <p:cNvSpPr/>
-          <p:nvPr/>
-        </p:nvSpPr>
-        <p:spPr>
-          <a:xfrm>
-            <a:off x="566928" y="4891023"/>
-            <a:ext cx="11057839" cy="559816"/>
-          </a:xfrm>
-          <a:prstGeom prst="roundRect">
-            <a:avLst>
-              <a:gd name="adj" fmla="val 26134"/>
-            </a:avLst>
-          </a:prstGeom>
-          <a:solidFill>
-            <a:srgbClr val="FFFFFF"/>
-          </a:solidFill>
-          <a:ln w="12700">
-            <a:solidFill>
-              <a:srgbClr val="EAEAE8"/>
-            </a:solidFill>
-          </a:ln>
-          <a:effectLst/>
-        </p:spPr>
-        <p:style>
-          <a:lnRef idx="1">
-            <a:schemeClr val="accent1"/>
-          </a:lnRef>
-          <a:fillRef idx="3">
-            <a:schemeClr val="accent1"/>
-          </a:fillRef>
-          <a:effectRef idx="2">
-            <a:schemeClr val="accent1"/>
-          </a:effectRef>
-          <a:fontRef idx="minor">
-            <a:schemeClr val="lt1"/>
-          </a:fontRef>
-        </p:style>
-        <p:txBody>
-          <a:bodyPr rtlCol="0" anchor="ctr"/>
-          <a:lstStyle/>
-          <a:p/>
-        </p:txBody>
-      </p:sp>
-      <p:sp>
-        <p:nvSpPr>
-          <p:cNvPr id="25" name="Rounded Rectangle 24"/>
-          <p:cNvSpPr/>
-          <p:nvPr/>
-        </p:nvSpPr>
-        <p:spPr>
-          <a:xfrm>
-            <a:off x="841247" y="4988051"/>
-            <a:ext cx="365760" cy="365760"/>
-          </a:xfrm>
-          <a:prstGeom prst="roundRect">
-            <a:avLst>
-              <a:gd name="adj" fmla="val 32500"/>
-            </a:avLst>
-          </a:prstGeom>
-          <a:solidFill>
-            <a:srgbClr val="E7F0F6"/>
-          </a:solidFill>
-          <a:ln>
-            <a:noFill/>
-          </a:ln>
-          <a:effectLst/>
-        </p:spPr>
-        <p:style>
-          <a:lnRef idx="1">
-            <a:schemeClr val="accent1"/>
-          </a:lnRef>
-          <a:fillRef idx="3">
-            <a:schemeClr val="accent1"/>
-          </a:fillRef>
-          <a:effectRef idx="2">
-            <a:schemeClr val="accent1"/>
-          </a:effectRef>
-          <a:fontRef idx="minor">
-            <a:schemeClr val="lt1"/>
-          </a:fontRef>
-        </p:style>
-        <p:txBody>
-          <a:bodyPr rtlCol="0" anchor="ctr"/>
-          <a:lstStyle/>
-          <a:p/>
-        </p:txBody>
-      </p:sp>
-      <p:sp>
-        <p:nvSpPr>
-          <p:cNvPr id="26" name="TextBox 25"/>
-          <p:cNvSpPr txBox="1"/>
-          <p:nvPr/>
-        </p:nvSpPr>
-        <p:spPr>
-          <a:xfrm>
-            <a:off x="841247" y="5052059"/>
-            <a:ext cx="365760" cy="256032"/>
-          </a:xfrm>
-          <a:prstGeom prst="rect">
-            <a:avLst/>
-          </a:prstGeom>
-          <a:noFill/>
-        </p:spPr>
-        <p:txBody>
-          <a:bodyPr wrap="square" lIns="0" rIns="0" tIns="0" bIns="0" anchor="t">
-            <a:spAutoFit/>
-          </a:bodyPr>
-          <a:lstStyle/>
-          <a:p>
-            <a:pPr algn="ctr">
-              <a:lnSpc>
-                <a:spcPct val="135000"/>
-              </a:lnSpc>
-            </a:pPr>
-            <a:r>
-              <a:rPr sz="1500" b="1" i="0">
-                <a:solidFill>
-                  <a:srgbClr val="1D6B8F"/>
-                </a:solidFill>
-                <a:latin typeface="Verdana"/>
-              </a:rPr>
-              <a:t>5</a:t>
-            </a:r>
-          </a:p>
-        </p:txBody>
-      </p:sp>
-      <p:sp>
-        <p:nvSpPr>
-          <p:cNvPr id="27" name="TextBox 26"/>
-          <p:cNvSpPr txBox="1"/>
-          <p:nvPr/>
-        </p:nvSpPr>
-        <p:spPr>
-          <a:xfrm>
-            <a:off x="1344168" y="5046471"/>
-            <a:ext cx="10097719" cy="285496"/>
-          </a:xfrm>
-          <a:prstGeom prst="rect">
-            <a:avLst/>
-          </a:prstGeom>
-          <a:noFill/>
-        </p:spPr>
-        <p:txBody>
-          <a:bodyPr wrap="square" lIns="0" rIns="0" tIns="0" bIns="0" anchor="t">
-            <a:spAutoFit/>
-          </a:bodyPr>
-          <a:lstStyle/>
-          <a:p>
-            <a:pPr algn="l">
-              <a:lnSpc>
-                <a:spcPct val="140000"/>
-              </a:lnSpc>
-            </a:pPr>
-            <a:r>
-              <a:rPr sz="1400" b="0" i="0">
-                <a:solidFill>
-                  <a:srgbClr val="3A3D40"/>
-                </a:solidFill>
-                <a:latin typeface="Verdana"/>
-              </a:rPr>
-              <a:t>Un poste permanent est un contrat de six mois.</a:t>
-            </a:r>
-          </a:p>
-        </p:txBody>
-      </p:sp>
-      <p:sp>
-        <p:nvSpPr>
-          <p:cNvPr id="28" name="Rounded Rectangle 27"/>
-          <p:cNvSpPr/>
-          <p:nvPr/>
-        </p:nvSpPr>
-        <p:spPr>
-          <a:xfrm>
-            <a:off x="566928" y="5578856"/>
-            <a:ext cx="11057839" cy="559816"/>
-          </a:xfrm>
-          <a:prstGeom prst="roundRect">
-            <a:avLst>
-              <a:gd name="adj" fmla="val 26134"/>
-            </a:avLst>
-          </a:prstGeom>
-          <a:solidFill>
-            <a:srgbClr val="FFFFFF"/>
-          </a:solidFill>
-          <a:ln w="12700">
-            <a:solidFill>
-              <a:srgbClr val="EAEAE8"/>
-            </a:solidFill>
-          </a:ln>
-          <a:effectLst/>
-        </p:spPr>
-        <p:style>
-          <a:lnRef idx="1">
-            <a:schemeClr val="accent1"/>
-          </a:lnRef>
-          <a:fillRef idx="3">
-            <a:schemeClr val="accent1"/>
-          </a:fillRef>
-          <a:effectRef idx="2">
-            <a:schemeClr val="accent1"/>
-          </a:effectRef>
-          <a:fontRef idx="minor">
-            <a:schemeClr val="lt1"/>
-          </a:fontRef>
-        </p:style>
-        <p:txBody>
-          <a:bodyPr rtlCol="0" anchor="ctr"/>
-          <a:lstStyle/>
-          <a:p/>
-        </p:txBody>
-      </p:sp>
-      <p:sp>
-        <p:nvSpPr>
-          <p:cNvPr id="29" name="Rounded Rectangle 28"/>
-          <p:cNvSpPr/>
-          <p:nvPr/>
-        </p:nvSpPr>
-        <p:spPr>
-          <a:xfrm>
-            <a:off x="841247" y="5675884"/>
-            <a:ext cx="365760" cy="365760"/>
-          </a:xfrm>
-          <a:prstGeom prst="roundRect">
-            <a:avLst>
-              <a:gd name="adj" fmla="val 32500"/>
-            </a:avLst>
-          </a:prstGeom>
-          <a:solidFill>
-            <a:srgbClr val="E7F0F6"/>
-          </a:solidFill>
-          <a:ln>
-            <a:noFill/>
-          </a:ln>
-          <a:effectLst/>
-        </p:spPr>
-        <p:style>
-          <a:lnRef idx="1">
-            <a:schemeClr val="accent1"/>
-          </a:lnRef>
-          <a:fillRef idx="3">
-            <a:schemeClr val="accent1"/>
-          </a:fillRef>
-          <a:effectRef idx="2">
-            <a:schemeClr val="accent1"/>
-          </a:effectRef>
-          <a:fontRef idx="minor">
-            <a:schemeClr val="lt1"/>
-          </a:fontRef>
-        </p:style>
-        <p:txBody>
-          <a:bodyPr rtlCol="0" anchor="ctr"/>
-          <a:lstStyle/>
-          <a:p/>
-        </p:txBody>
-      </p:sp>
-      <p:sp>
-        <p:nvSpPr>
-          <p:cNvPr id="30" name="TextBox 29"/>
-          <p:cNvSpPr txBox="1"/>
-          <p:nvPr/>
-        </p:nvSpPr>
-        <p:spPr>
-          <a:xfrm>
-            <a:off x="841247" y="5739892"/>
-            <a:ext cx="365760" cy="256032"/>
-          </a:xfrm>
-          <a:prstGeom prst="rect">
-            <a:avLst/>
-          </a:prstGeom>
-          <a:noFill/>
-        </p:spPr>
-        <p:txBody>
-          <a:bodyPr wrap="square" lIns="0" rIns="0" tIns="0" bIns="0" anchor="t">
-            <a:spAutoFit/>
-          </a:bodyPr>
-          <a:lstStyle/>
-          <a:p>
-            <a:pPr algn="ctr">
-              <a:lnSpc>
-                <a:spcPct val="135000"/>
-              </a:lnSpc>
-            </a:pPr>
-            <a:r>
-              <a:rPr sz="1500" b="1" i="0">
-                <a:solidFill>
-                  <a:srgbClr val="1D6B8F"/>
-                </a:solidFill>
-                <a:latin typeface="Verdana"/>
-              </a:rPr>
-              <a:t>6</a:t>
-            </a:r>
-          </a:p>
-        </p:txBody>
-      </p:sp>
-      <p:sp>
-        <p:nvSpPr>
-          <p:cNvPr id="31" name="TextBox 30"/>
-          <p:cNvSpPr txBox="1"/>
-          <p:nvPr/>
-        </p:nvSpPr>
-        <p:spPr>
-          <a:xfrm>
-            <a:off x="1344168" y="5734304"/>
-            <a:ext cx="10097719" cy="285496"/>
-          </a:xfrm>
-          <a:prstGeom prst="rect">
-            <a:avLst/>
-          </a:prstGeom>
-          <a:noFill/>
-        </p:spPr>
-        <p:txBody>
-          <a:bodyPr wrap="square" lIns="0" rIns="0" tIns="0" bIns="0" anchor="t">
-            <a:spAutoFit/>
-          </a:bodyPr>
-          <a:lstStyle/>
-          <a:p>
-            <a:pPr algn="l">
-              <a:lnSpc>
-                <a:spcPct val="140000"/>
-              </a:lnSpc>
-            </a:pPr>
-            <a:r>
-              <a:rPr sz="1400" b="0" i="0">
-                <a:solidFill>
-                  <a:srgbClr val="3A3D40"/>
-                </a:solidFill>
-                <a:latin typeface="Verdana"/>
-              </a:rPr>
-              <a:t>Marisol devrait postuler malgré l'atout manquant.</a:t>
+              <a:t>L'ordre varie un peu d'une offre à l'autre. Les quatre parties, elles, y sont toujours.</a:t>
             </a:r>
           </a:p>
         </p:txBody>
